--- a/reports/20260211-UTT-MS_EBDE-Fil_Rouge-Chomage_France.pptx
+++ b/reports/20260211-UTT-MS_EBDE-Fil_Rouge-Chomage_France.pptx
@@ -30,8 +30,8 @@
 </file>
 
 <file path=ppt/slideLayouts/slideLayout1.xml><?xml version="1.0" encoding="utf-8"?>
-<p:sldLayout xmlns:a="http://schemas.openxmlformats.org/drawingml/2006/main" xmlns:p="http://schemas.openxmlformats.org/presentationml/2006/main" xmlns:r="http://schemas.openxmlformats.org/officeDocument/2006/relationships" xmlns:p14="http://schemas.microsoft.com/office/powerpoint/2010/main" xmlns:p15="http://schemas.microsoft.com/office/powerpoint/2012/main" xmlns:mc="http://schemas.openxmlformats.org/markup-compatibility/2006" type="title" preserve="1">
-  <p:cSld name="Diapositive de titre">
+<p:sldLayout xmlns:a="http://schemas.openxmlformats.org/drawingml/2006/main" xmlns:p="http://schemas.openxmlformats.org/presentationml/2006/main" xmlns:r="http://schemas.openxmlformats.org/officeDocument/2006/relationships" xmlns:p14="http://schemas.microsoft.com/office/powerpoint/2010/main" xmlns:p15="http://schemas.microsoft.com/office/powerpoint/2012/main" xmlns:mc="http://schemas.openxmlformats.org/markup-compatibility/2006" type="blank" preserve="1">
+  <p:cSld name="Vide">
     <p:bg>
       <p:bgPr>
         <a:blipFill rotWithShape="0">
@@ -61,13 +61,13 @@
             <a:spLocks noGrp="1"/>
           </p:cNvSpPr>
           <p:nvPr>
-            <p:ph type="title"/>
+            <p:ph type="dt" idx="1"/>
           </p:nvPr>
         </p:nvSpPr>
         <p:spPr>
           <a:xfrm>
-            <a:off x="1523880" y="1122480"/>
-            <a:ext cx="9143640" cy="2387160"/>
+            <a:off x="838080" y="6356520"/>
+            <a:ext cx="2742480" cy="364320"/>
           </a:xfrm>
           <a:prstGeom prst="rect">
             <a:avLst/>
@@ -78,133 +78,60 @@
           </a:ln>
         </p:spPr>
         <p:txBody>
-          <a:bodyPr lIns="91440" rIns="91440" tIns="45720" bIns="45720" anchor="b">
+          <a:bodyPr lIns="91440" rIns="91440" tIns="45720" bIns="45720" anchor="ctr">
             <a:noAutofit/>
           </a:bodyPr>
-          <a:p>
-            <a:pPr indent="0" algn="ctr" defTabSz="914400">
-              <a:lnSpc>
-                <a:spcPct val="90000"/>
+          <a:lstStyle>
+            <a:lvl1pPr indent="0" defTabSz="914400">
+              <a:lnSpc>
+                <a:spcPct val="100000"/>
               </a:lnSpc>
               <a:buNone/>
-            </a:pPr>
-            <a:r>
-              <a:rPr lang="fr-FR" sz="6000" b="0" u="none" strike="noStrike">
-                <a:solidFill>
-                  <a:schemeClr val="dk1"/>
-                </a:solidFill>
-                <a:effectLst/>
-                <a:uFillTx/>
-                <a:latin typeface="Calibri Light"/>
-              </a:rPr>
-              <a:t>M</a:t>
-            </a:r>
-            <a:r>
-              <a:rPr lang="fr-FR" sz="6000" b="0" u="none" strike="noStrike">
-                <a:solidFill>
-                  <a:schemeClr val="dk1"/>
-                </a:solidFill>
-                <a:effectLst/>
-                <a:uFillTx/>
-                <a:latin typeface="Calibri Light"/>
-              </a:rPr>
-              <a:t>od</a:t>
-            </a:r>
-            <a:r>
-              <a:rPr lang="fr-FR" sz="6000" b="0" u="none" strike="noStrike">
-                <a:solidFill>
-                  <a:schemeClr val="dk1"/>
-                </a:solidFill>
-                <a:effectLst/>
-                <a:uFillTx/>
-                <a:latin typeface="Calibri Light"/>
-              </a:rPr>
-              <a:t>ifi</a:t>
-            </a:r>
-            <a:r>
-              <a:rPr lang="fr-FR" sz="6000" b="0" u="none" strike="noStrike">
-                <a:solidFill>
-                  <a:schemeClr val="dk1"/>
-                </a:solidFill>
-                <a:effectLst/>
-                <a:uFillTx/>
-                <a:latin typeface="Calibri Light"/>
-              </a:rPr>
-              <a:t>ez </a:t>
-            </a:r>
-            <a:r>
-              <a:rPr lang="fr-FR" sz="6000" b="0" u="none" strike="noStrike">
-                <a:solidFill>
-                  <a:schemeClr val="dk1"/>
-                </a:solidFill>
-                <a:effectLst/>
-                <a:uFillTx/>
-                <a:latin typeface="Calibri Light"/>
-              </a:rPr>
-              <a:t>le </a:t>
-            </a:r>
-            <a:r>
-              <a:rPr lang="fr-FR" sz="6000" b="0" u="none" strike="noStrike">
-                <a:solidFill>
-                  <a:schemeClr val="dk1"/>
-                </a:solidFill>
-                <a:effectLst/>
-                <a:uFillTx/>
-                <a:latin typeface="Calibri Light"/>
-              </a:rPr>
-              <a:t>sty</a:t>
-            </a:r>
-            <a:r>
-              <a:rPr lang="fr-FR" sz="6000" b="0" u="none" strike="noStrike">
-                <a:solidFill>
-                  <a:schemeClr val="dk1"/>
-                </a:solidFill>
-                <a:effectLst/>
-                <a:uFillTx/>
-                <a:latin typeface="Calibri Light"/>
-              </a:rPr>
-              <a:t>le </a:t>
-            </a:r>
-            <a:r>
-              <a:rPr lang="fr-FR" sz="6000" b="0" u="none" strike="noStrike">
-                <a:solidFill>
-                  <a:schemeClr val="dk1"/>
-                </a:solidFill>
-                <a:effectLst/>
-                <a:uFillTx/>
-                <a:latin typeface="Calibri Light"/>
-              </a:rPr>
-              <a:t>du </a:t>
-            </a:r>
-            <a:r>
-              <a:rPr lang="fr-FR" sz="6000" b="0" u="none" strike="noStrike">
-                <a:solidFill>
-                  <a:schemeClr val="dk1"/>
-                </a:solidFill>
-                <a:effectLst/>
-                <a:uFillTx/>
-                <a:latin typeface="Calibri Light"/>
-              </a:rPr>
-              <a:t>titr</a:t>
-            </a:r>
-            <a:r>
-              <a:rPr lang="fr-FR" sz="6000" b="0" u="none" strike="noStrike">
-                <a:solidFill>
-                  <a:schemeClr val="dk1"/>
-                </a:solidFill>
-                <a:effectLst/>
-                <a:uFillTx/>
-                <a:latin typeface="Calibri Light"/>
-              </a:rPr>
-              <a:t>e</a:t>
-            </a:r>
-            <a:endParaRPr lang="fr-FR" sz="6000" b="0" u="none" strike="noStrike">
-              <a:solidFill>
-                <a:schemeClr val="dk1"/>
-              </a:solidFill>
-              <a:effectLst/>
-              <a:uFillTx/>
-              <a:latin typeface="Calibri"/>
+              <a:tabLst>
+                <a:tab algn="l" pos="0"/>
+              </a:tabLst>
+              <a:defRPr lang="fr-FR" sz="1200" b="0" u="none" strike="noStrike">
+                <a:solidFill>
+                  <a:schemeClr val="dk1">
+                    <a:tint val="75000"/>
+                  </a:schemeClr>
+                </a:solidFill>
+                <a:effectLst/>
+                <a:uFillTx/>
+                <a:latin typeface="Calibri"/>
+              </a:defRPr>
+            </a:lvl1pPr>
+          </a:lstStyle>
+          <a:p>
+            <a:pPr indent="0" defTabSz="914400">
+              <a:lnSpc>
+                <a:spcPct val="100000"/>
+              </a:lnSpc>
+              <a:buNone/>
+              <a:tabLst>
+                <a:tab algn="l" pos="0"/>
+              </a:tabLst>
+            </a:pPr>
+            <a:r>
+              <a:rPr lang="fr-FR" sz="1200" b="0" u="none" strike="noStrike">
+                <a:solidFill>
+                  <a:schemeClr val="dk1">
+                    <a:tint val="75000"/>
+                  </a:schemeClr>
+                </a:solidFill>
+                <a:effectLst/>
+                <a:uFillTx/>
+                <a:latin typeface="Calibri"/>
+              </a:rPr>
+              <a:t>&lt;date/heure&gt;</a:t>
+            </a:r>
+            <a:endParaRPr lang="fr-FR" sz="1200" b="0" u="none" strike="noStrike">
+              <a:solidFill>
+                <a:srgbClr val="000000"/>
+              </a:solidFill>
+              <a:effectLst/>
+              <a:uFillTx/>
+              <a:latin typeface="Times New Roman"/>
             </a:endParaRPr>
           </a:p>
         </p:txBody>
@@ -216,13 +143,13 @@
             <a:spLocks noGrp="1"/>
           </p:cNvSpPr>
           <p:nvPr>
-            <p:ph type="dt" idx="1"/>
+            <p:ph type="ftr" idx="2"/>
           </p:nvPr>
         </p:nvSpPr>
         <p:spPr>
           <a:xfrm>
-            <a:off x="838080" y="6356520"/>
-            <a:ext cx="2742840" cy="364680"/>
+            <a:off x="4038480" y="6356520"/>
+            <a:ext cx="4114080" cy="364320"/>
           </a:xfrm>
           <a:prstGeom prst="rect">
             <a:avLst/>
@@ -237,44 +164,46 @@
             <a:noAutofit/>
           </a:bodyPr>
           <a:lstStyle>
-            <a:lvl1pPr indent="0" defTabSz="914400">
+            <a:lvl1pPr indent="0" algn="ctr">
               <a:lnSpc>
                 <a:spcPct val="100000"/>
               </a:lnSpc>
               <a:buNone/>
-              <a:defRPr lang="fr-FR" sz="1200" b="0" u="none" strike="noStrike">
-                <a:solidFill>
-                  <a:schemeClr val="dk1">
-                    <a:tint val="75000"/>
-                  </a:schemeClr>
-                </a:solidFill>
-                <a:effectLst/>
-                <a:uFillTx/>
-                <a:latin typeface="Calibri"/>
+              <a:tabLst>
+                <a:tab algn="l" pos="0"/>
+              </a:tabLst>
+              <a:defRPr lang="fr-FR" sz="1400" b="0" u="none" strike="noStrike">
+                <a:solidFill>
+                  <a:srgbClr val="000000"/>
+                </a:solidFill>
+                <a:effectLst/>
+                <a:uFillTx/>
+                <a:latin typeface="Times New Roman"/>
               </a:defRPr>
             </a:lvl1pPr>
           </a:lstStyle>
           <a:p>
-            <a:pPr indent="0" defTabSz="914400">
+            <a:pPr indent="0" algn="ctr">
               <a:lnSpc>
                 <a:spcPct val="100000"/>
               </a:lnSpc>
               <a:buNone/>
-            </a:pPr>
-            <a:r>
-              <a:rPr lang="fr-FR" sz="1200" b="0" u="none" strike="noStrike">
-                <a:solidFill>
-                  <a:schemeClr val="dk1">
-                    <a:tint val="75000"/>
-                  </a:schemeClr>
-                </a:solidFill>
-                <a:effectLst/>
-                <a:uFillTx/>
-                <a:latin typeface="Calibri"/>
-              </a:rPr>
-              <a:t>&lt;date/heure&gt;</a:t>
-            </a:r>
-            <a:endParaRPr lang="fr-FR" sz="1200" b="0" u="none" strike="noStrike">
+              <a:tabLst>
+                <a:tab algn="l" pos="0"/>
+              </a:tabLst>
+            </a:pPr>
+            <a:r>
+              <a:rPr lang="fr-FR" sz="1400" b="0" u="none" strike="noStrike">
+                <a:solidFill>
+                  <a:srgbClr val="000000"/>
+                </a:solidFill>
+                <a:effectLst/>
+                <a:uFillTx/>
+                <a:latin typeface="Times New Roman"/>
+              </a:rPr>
+              <a:t>&lt;pied de page&gt;</a:t>
+            </a:r>
+            <a:endParaRPr lang="fr-FR" sz="1400" b="0" u="none" strike="noStrike">
               <a:solidFill>
                 <a:srgbClr val="000000"/>
               </a:solidFill>
@@ -292,13 +221,13 @@
             <a:spLocks noGrp="1"/>
           </p:cNvSpPr>
           <p:nvPr>
-            <p:ph type="ftr" idx="2"/>
+            <p:ph type="sldNum" idx="3"/>
           </p:nvPr>
         </p:nvSpPr>
         <p:spPr>
           <a:xfrm>
-            <a:off x="4038480" y="6356520"/>
-            <a:ext cx="4114440" cy="364680"/>
+            <a:off x="8610480" y="6356520"/>
+            <a:ext cx="2742480" cy="364320"/>
           </a:xfrm>
           <a:prstGeom prst="rect">
             <a:avLst/>
@@ -313,34 +242,50 @@
             <a:noAutofit/>
           </a:bodyPr>
           <a:lstStyle>
-            <a:lvl1pPr indent="0" algn="ctr">
+            <a:lvl1pPr indent="0" algn="r" defTabSz="914400">
+              <a:lnSpc>
+                <a:spcPct val="100000"/>
+              </a:lnSpc>
               <a:buNone/>
-              <a:defRPr lang="fr-FR" sz="1400" b="0" u="none" strike="noStrike">
-                <a:solidFill>
-                  <a:srgbClr val="000000"/>
-                </a:solidFill>
-                <a:effectLst/>
-                <a:uFillTx/>
-                <a:latin typeface="Times New Roman"/>
+              <a:tabLst>
+                <a:tab algn="l" pos="0"/>
+              </a:tabLst>
+              <a:defRPr lang="fr-FR" sz="1200" b="0" u="none" strike="noStrike">
+                <a:solidFill>
+                  <a:schemeClr val="dk1">
+                    <a:tint val="75000"/>
+                  </a:schemeClr>
+                </a:solidFill>
+                <a:effectLst/>
+                <a:uFillTx/>
+                <a:latin typeface="Calibri"/>
               </a:defRPr>
             </a:lvl1pPr>
           </a:lstStyle>
           <a:p>
-            <a:pPr indent="0" algn="ctr">
+            <a:pPr indent="0" algn="r" defTabSz="914400">
+              <a:lnSpc>
+                <a:spcPct val="100000"/>
+              </a:lnSpc>
               <a:buNone/>
-            </a:pPr>
-            <a:r>
-              <a:rPr lang="fr-FR" sz="1400" b="0" u="none" strike="noStrike">
-                <a:solidFill>
-                  <a:srgbClr val="000000"/>
-                </a:solidFill>
-                <a:effectLst/>
-                <a:uFillTx/>
-                <a:latin typeface="Times New Roman"/>
-              </a:rPr>
-              <a:t>&lt;pied de page&gt;</a:t>
-            </a:r>
-            <a:endParaRPr lang="fr-FR" sz="1400" b="0" u="none" strike="noStrike">
+              <a:tabLst>
+                <a:tab algn="l" pos="0"/>
+              </a:tabLst>
+            </a:pPr>
+            <a:fld id="{F0FF586C-8AF0-4C73-BC82-76B467148DF0}" type="slidenum">
+              <a:rPr lang="fr-FR" sz="1200" b="0" u="none" strike="noStrike">
+                <a:solidFill>
+                  <a:schemeClr val="dk1">
+                    <a:tint val="75000"/>
+                  </a:schemeClr>
+                </a:solidFill>
+                <a:effectLst/>
+                <a:uFillTx/>
+                <a:latin typeface="Calibri"/>
+              </a:rPr>
+              <a:t>&lt;numéro&gt;</a:t>
+            </a:fld>
+            <a:endParaRPr lang="fr-FR" sz="1200" b="0" u="none" strike="noStrike">
               <a:solidFill>
                 <a:srgbClr val="000000"/>
               </a:solidFill>
@@ -358,13 +303,13 @@
             <a:spLocks noGrp="1"/>
           </p:cNvSpPr>
           <p:nvPr>
-            <p:ph type="sldNum" idx="3"/>
+            <p:ph type="title"/>
           </p:nvPr>
         </p:nvSpPr>
         <p:spPr>
           <a:xfrm>
-            <a:off x="8610480" y="6356520"/>
-            <a:ext cx="2742840" cy="364680"/>
+            <a:off x="609480" y="273600"/>
+            <a:ext cx="10972080" cy="1144440"/>
           </a:xfrm>
           <a:prstGeom prst="rect">
             <a:avLst/>
@@ -375,54 +320,322 @@
           </a:ln>
         </p:spPr>
         <p:txBody>
-          <a:bodyPr lIns="91440" rIns="91440" tIns="45720" bIns="45720" anchor="ctr">
+          <a:bodyPr lIns="0" rIns="0" tIns="0" bIns="0" anchor="ctr">
             <a:noAutofit/>
           </a:bodyPr>
-          <a:lstStyle>
-            <a:lvl1pPr indent="0" algn="r" defTabSz="914400">
+          <a:p>
+            <a:pPr indent="0">
               <a:lnSpc>
                 <a:spcPct val="100000"/>
               </a:lnSpc>
               <a:buNone/>
-              <a:defRPr lang="fr-FR" sz="1200" b="0" u="none" strike="noStrike">
-                <a:solidFill>
-                  <a:schemeClr val="dk1">
-                    <a:tint val="75000"/>
-                  </a:schemeClr>
-                </a:solidFill>
-                <a:effectLst/>
-                <a:uFillTx/>
-                <a:latin typeface="Calibri"/>
-              </a:defRPr>
-            </a:lvl1pPr>
-          </a:lstStyle>
-          <a:p>
-            <a:pPr indent="0" algn="r" defTabSz="914400">
-              <a:lnSpc>
-                <a:spcPct val="100000"/>
-              </a:lnSpc>
-              <a:buNone/>
-            </a:pPr>
-            <a:fld id="{073F39BB-4EE0-48D1-93BE-639A995BC4DE}" type="slidenum">
-              <a:rPr lang="fr-FR" sz="1200" b="0" u="none" strike="noStrike">
-                <a:solidFill>
-                  <a:schemeClr val="dk1">
-                    <a:tint val="75000"/>
-                  </a:schemeClr>
-                </a:solidFill>
-                <a:effectLst/>
-                <a:uFillTx/>
-                <a:latin typeface="Calibri"/>
-              </a:rPr>
-              <a:t>&lt;numéro&gt;</a:t>
-            </a:fld>
-            <a:endParaRPr lang="fr-FR" sz="1200" b="0" u="none" strike="noStrike">
-              <a:solidFill>
-                <a:srgbClr val="000000"/>
-              </a:solidFill>
-              <a:effectLst/>
-              <a:uFillTx/>
-              <a:latin typeface="Times New Roman"/>
+              <a:tabLst>
+                <a:tab algn="l" pos="0"/>
+              </a:tabLst>
+            </a:pPr>
+            <a:r>
+              <a:rPr lang="fr-FR" sz="1800" b="0" u="none" strike="noStrike">
+                <a:solidFill>
+                  <a:schemeClr val="dk1"/>
+                </a:solidFill>
+                <a:effectLst/>
+                <a:uFillTx/>
+                <a:latin typeface="Calibri"/>
+              </a:rPr>
+              <a:t>Cliquez pour éditer le format </a:t>
+            </a:r>
+            <a:r>
+              <a:rPr lang="fr-FR" sz="1800" b="0" u="none" strike="noStrike">
+                <a:solidFill>
+                  <a:schemeClr val="dk1"/>
+                </a:solidFill>
+                <a:effectLst/>
+                <a:uFillTx/>
+                <a:latin typeface="Calibri"/>
+              </a:rPr>
+              <a:t>du texte-titre</a:t>
+            </a:r>
+            <a:endParaRPr lang="fr-FR" sz="1800" b="0" u="none" strike="noStrike">
+              <a:solidFill>
+                <a:srgbClr val="000000"/>
+              </a:solidFill>
+              <a:effectLst/>
+              <a:uFillTx/>
+              <a:latin typeface="Arial"/>
+            </a:endParaRPr>
+          </a:p>
+        </p:txBody>
+      </p:sp>
+      <p:sp>
+        <p:nvSpPr>
+          <p:cNvPr id="6" name="PlaceHolder 5"/>
+          <p:cNvSpPr>
+            <a:spLocks noGrp="1"/>
+          </p:cNvSpPr>
+          <p:nvPr>
+            <p:ph type="body"/>
+          </p:nvPr>
+        </p:nvSpPr>
+        <p:spPr>
+          <a:xfrm>
+            <a:off x="609480" y="1604520"/>
+            <a:ext cx="10972080" cy="3976920"/>
+          </a:xfrm>
+          <a:prstGeom prst="rect">
+            <a:avLst/>
+          </a:prstGeom>
+          <a:noFill/>
+          <a:ln w="0">
+            <a:noFill/>
+          </a:ln>
+        </p:spPr>
+        <p:txBody>
+          <a:bodyPr lIns="0" rIns="0" tIns="0" bIns="0" anchor="t">
+            <a:normAutofit/>
+          </a:bodyPr>
+          <a:p>
+            <a:pPr marL="432000" indent="-324000">
+              <a:lnSpc>
+                <a:spcPct val="90000"/>
+              </a:lnSpc>
+              <a:spcBef>
+                <a:spcPts val="1417"/>
+              </a:spcBef>
+              <a:buClr>
+                <a:srgbClr val="000000"/>
+              </a:buClr>
+              <a:buSzPct val="45000"/>
+              <a:buFont typeface="Wingdings" charset="2"/>
+              <a:buChar char=""/>
+            </a:pPr>
+            <a:r>
+              <a:rPr lang="fr-FR" sz="2800" b="0" u="none" strike="noStrike">
+                <a:solidFill>
+                  <a:schemeClr val="dk1"/>
+                </a:solidFill>
+                <a:effectLst/>
+                <a:uFillTx/>
+                <a:latin typeface="Calibri"/>
+              </a:rPr>
+              <a:t>Cliquez pour éditer le format du plan de texte</a:t>
+            </a:r>
+            <a:endParaRPr lang="fr-FR" sz="2800" b="0" u="none" strike="noStrike">
+              <a:solidFill>
+                <a:srgbClr val="000000"/>
+              </a:solidFill>
+              <a:effectLst/>
+              <a:uFillTx/>
+              <a:latin typeface="Arial"/>
+            </a:endParaRPr>
+          </a:p>
+          <a:p>
+            <a:pPr marL="864000" lvl="1" indent="-324000">
+              <a:lnSpc>
+                <a:spcPct val="90000"/>
+              </a:lnSpc>
+              <a:spcBef>
+                <a:spcPts val="1134"/>
+              </a:spcBef>
+              <a:buClr>
+                <a:srgbClr val="000000"/>
+              </a:buClr>
+              <a:buSzPct val="75000"/>
+              <a:buFont typeface="Symbol" charset="2"/>
+              <a:buChar char=""/>
+            </a:pPr>
+            <a:r>
+              <a:rPr lang="fr-FR" sz="2000" b="0" u="none" strike="noStrike">
+                <a:solidFill>
+                  <a:schemeClr val="dk1"/>
+                </a:solidFill>
+                <a:effectLst/>
+                <a:uFillTx/>
+                <a:latin typeface="Calibri"/>
+              </a:rPr>
+              <a:t>Second niveau de plan</a:t>
+            </a:r>
+            <a:endParaRPr lang="fr-FR" sz="2000" b="0" u="none" strike="noStrike">
+              <a:solidFill>
+                <a:srgbClr val="000000"/>
+              </a:solidFill>
+              <a:effectLst/>
+              <a:uFillTx/>
+              <a:latin typeface="Arial"/>
+            </a:endParaRPr>
+          </a:p>
+          <a:p>
+            <a:pPr marL="1296000" lvl="2" indent="-288000">
+              <a:lnSpc>
+                <a:spcPct val="90000"/>
+              </a:lnSpc>
+              <a:spcBef>
+                <a:spcPts val="850"/>
+              </a:spcBef>
+              <a:buClr>
+                <a:srgbClr val="000000"/>
+              </a:buClr>
+              <a:buSzPct val="45000"/>
+              <a:buFont typeface="Wingdings" charset="2"/>
+              <a:buChar char=""/>
+            </a:pPr>
+            <a:r>
+              <a:rPr lang="fr-FR" sz="1800" b="0" u="none" strike="noStrike">
+                <a:solidFill>
+                  <a:schemeClr val="dk1"/>
+                </a:solidFill>
+                <a:effectLst/>
+                <a:uFillTx/>
+                <a:latin typeface="Calibri"/>
+              </a:rPr>
+              <a:t>Troisième niveau de plan</a:t>
+            </a:r>
+            <a:endParaRPr lang="fr-FR" sz="1800" b="0" u="none" strike="noStrike">
+              <a:solidFill>
+                <a:srgbClr val="000000"/>
+              </a:solidFill>
+              <a:effectLst/>
+              <a:uFillTx/>
+              <a:latin typeface="Arial"/>
+            </a:endParaRPr>
+          </a:p>
+          <a:p>
+            <a:pPr marL="1728000" lvl="3" indent="-216000">
+              <a:lnSpc>
+                <a:spcPct val="90000"/>
+              </a:lnSpc>
+              <a:spcBef>
+                <a:spcPts val="567"/>
+              </a:spcBef>
+              <a:buClr>
+                <a:srgbClr val="000000"/>
+              </a:buClr>
+              <a:buSzPct val="75000"/>
+              <a:buFont typeface="Symbol" charset="2"/>
+              <a:buChar char=""/>
+            </a:pPr>
+            <a:r>
+              <a:rPr lang="fr-FR" sz="1800" b="0" u="none" strike="noStrike">
+                <a:solidFill>
+                  <a:schemeClr val="dk1"/>
+                </a:solidFill>
+                <a:effectLst/>
+                <a:uFillTx/>
+                <a:latin typeface="Calibri"/>
+              </a:rPr>
+              <a:t>Quatrième niveau de plan</a:t>
+            </a:r>
+            <a:endParaRPr lang="fr-FR" sz="1800" b="0" u="none" strike="noStrike">
+              <a:solidFill>
+                <a:srgbClr val="000000"/>
+              </a:solidFill>
+              <a:effectLst/>
+              <a:uFillTx/>
+              <a:latin typeface="Arial"/>
+            </a:endParaRPr>
+          </a:p>
+          <a:p>
+            <a:pPr marL="2160000" lvl="4" indent="-216000">
+              <a:lnSpc>
+                <a:spcPct val="90000"/>
+              </a:lnSpc>
+              <a:spcBef>
+                <a:spcPts val="283"/>
+              </a:spcBef>
+              <a:buClr>
+                <a:srgbClr val="000000"/>
+              </a:buClr>
+              <a:buSzPct val="45000"/>
+              <a:buFont typeface="Wingdings" charset="2"/>
+              <a:buChar char=""/>
+            </a:pPr>
+            <a:r>
+              <a:rPr lang="fr-FR" sz="2000" b="0" u="none" strike="noStrike">
+                <a:solidFill>
+                  <a:schemeClr val="dk1"/>
+                </a:solidFill>
+                <a:effectLst/>
+                <a:uFillTx/>
+                <a:latin typeface="Calibri"/>
+              </a:rPr>
+              <a:t>Cinquième niveau de plan</a:t>
+            </a:r>
+            <a:endParaRPr lang="fr-FR" sz="2000" b="0" u="none" strike="noStrike">
+              <a:solidFill>
+                <a:srgbClr val="000000"/>
+              </a:solidFill>
+              <a:effectLst/>
+              <a:uFillTx/>
+              <a:latin typeface="Arial"/>
+            </a:endParaRPr>
+          </a:p>
+          <a:p>
+            <a:pPr marL="2592000" lvl="5" indent="-216000">
+              <a:lnSpc>
+                <a:spcPct val="90000"/>
+              </a:lnSpc>
+              <a:spcBef>
+                <a:spcPts val="283"/>
+              </a:spcBef>
+              <a:buClr>
+                <a:srgbClr val="000000"/>
+              </a:buClr>
+              <a:buSzPct val="45000"/>
+              <a:buFont typeface="Wingdings" charset="2"/>
+              <a:buChar char=""/>
+            </a:pPr>
+            <a:r>
+              <a:rPr lang="fr-FR" sz="2000" b="0" u="none" strike="noStrike">
+                <a:solidFill>
+                  <a:schemeClr val="dk1"/>
+                </a:solidFill>
+                <a:effectLst/>
+                <a:uFillTx/>
+                <a:latin typeface="Calibri"/>
+              </a:rPr>
+              <a:t>Sixième niveau de plan</a:t>
+            </a:r>
+            <a:endParaRPr lang="fr-FR" sz="2000" b="0" u="none" strike="noStrike">
+              <a:solidFill>
+                <a:srgbClr val="000000"/>
+              </a:solidFill>
+              <a:effectLst/>
+              <a:uFillTx/>
+              <a:latin typeface="Arial"/>
+            </a:endParaRPr>
+          </a:p>
+          <a:p>
+            <a:pPr marL="3024000" lvl="6" indent="-216000">
+              <a:lnSpc>
+                <a:spcPct val="90000"/>
+              </a:lnSpc>
+              <a:spcBef>
+                <a:spcPts val="283"/>
+              </a:spcBef>
+              <a:buClr>
+                <a:srgbClr val="000000"/>
+              </a:buClr>
+              <a:buSzPct val="45000"/>
+              <a:buFont typeface="Wingdings" charset="2"/>
+              <a:buChar char=""/>
+            </a:pPr>
+            <a:r>
+              <a:rPr lang="fr-FR" sz="2000" b="0" u="none" strike="noStrike">
+                <a:solidFill>
+                  <a:schemeClr val="dk1"/>
+                </a:solidFill>
+                <a:effectLst/>
+                <a:uFillTx/>
+                <a:latin typeface="Calibri"/>
+              </a:rPr>
+              <a:t>Septième niveau de plan</a:t>
+            </a:r>
+            <a:endParaRPr lang="fr-FR" sz="2000" b="0" u="none" strike="noStrike">
+              <a:solidFill>
+                <a:srgbClr val="000000"/>
+              </a:solidFill>
+              <a:effectLst/>
+              <a:uFillTx/>
+              <a:latin typeface="Arial"/>
             </a:endParaRPr>
           </a:p>
         </p:txBody>
@@ -434,7 +647,7 @@
 
 <file path=ppt/slideLayouts/slideLayout10.xml><?xml version="1.0" encoding="utf-8"?>
 <p:sldLayout xmlns:a="http://schemas.openxmlformats.org/drawingml/2006/main" xmlns:p="http://schemas.openxmlformats.org/presentationml/2006/main" xmlns:r="http://schemas.openxmlformats.org/officeDocument/2006/relationships" xmlns:p14="http://schemas.microsoft.com/office/powerpoint/2010/main" xmlns:p15="http://schemas.microsoft.com/office/powerpoint/2012/main" xmlns:mc="http://schemas.openxmlformats.org/markup-compatibility/2006" type="blank" preserve="1">
-  <p:cSld name="Contenu avec légende">
+  <p:cSld name="Comparaison">
     <p:bg>
       <p:bgPr>
         <a:blipFill rotWithShape="0">
@@ -469,8 +682,8 @@
         </p:nvSpPr>
         <p:spPr>
           <a:xfrm>
-            <a:off x="839880" y="457200"/>
-            <a:ext cx="3931920" cy="1599840"/>
+            <a:off x="839880" y="365040"/>
+            <a:ext cx="10514880" cy="1324800"/>
           </a:xfrm>
           <a:prstGeom prst="rect">
             <a:avLst/>
@@ -481,7 +694,7 @@
           </a:ln>
         </p:spPr>
         <p:txBody>
-          <a:bodyPr lIns="91440" rIns="91440" tIns="45720" bIns="45720" anchor="b">
+          <a:bodyPr lIns="91440" rIns="91440" tIns="45720" bIns="45720" anchor="ctr">
             <a:noAutofit/>
           </a:bodyPr>
           <a:p>
@@ -490,9 +703,12 @@
                 <a:spcPct val="90000"/>
               </a:lnSpc>
               <a:buNone/>
-            </a:pPr>
-            <a:r>
-              <a:rPr lang="fr-FR" sz="3200" b="0" u="none" strike="noStrike">
+              <a:tabLst>
+                <a:tab algn="l" pos="0"/>
+              </a:tabLst>
+            </a:pPr>
+            <a:r>
+              <a:rPr lang="fr-FR" sz="4400" b="0" u="none" strike="noStrike">
                 <a:solidFill>
                   <a:schemeClr val="dk1"/>
                 </a:solidFill>
@@ -502,13 +718,13 @@
               </a:rPr>
               <a:t>Modifiez le style du titre</a:t>
             </a:r>
-            <a:endParaRPr lang="fr-FR" sz="3200" b="0" u="none" strike="noStrike">
-              <a:solidFill>
-                <a:schemeClr val="dk1"/>
-              </a:solidFill>
-              <a:effectLst/>
-              <a:uFillTx/>
-              <a:latin typeface="Calibri"/>
+            <a:endParaRPr lang="fr-FR" sz="4400" b="0" u="none" strike="noStrike">
+              <a:solidFill>
+                <a:srgbClr val="000000"/>
+              </a:solidFill>
+              <a:effectLst/>
+              <a:uFillTx/>
+              <a:latin typeface="Arial"/>
             </a:endParaRPr>
           </a:p>
         </p:txBody>
@@ -525,8 +741,8 @@
         </p:nvSpPr>
         <p:spPr>
           <a:xfrm>
-            <a:off x="5183280" y="987480"/>
-            <a:ext cx="6171840" cy="4873320"/>
+            <a:off x="839880" y="1681200"/>
+            <a:ext cx="5157000" cy="823320"/>
           </a:xfrm>
           <a:prstGeom prst="rect">
             <a:avLst/>
@@ -537,25 +753,24 @@
           </a:ln>
         </p:spPr>
         <p:txBody>
-          <a:bodyPr lIns="91440" rIns="91440" tIns="45720" bIns="45720" anchor="t">
+          <a:bodyPr lIns="91440" rIns="91440" tIns="45720" bIns="45720" anchor="b">
             <a:noAutofit/>
           </a:bodyPr>
           <a:p>
-            <a:pPr marL="228600" indent="-228600" defTabSz="914400">
+            <a:pPr indent="0" defTabSz="914400">
               <a:lnSpc>
                 <a:spcPct val="90000"/>
               </a:lnSpc>
               <a:spcBef>
                 <a:spcPts val="1001"/>
               </a:spcBef>
-              <a:buClr>
-                <a:srgbClr val="000000"/>
-              </a:buClr>
-              <a:buFont typeface="Arial"/>
-              <a:buChar char="•"/>
-            </a:pPr>
-            <a:r>
-              <a:rPr lang="fr-FR" sz="3200" b="0" u="none" strike="noStrike">
+              <a:buNone/>
+              <a:tabLst>
+                <a:tab algn="l" pos="0"/>
+              </a:tabLst>
+            </a:pPr>
+            <a:r>
+              <a:rPr lang="fr-FR" sz="2400" b="1" u="none" strike="noStrike">
                 <a:solidFill>
                   <a:schemeClr val="dk1"/>
                 </a:solidFill>
@@ -565,149 +780,13 @@
               </a:rPr>
               <a:t>Modifier les styles du texte du masque</a:t>
             </a:r>
-            <a:endParaRPr lang="fr-FR" sz="3200" b="0" u="none" strike="noStrike">
-              <a:solidFill>
-                <a:schemeClr val="dk1"/>
-              </a:solidFill>
-              <a:effectLst/>
-              <a:uFillTx/>
-              <a:latin typeface="Calibri"/>
-            </a:endParaRPr>
-          </a:p>
-          <a:p>
-            <a:pPr marL="685800" lvl="1" indent="-228600" defTabSz="914400">
-              <a:lnSpc>
-                <a:spcPct val="90000"/>
-              </a:lnSpc>
-              <a:spcBef>
-                <a:spcPts val="499"/>
-              </a:spcBef>
-              <a:buClr>
-                <a:srgbClr val="000000"/>
-              </a:buClr>
-              <a:buFont typeface="Arial"/>
-              <a:buChar char="•"/>
-            </a:pPr>
-            <a:r>
-              <a:rPr lang="fr-FR" sz="2800" b="0" u="none" strike="noStrike">
-                <a:solidFill>
-                  <a:schemeClr val="dk1"/>
-                </a:solidFill>
-                <a:effectLst/>
-                <a:uFillTx/>
-                <a:latin typeface="Calibri"/>
-              </a:rPr>
-              <a:t>Deuxième niveau</a:t>
-            </a:r>
-            <a:endParaRPr lang="fr-FR" sz="2800" b="0" u="none" strike="noStrike">
-              <a:solidFill>
-                <a:schemeClr val="dk1"/>
-              </a:solidFill>
-              <a:effectLst/>
-              <a:uFillTx/>
-              <a:latin typeface="Calibri"/>
-            </a:endParaRPr>
-          </a:p>
-          <a:p>
-            <a:pPr marL="1143000" lvl="2" indent="-228600" defTabSz="914400">
-              <a:lnSpc>
-                <a:spcPct val="90000"/>
-              </a:lnSpc>
-              <a:spcBef>
-                <a:spcPts val="499"/>
-              </a:spcBef>
-              <a:buClr>
-                <a:srgbClr val="000000"/>
-              </a:buClr>
-              <a:buFont typeface="Arial"/>
-              <a:buChar char="•"/>
-            </a:pPr>
-            <a:r>
-              <a:rPr lang="fr-FR" sz="2400" b="0" u="none" strike="noStrike">
-                <a:solidFill>
-                  <a:schemeClr val="dk1"/>
-                </a:solidFill>
-                <a:effectLst/>
-                <a:uFillTx/>
-                <a:latin typeface="Calibri"/>
-              </a:rPr>
-              <a:t>Troisième niveau</a:t>
-            </a:r>
             <a:endParaRPr lang="fr-FR" sz="2400" b="0" u="none" strike="noStrike">
               <a:solidFill>
-                <a:schemeClr val="dk1"/>
-              </a:solidFill>
-              <a:effectLst/>
-              <a:uFillTx/>
-              <a:latin typeface="Calibri"/>
-            </a:endParaRPr>
-          </a:p>
-          <a:p>
-            <a:pPr marL="1600200" lvl="3" indent="-228600" defTabSz="914400">
-              <a:lnSpc>
-                <a:spcPct val="90000"/>
-              </a:lnSpc>
-              <a:spcBef>
-                <a:spcPts val="499"/>
-              </a:spcBef>
-              <a:buClr>
-                <a:srgbClr val="000000"/>
-              </a:buClr>
-              <a:buFont typeface="Arial"/>
-              <a:buChar char="•"/>
-            </a:pPr>
-            <a:r>
-              <a:rPr lang="fr-FR" sz="2000" b="0" u="none" strike="noStrike">
-                <a:solidFill>
-                  <a:schemeClr val="dk1"/>
-                </a:solidFill>
-                <a:effectLst/>
-                <a:uFillTx/>
-                <a:latin typeface="Calibri"/>
-              </a:rPr>
-              <a:t>Quatrième niveau</a:t>
-            </a:r>
-            <a:endParaRPr lang="fr-FR" sz="2000" b="0" u="none" strike="noStrike">
-              <a:solidFill>
-                <a:schemeClr val="dk1"/>
-              </a:solidFill>
-              <a:effectLst/>
-              <a:uFillTx/>
-              <a:latin typeface="Calibri"/>
-            </a:endParaRPr>
-          </a:p>
-          <a:p>
-            <a:pPr marL="2057400" lvl="4" indent="-228600" defTabSz="914400">
-              <a:lnSpc>
-                <a:spcPct val="90000"/>
-              </a:lnSpc>
-              <a:spcBef>
-                <a:spcPts val="499"/>
-              </a:spcBef>
-              <a:buClr>
-                <a:srgbClr val="000000"/>
-              </a:buClr>
-              <a:buFont typeface="Arial"/>
-              <a:buChar char="•"/>
-            </a:pPr>
-            <a:r>
-              <a:rPr lang="fr-FR" sz="2000" b="0" u="none" strike="noStrike">
-                <a:solidFill>
-                  <a:schemeClr val="dk1"/>
-                </a:solidFill>
-                <a:effectLst/>
-                <a:uFillTx/>
-                <a:latin typeface="Calibri"/>
-              </a:rPr>
-              <a:t>Cinquième niveau</a:t>
-            </a:r>
-            <a:endParaRPr lang="fr-FR" sz="2000" b="0" u="none" strike="noStrike">
-              <a:solidFill>
-                <a:schemeClr val="dk1"/>
-              </a:solidFill>
-              <a:effectLst/>
-              <a:uFillTx/>
-              <a:latin typeface="Calibri"/>
+                <a:srgbClr val="000000"/>
+              </a:solidFill>
+              <a:effectLst/>
+              <a:uFillTx/>
+              <a:latin typeface="Arial"/>
             </a:endParaRPr>
           </a:p>
         </p:txBody>
@@ -724,8 +803,8 @@
         </p:nvSpPr>
         <p:spPr>
           <a:xfrm>
-            <a:off x="839880" y="2057400"/>
-            <a:ext cx="3931920" cy="3811320"/>
+            <a:off x="839880" y="2505240"/>
+            <a:ext cx="5157000" cy="3683880"/>
           </a:xfrm>
           <a:prstGeom prst="rect">
             <a:avLst/>
@@ -740,20 +819,21 @@
             <a:noAutofit/>
           </a:bodyPr>
           <a:p>
-            <a:pPr indent="0" defTabSz="914400">
+            <a:pPr marL="228600" indent="-228600" defTabSz="914400">
               <a:lnSpc>
                 <a:spcPct val="90000"/>
               </a:lnSpc>
               <a:spcBef>
                 <a:spcPts val="1001"/>
               </a:spcBef>
-              <a:buNone/>
-              <a:tabLst>
-                <a:tab algn="l" pos="0"/>
-              </a:tabLst>
-            </a:pPr>
-            <a:r>
-              <a:rPr lang="fr-FR" sz="1600" b="0" u="none" strike="noStrike">
+              <a:buClr>
+                <a:srgbClr val="000000"/>
+              </a:buClr>
+              <a:buFont typeface="Arial"/>
+              <a:buChar char="•"/>
+            </a:pPr>
+            <a:r>
+              <a:rPr lang="fr-FR" sz="2800" b="0" u="none" strike="noStrike">
                 <a:solidFill>
                   <a:schemeClr val="dk1"/>
                 </a:solidFill>
@@ -763,13 +843,149 @@
               </a:rPr>
               <a:t>Modifier les styles du texte du masque</a:t>
             </a:r>
-            <a:endParaRPr lang="fr-FR" sz="1600" b="0" u="none" strike="noStrike">
-              <a:solidFill>
-                <a:schemeClr val="dk1"/>
-              </a:solidFill>
-              <a:effectLst/>
-              <a:uFillTx/>
-              <a:latin typeface="Calibri"/>
+            <a:endParaRPr lang="fr-FR" sz="2800" b="0" u="none" strike="noStrike">
+              <a:solidFill>
+                <a:srgbClr val="000000"/>
+              </a:solidFill>
+              <a:effectLst/>
+              <a:uFillTx/>
+              <a:latin typeface="Arial"/>
+            </a:endParaRPr>
+          </a:p>
+          <a:p>
+            <a:pPr marL="685800" lvl="1" indent="-228600" defTabSz="914400">
+              <a:lnSpc>
+                <a:spcPct val="90000"/>
+              </a:lnSpc>
+              <a:spcBef>
+                <a:spcPts val="499"/>
+              </a:spcBef>
+              <a:buClr>
+                <a:srgbClr val="000000"/>
+              </a:buClr>
+              <a:buFont typeface="Arial"/>
+              <a:buChar char="•"/>
+            </a:pPr>
+            <a:r>
+              <a:rPr lang="fr-FR" sz="2400" b="0" u="none" strike="noStrike">
+                <a:solidFill>
+                  <a:schemeClr val="dk1"/>
+                </a:solidFill>
+                <a:effectLst/>
+                <a:uFillTx/>
+                <a:latin typeface="Calibri"/>
+              </a:rPr>
+              <a:t>Deuxième niveau</a:t>
+            </a:r>
+            <a:endParaRPr lang="fr-FR" sz="2400" b="0" u="none" strike="noStrike">
+              <a:solidFill>
+                <a:srgbClr val="000000"/>
+              </a:solidFill>
+              <a:effectLst/>
+              <a:uFillTx/>
+              <a:latin typeface="Arial"/>
+            </a:endParaRPr>
+          </a:p>
+          <a:p>
+            <a:pPr marL="1143000" lvl="2" indent="-228600" defTabSz="914400">
+              <a:lnSpc>
+                <a:spcPct val="90000"/>
+              </a:lnSpc>
+              <a:spcBef>
+                <a:spcPts val="499"/>
+              </a:spcBef>
+              <a:buClr>
+                <a:srgbClr val="000000"/>
+              </a:buClr>
+              <a:buFont typeface="Arial"/>
+              <a:buChar char="•"/>
+            </a:pPr>
+            <a:r>
+              <a:rPr lang="fr-FR" sz="2000" b="0" u="none" strike="noStrike">
+                <a:solidFill>
+                  <a:schemeClr val="dk1"/>
+                </a:solidFill>
+                <a:effectLst/>
+                <a:uFillTx/>
+                <a:latin typeface="Calibri"/>
+              </a:rPr>
+              <a:t>Troisième niveau</a:t>
+            </a:r>
+            <a:endParaRPr lang="fr-FR" sz="2000" b="0" u="none" strike="noStrike">
+              <a:solidFill>
+                <a:srgbClr val="000000"/>
+              </a:solidFill>
+              <a:effectLst/>
+              <a:uFillTx/>
+              <a:latin typeface="Arial"/>
+            </a:endParaRPr>
+          </a:p>
+          <a:p>
+            <a:pPr marL="1600200" lvl="3" indent="-228600" defTabSz="914400">
+              <a:lnSpc>
+                <a:spcPct val="90000"/>
+              </a:lnSpc>
+              <a:spcBef>
+                <a:spcPts val="499"/>
+              </a:spcBef>
+              <a:buClr>
+                <a:srgbClr val="000000"/>
+              </a:buClr>
+              <a:buFont typeface="Arial"/>
+              <a:buChar char="•"/>
+            </a:pPr>
+            <a:r>
+              <a:rPr lang="fr-FR" sz="1800" b="0" u="none" strike="noStrike">
+                <a:solidFill>
+                  <a:schemeClr val="dk1"/>
+                </a:solidFill>
+                <a:effectLst/>
+                <a:uFillTx/>
+                <a:latin typeface="Calibri"/>
+              </a:rPr>
+              <a:t>Quatrième niveau</a:t>
+            </a:r>
+            <a:endParaRPr lang="fr-FR" sz="1800" b="0" u="none" strike="noStrike">
+              <a:solidFill>
+                <a:srgbClr val="000000"/>
+              </a:solidFill>
+              <a:effectLst/>
+              <a:uFillTx/>
+              <a:latin typeface="Arial"/>
+            </a:endParaRPr>
+          </a:p>
+          <a:p>
+            <a:pPr marL="2057400" lvl="4" indent="-228600" defTabSz="914400">
+              <a:lnSpc>
+                <a:spcPct val="90000"/>
+              </a:lnSpc>
+              <a:spcBef>
+                <a:spcPts val="499"/>
+              </a:spcBef>
+              <a:buClr>
+                <a:srgbClr val="000000"/>
+              </a:buClr>
+              <a:buFont typeface="Arial"/>
+              <a:buChar char="•"/>
+            </a:pPr>
+            <a:r>
+              <a:rPr lang="fr-FR" sz="1800" b="0" u="none" strike="noStrike">
+                <a:solidFill>
+                  <a:schemeClr val="dk1"/>
+                </a:solidFill>
+                <a:effectLst/>
+                <a:uFillTx/>
+                <a:latin typeface="Calibri"/>
+              </a:rPr>
+              <a:t>Cinquième niveau</a:t>
+            </a:r>
+            <a:endParaRPr lang="fr-FR" sz="1800" b="0" u="none" strike="noStrike">
+              <a:solidFill>
+                <a:srgbClr val="000000"/>
+              </a:solidFill>
+              <a:effectLst/>
+              <a:uFillTx/>
+              <a:latin typeface="Arial"/>
             </a:endParaRPr>
           </a:p>
         </p:txBody>
@@ -781,13 +997,13 @@
             <a:spLocks noGrp="1"/>
           </p:cNvSpPr>
           <p:nvPr>
-            <p:ph type="dt" idx="28"/>
+            <p:ph type="body"/>
           </p:nvPr>
         </p:nvSpPr>
         <p:spPr>
           <a:xfrm>
-            <a:off x="838080" y="6356520"/>
-            <a:ext cx="2742840" cy="364680"/>
+            <a:off x="6172200" y="1681200"/>
+            <a:ext cx="5182560" cy="823320"/>
           </a:xfrm>
           <a:prstGeom prst="rect">
             <a:avLst/>
@@ -798,54 +1014,40 @@
           </a:ln>
         </p:spPr>
         <p:txBody>
-          <a:bodyPr lIns="91440" rIns="91440" tIns="45720" bIns="45720" anchor="ctr">
+          <a:bodyPr lIns="91440" rIns="91440" tIns="45720" bIns="45720" anchor="b">
             <a:noAutofit/>
           </a:bodyPr>
-          <a:lstStyle>
-            <a:lvl1pPr indent="0" defTabSz="914400">
-              <a:lnSpc>
-                <a:spcPct val="100000"/>
-              </a:lnSpc>
+          <a:p>
+            <a:pPr indent="0" defTabSz="914400">
+              <a:lnSpc>
+                <a:spcPct val="90000"/>
+              </a:lnSpc>
+              <a:spcBef>
+                <a:spcPts val="1001"/>
+              </a:spcBef>
               <a:buNone/>
-              <a:defRPr lang="fr-FR" sz="1200" b="0" u="none" strike="noStrike">
-                <a:solidFill>
-                  <a:schemeClr val="dk1">
-                    <a:tint val="75000"/>
-                  </a:schemeClr>
-                </a:solidFill>
-                <a:effectLst/>
-                <a:uFillTx/>
-                <a:latin typeface="Calibri"/>
-              </a:defRPr>
-            </a:lvl1pPr>
-          </a:lstStyle>
-          <a:p>
-            <a:pPr indent="0" defTabSz="914400">
-              <a:lnSpc>
-                <a:spcPct val="100000"/>
-              </a:lnSpc>
-              <a:buNone/>
-            </a:pPr>
-            <a:r>
-              <a:rPr lang="fr-FR" sz="1200" b="0" u="none" strike="noStrike">
-                <a:solidFill>
-                  <a:schemeClr val="dk1">
-                    <a:tint val="75000"/>
-                  </a:schemeClr>
-                </a:solidFill>
-                <a:effectLst/>
-                <a:uFillTx/>
-                <a:latin typeface="Calibri"/>
-              </a:rPr>
-              <a:t>&lt;date/heure&gt;</a:t>
-            </a:r>
-            <a:endParaRPr lang="fr-FR" sz="1200" b="0" u="none" strike="noStrike">
-              <a:solidFill>
-                <a:srgbClr val="000000"/>
-              </a:solidFill>
-              <a:effectLst/>
-              <a:uFillTx/>
-              <a:latin typeface="Times New Roman"/>
+              <a:tabLst>
+                <a:tab algn="l" pos="0"/>
+              </a:tabLst>
+            </a:pPr>
+            <a:r>
+              <a:rPr lang="fr-FR" sz="2400" b="1" u="none" strike="noStrike">
+                <a:solidFill>
+                  <a:schemeClr val="dk1"/>
+                </a:solidFill>
+                <a:effectLst/>
+                <a:uFillTx/>
+                <a:latin typeface="Calibri"/>
+              </a:rPr>
+              <a:t>Modifier les styles du texte du masque</a:t>
+            </a:r>
+            <a:endParaRPr lang="fr-FR" sz="2400" b="0" u="none" strike="noStrike">
+              <a:solidFill>
+                <a:srgbClr val="000000"/>
+              </a:solidFill>
+              <a:effectLst/>
+              <a:uFillTx/>
+              <a:latin typeface="Arial"/>
             </a:endParaRPr>
           </a:p>
         </p:txBody>
@@ -857,13 +1059,13 @@
             <a:spLocks noGrp="1"/>
           </p:cNvSpPr>
           <p:nvPr>
-            <p:ph type="ftr" idx="29"/>
+            <p:ph type="body"/>
           </p:nvPr>
         </p:nvSpPr>
         <p:spPr>
           <a:xfrm>
-            <a:off x="4038480" y="6356520"/>
-            <a:ext cx="4114440" cy="364680"/>
+            <a:off x="6172200" y="2505240"/>
+            <a:ext cx="5182560" cy="3683880"/>
           </a:xfrm>
           <a:prstGeom prst="rect">
             <a:avLst/>
@@ -874,44 +1076,177 @@
           </a:ln>
         </p:spPr>
         <p:txBody>
-          <a:bodyPr lIns="91440" rIns="91440" tIns="45720" bIns="45720" anchor="ctr">
+          <a:bodyPr lIns="91440" rIns="91440" tIns="45720" bIns="45720" anchor="t">
             <a:noAutofit/>
           </a:bodyPr>
-          <a:lstStyle>
-            <a:lvl1pPr indent="0" algn="ctr">
-              <a:buNone/>
-              <a:defRPr lang="fr-FR" sz="1400" b="0" u="none" strike="noStrike">
-                <a:solidFill>
-                  <a:srgbClr val="000000"/>
-                </a:solidFill>
-                <a:effectLst/>
-                <a:uFillTx/>
-                <a:latin typeface="Times New Roman"/>
-              </a:defRPr>
-            </a:lvl1pPr>
-          </a:lstStyle>
-          <a:p>
-            <a:pPr indent="0" algn="ctr">
-              <a:buNone/>
-            </a:pPr>
-            <a:r>
-              <a:rPr lang="fr-FR" sz="1400" b="0" u="none" strike="noStrike">
-                <a:solidFill>
-                  <a:srgbClr val="000000"/>
-                </a:solidFill>
-                <a:effectLst/>
-                <a:uFillTx/>
-                <a:latin typeface="Times New Roman"/>
-              </a:rPr>
-              <a:t>&lt;pied de page&gt;</a:t>
-            </a:r>
-            <a:endParaRPr lang="fr-FR" sz="1400" b="0" u="none" strike="noStrike">
-              <a:solidFill>
-                <a:srgbClr val="000000"/>
-              </a:solidFill>
-              <a:effectLst/>
-              <a:uFillTx/>
-              <a:latin typeface="Times New Roman"/>
+          <a:p>
+            <a:pPr marL="228600" indent="-228600" defTabSz="914400">
+              <a:lnSpc>
+                <a:spcPct val="90000"/>
+              </a:lnSpc>
+              <a:spcBef>
+                <a:spcPts val="1001"/>
+              </a:spcBef>
+              <a:buClr>
+                <a:srgbClr val="000000"/>
+              </a:buClr>
+              <a:buFont typeface="Arial"/>
+              <a:buChar char="•"/>
+            </a:pPr>
+            <a:r>
+              <a:rPr lang="fr-FR" sz="2800" b="0" u="none" strike="noStrike">
+                <a:solidFill>
+                  <a:schemeClr val="dk1"/>
+                </a:solidFill>
+                <a:effectLst/>
+                <a:uFillTx/>
+                <a:latin typeface="Calibri"/>
+              </a:rPr>
+              <a:t>Modifier les styles du texte du masque</a:t>
+            </a:r>
+            <a:endParaRPr lang="fr-FR" sz="2800" b="0" u="none" strike="noStrike">
+              <a:solidFill>
+                <a:srgbClr val="000000"/>
+              </a:solidFill>
+              <a:effectLst/>
+              <a:uFillTx/>
+              <a:latin typeface="Arial"/>
+            </a:endParaRPr>
+          </a:p>
+          <a:p>
+            <a:pPr marL="685800" lvl="1" indent="-228600" defTabSz="914400">
+              <a:lnSpc>
+                <a:spcPct val="90000"/>
+              </a:lnSpc>
+              <a:spcBef>
+                <a:spcPts val="499"/>
+              </a:spcBef>
+              <a:buClr>
+                <a:srgbClr val="000000"/>
+              </a:buClr>
+              <a:buFont typeface="Arial"/>
+              <a:buChar char="•"/>
+            </a:pPr>
+            <a:r>
+              <a:rPr lang="fr-FR" sz="2400" b="0" u="none" strike="noStrike">
+                <a:solidFill>
+                  <a:schemeClr val="dk1"/>
+                </a:solidFill>
+                <a:effectLst/>
+                <a:uFillTx/>
+                <a:latin typeface="Calibri"/>
+              </a:rPr>
+              <a:t>Deuxième niveau</a:t>
+            </a:r>
+            <a:endParaRPr lang="fr-FR" sz="2400" b="0" u="none" strike="noStrike">
+              <a:solidFill>
+                <a:srgbClr val="000000"/>
+              </a:solidFill>
+              <a:effectLst/>
+              <a:uFillTx/>
+              <a:latin typeface="Arial"/>
+            </a:endParaRPr>
+          </a:p>
+          <a:p>
+            <a:pPr marL="1143000" lvl="2" indent="-228600" defTabSz="914400">
+              <a:lnSpc>
+                <a:spcPct val="90000"/>
+              </a:lnSpc>
+              <a:spcBef>
+                <a:spcPts val="499"/>
+              </a:spcBef>
+              <a:buClr>
+                <a:srgbClr val="000000"/>
+              </a:buClr>
+              <a:buFont typeface="Arial"/>
+              <a:buChar char="•"/>
+            </a:pPr>
+            <a:r>
+              <a:rPr lang="fr-FR" sz="2000" b="0" u="none" strike="noStrike">
+                <a:solidFill>
+                  <a:schemeClr val="dk1"/>
+                </a:solidFill>
+                <a:effectLst/>
+                <a:uFillTx/>
+                <a:latin typeface="Calibri"/>
+              </a:rPr>
+              <a:t>Troisième niveau</a:t>
+            </a:r>
+            <a:endParaRPr lang="fr-FR" sz="2000" b="0" u="none" strike="noStrike">
+              <a:solidFill>
+                <a:srgbClr val="000000"/>
+              </a:solidFill>
+              <a:effectLst/>
+              <a:uFillTx/>
+              <a:latin typeface="Arial"/>
+            </a:endParaRPr>
+          </a:p>
+          <a:p>
+            <a:pPr marL="1600200" lvl="3" indent="-228600" defTabSz="914400">
+              <a:lnSpc>
+                <a:spcPct val="90000"/>
+              </a:lnSpc>
+              <a:spcBef>
+                <a:spcPts val="499"/>
+              </a:spcBef>
+              <a:buClr>
+                <a:srgbClr val="000000"/>
+              </a:buClr>
+              <a:buFont typeface="Arial"/>
+              <a:buChar char="•"/>
+            </a:pPr>
+            <a:r>
+              <a:rPr lang="fr-FR" sz="1800" b="0" u="none" strike="noStrike">
+                <a:solidFill>
+                  <a:schemeClr val="dk1"/>
+                </a:solidFill>
+                <a:effectLst/>
+                <a:uFillTx/>
+                <a:latin typeface="Calibri"/>
+              </a:rPr>
+              <a:t>Quatrième niveau</a:t>
+            </a:r>
+            <a:endParaRPr lang="fr-FR" sz="1800" b="0" u="none" strike="noStrike">
+              <a:solidFill>
+                <a:srgbClr val="000000"/>
+              </a:solidFill>
+              <a:effectLst/>
+              <a:uFillTx/>
+              <a:latin typeface="Arial"/>
+            </a:endParaRPr>
+          </a:p>
+          <a:p>
+            <a:pPr marL="2057400" lvl="4" indent="-228600" defTabSz="914400">
+              <a:lnSpc>
+                <a:spcPct val="90000"/>
+              </a:lnSpc>
+              <a:spcBef>
+                <a:spcPts val="499"/>
+              </a:spcBef>
+              <a:buClr>
+                <a:srgbClr val="000000"/>
+              </a:buClr>
+              <a:buFont typeface="Arial"/>
+              <a:buChar char="•"/>
+            </a:pPr>
+            <a:r>
+              <a:rPr lang="fr-FR" sz="1800" b="0" u="none" strike="noStrike">
+                <a:solidFill>
+                  <a:schemeClr val="dk1"/>
+                </a:solidFill>
+                <a:effectLst/>
+                <a:uFillTx/>
+                <a:latin typeface="Calibri"/>
+              </a:rPr>
+              <a:t>Cinquième niveau</a:t>
+            </a:r>
+            <a:endParaRPr lang="fr-FR" sz="1800" b="0" u="none" strike="noStrike">
+              <a:solidFill>
+                <a:srgbClr val="000000"/>
+              </a:solidFill>
+              <a:effectLst/>
+              <a:uFillTx/>
+              <a:latin typeface="Arial"/>
             </a:endParaRPr>
           </a:p>
         </p:txBody>
@@ -923,13 +1258,173 @@
             <a:spLocks noGrp="1"/>
           </p:cNvSpPr>
           <p:nvPr>
+            <p:ph type="dt" idx="28"/>
+          </p:nvPr>
+        </p:nvSpPr>
+        <p:spPr>
+          <a:xfrm>
+            <a:off x="838080" y="6356520"/>
+            <a:ext cx="2742480" cy="364320"/>
+          </a:xfrm>
+          <a:prstGeom prst="rect">
+            <a:avLst/>
+          </a:prstGeom>
+          <a:noFill/>
+          <a:ln w="0">
+            <a:noFill/>
+          </a:ln>
+        </p:spPr>
+        <p:txBody>
+          <a:bodyPr lIns="91440" rIns="91440" tIns="45720" bIns="45720" anchor="ctr">
+            <a:noAutofit/>
+          </a:bodyPr>
+          <a:lstStyle>
+            <a:lvl1pPr indent="0" defTabSz="914400">
+              <a:lnSpc>
+                <a:spcPct val="100000"/>
+              </a:lnSpc>
+              <a:buNone/>
+              <a:tabLst>
+                <a:tab algn="l" pos="0"/>
+              </a:tabLst>
+              <a:defRPr lang="fr-FR" sz="1200" b="0" u="none" strike="noStrike">
+                <a:solidFill>
+                  <a:schemeClr val="dk1">
+                    <a:tint val="75000"/>
+                  </a:schemeClr>
+                </a:solidFill>
+                <a:effectLst/>
+                <a:uFillTx/>
+                <a:latin typeface="Calibri"/>
+              </a:defRPr>
+            </a:lvl1pPr>
+          </a:lstStyle>
+          <a:p>
+            <a:pPr indent="0" defTabSz="914400">
+              <a:lnSpc>
+                <a:spcPct val="100000"/>
+              </a:lnSpc>
+              <a:buNone/>
+              <a:tabLst>
+                <a:tab algn="l" pos="0"/>
+              </a:tabLst>
+            </a:pPr>
+            <a:r>
+              <a:rPr lang="fr-FR" sz="1200" b="0" u="none" strike="noStrike">
+                <a:solidFill>
+                  <a:schemeClr val="dk1">
+                    <a:tint val="75000"/>
+                  </a:schemeClr>
+                </a:solidFill>
+                <a:effectLst/>
+                <a:uFillTx/>
+                <a:latin typeface="Calibri"/>
+              </a:rPr>
+              <a:t>&lt;date/heure&gt;</a:t>
+            </a:r>
+            <a:endParaRPr lang="fr-FR" sz="1200" b="0" u="none" strike="noStrike">
+              <a:solidFill>
+                <a:srgbClr val="000000"/>
+              </a:solidFill>
+              <a:effectLst/>
+              <a:uFillTx/>
+              <a:latin typeface="Times New Roman"/>
+            </a:endParaRPr>
+          </a:p>
+        </p:txBody>
+      </p:sp>
+      <p:sp>
+        <p:nvSpPr>
+          <p:cNvPr id="55" name="PlaceHolder 7"/>
+          <p:cNvSpPr>
+            <a:spLocks noGrp="1"/>
+          </p:cNvSpPr>
+          <p:nvPr>
+            <p:ph type="ftr" idx="29"/>
+          </p:nvPr>
+        </p:nvSpPr>
+        <p:spPr>
+          <a:xfrm>
+            <a:off x="4038480" y="6356520"/>
+            <a:ext cx="4114080" cy="364320"/>
+          </a:xfrm>
+          <a:prstGeom prst="rect">
+            <a:avLst/>
+          </a:prstGeom>
+          <a:noFill/>
+          <a:ln w="0">
+            <a:noFill/>
+          </a:ln>
+        </p:spPr>
+        <p:txBody>
+          <a:bodyPr lIns="91440" rIns="91440" tIns="45720" bIns="45720" anchor="ctr">
+            <a:noAutofit/>
+          </a:bodyPr>
+          <a:lstStyle>
+            <a:lvl1pPr indent="0" algn="ctr">
+              <a:lnSpc>
+                <a:spcPct val="100000"/>
+              </a:lnSpc>
+              <a:buNone/>
+              <a:tabLst>
+                <a:tab algn="l" pos="0"/>
+              </a:tabLst>
+              <a:defRPr lang="fr-FR" sz="1400" b="0" u="none" strike="noStrike">
+                <a:solidFill>
+                  <a:srgbClr val="000000"/>
+                </a:solidFill>
+                <a:effectLst/>
+                <a:uFillTx/>
+                <a:latin typeface="Times New Roman"/>
+              </a:defRPr>
+            </a:lvl1pPr>
+          </a:lstStyle>
+          <a:p>
+            <a:pPr indent="0" algn="ctr">
+              <a:lnSpc>
+                <a:spcPct val="100000"/>
+              </a:lnSpc>
+              <a:buNone/>
+              <a:tabLst>
+                <a:tab algn="l" pos="0"/>
+              </a:tabLst>
+            </a:pPr>
+            <a:r>
+              <a:rPr lang="fr-FR" sz="1400" b="0" u="none" strike="noStrike">
+                <a:solidFill>
+                  <a:srgbClr val="000000"/>
+                </a:solidFill>
+                <a:effectLst/>
+                <a:uFillTx/>
+                <a:latin typeface="Times New Roman"/>
+              </a:rPr>
+              <a:t>&lt;pied de page&gt;</a:t>
+            </a:r>
+            <a:endParaRPr lang="fr-FR" sz="1400" b="0" u="none" strike="noStrike">
+              <a:solidFill>
+                <a:srgbClr val="000000"/>
+              </a:solidFill>
+              <a:effectLst/>
+              <a:uFillTx/>
+              <a:latin typeface="Times New Roman"/>
+            </a:endParaRPr>
+          </a:p>
+        </p:txBody>
+      </p:sp>
+      <p:sp>
+        <p:nvSpPr>
+          <p:cNvPr id="56" name="PlaceHolder 8"/>
+          <p:cNvSpPr>
+            <a:spLocks noGrp="1"/>
+          </p:cNvSpPr>
+          <p:nvPr>
             <p:ph type="sldNum" idx="30"/>
           </p:nvPr>
         </p:nvSpPr>
         <p:spPr>
           <a:xfrm>
             <a:off x="8610480" y="6356520"/>
-            <a:ext cx="2742840" cy="364680"/>
+            <a:ext cx="2742480" cy="364320"/>
           </a:xfrm>
           <a:prstGeom prst="rect">
             <a:avLst/>
@@ -949,6 +1444,9 @@
                 <a:spcPct val="100000"/>
               </a:lnSpc>
               <a:buNone/>
+              <a:tabLst>
+                <a:tab algn="l" pos="0"/>
+              </a:tabLst>
               <a:defRPr lang="fr-FR" sz="1200" b="0" u="none" strike="noStrike">
                 <a:solidFill>
                   <a:schemeClr val="dk1">
@@ -967,8 +1465,11 @@
                 <a:spcPct val="100000"/>
               </a:lnSpc>
               <a:buNone/>
-            </a:pPr>
-            <a:fld id="{1CE837B9-0ECD-40E6-983A-C30E5691C0CE}" type="slidenum">
+              <a:tabLst>
+                <a:tab algn="l" pos="0"/>
+              </a:tabLst>
+            </a:pPr>
+            <a:fld id="{11FF8BDE-CF27-487A-8209-3CB483A0ABC7}" type="slidenum">
               <a:rPr lang="fr-FR" sz="1200" b="0" u="none" strike="noStrike">
                 <a:solidFill>
                   <a:schemeClr val="dk1">
@@ -998,6 +1499,929 @@
 </file>
 
 <file path=ppt/slideLayouts/slideLayout11.xml><?xml version="1.0" encoding="utf-8"?>
+<p:sldLayout xmlns:a="http://schemas.openxmlformats.org/drawingml/2006/main" xmlns:p="http://schemas.openxmlformats.org/presentationml/2006/main" xmlns:r="http://schemas.openxmlformats.org/officeDocument/2006/relationships" xmlns:p14="http://schemas.microsoft.com/office/powerpoint/2010/main" xmlns:p15="http://schemas.microsoft.com/office/powerpoint/2012/main" xmlns:mc="http://schemas.openxmlformats.org/markup-compatibility/2006" type="titleOnly" preserve="1">
+  <p:cSld name="Titre seul">
+    <p:bg>
+      <p:bgPr>
+        <a:blipFill rotWithShape="0">
+          <a:blip r:embed="rId2"/>
+          <a:stretch/>
+        </a:blipFill>
+      </p:bgPr>
+    </p:bg>
+    <p:spTree>
+      <p:nvGrpSpPr>
+        <p:cNvPr id="1" name=""/>
+        <p:cNvGrpSpPr/>
+        <p:nvPr/>
+      </p:nvGrpSpPr>
+      <p:grpSpPr>
+        <a:xfrm>
+          <a:off x="0" y="0"/>
+          <a:ext cx="0" cy="0"/>
+          <a:chOff x="0" y="0"/>
+          <a:chExt cx="0" cy="0"/>
+        </a:xfrm>
+      </p:grpSpPr>
+      <p:sp>
+        <p:nvSpPr>
+          <p:cNvPr id="57" name="PlaceHolder 1"/>
+          <p:cNvSpPr>
+            <a:spLocks noGrp="1"/>
+          </p:cNvSpPr>
+          <p:nvPr>
+            <p:ph type="title"/>
+          </p:nvPr>
+        </p:nvSpPr>
+        <p:spPr>
+          <a:xfrm>
+            <a:off x="838080" y="365040"/>
+            <a:ext cx="10514880" cy="1324800"/>
+          </a:xfrm>
+          <a:prstGeom prst="rect">
+            <a:avLst/>
+          </a:prstGeom>
+          <a:noFill/>
+          <a:ln w="0">
+            <a:noFill/>
+          </a:ln>
+        </p:spPr>
+        <p:txBody>
+          <a:bodyPr lIns="91440" rIns="91440" tIns="45720" bIns="45720" anchor="ctr">
+            <a:noAutofit/>
+          </a:bodyPr>
+          <a:p>
+            <a:pPr indent="0" defTabSz="914400">
+              <a:lnSpc>
+                <a:spcPct val="90000"/>
+              </a:lnSpc>
+              <a:buNone/>
+              <a:tabLst>
+                <a:tab algn="l" pos="0"/>
+              </a:tabLst>
+            </a:pPr>
+            <a:r>
+              <a:rPr lang="fr-FR" sz="4400" b="0" u="none" strike="noStrike">
+                <a:solidFill>
+                  <a:schemeClr val="dk1"/>
+                </a:solidFill>
+                <a:effectLst/>
+                <a:uFillTx/>
+                <a:latin typeface="Calibri Light"/>
+              </a:rPr>
+              <a:t>Modifiez le style du titre</a:t>
+            </a:r>
+            <a:endParaRPr lang="fr-FR" sz="4400" b="0" u="none" strike="noStrike">
+              <a:solidFill>
+                <a:srgbClr val="000000"/>
+              </a:solidFill>
+              <a:effectLst/>
+              <a:uFillTx/>
+              <a:latin typeface="Arial"/>
+            </a:endParaRPr>
+          </a:p>
+        </p:txBody>
+      </p:sp>
+      <p:sp>
+        <p:nvSpPr>
+          <p:cNvPr id="58" name="PlaceHolder 2"/>
+          <p:cNvSpPr>
+            <a:spLocks noGrp="1"/>
+          </p:cNvSpPr>
+          <p:nvPr>
+            <p:ph type="dt" idx="31"/>
+          </p:nvPr>
+        </p:nvSpPr>
+        <p:spPr>
+          <a:xfrm>
+            <a:off x="838080" y="6356520"/>
+            <a:ext cx="2742480" cy="364320"/>
+          </a:xfrm>
+          <a:prstGeom prst="rect">
+            <a:avLst/>
+          </a:prstGeom>
+          <a:noFill/>
+          <a:ln w="0">
+            <a:noFill/>
+          </a:ln>
+        </p:spPr>
+        <p:txBody>
+          <a:bodyPr lIns="91440" rIns="91440" tIns="45720" bIns="45720" anchor="ctr">
+            <a:noAutofit/>
+          </a:bodyPr>
+          <a:lstStyle>
+            <a:lvl1pPr indent="0" defTabSz="914400">
+              <a:lnSpc>
+                <a:spcPct val="100000"/>
+              </a:lnSpc>
+              <a:buNone/>
+              <a:tabLst>
+                <a:tab algn="l" pos="0"/>
+              </a:tabLst>
+              <a:defRPr lang="fr-FR" sz="1200" b="0" u="none" strike="noStrike">
+                <a:solidFill>
+                  <a:schemeClr val="dk1">
+                    <a:tint val="75000"/>
+                  </a:schemeClr>
+                </a:solidFill>
+                <a:effectLst/>
+                <a:uFillTx/>
+                <a:latin typeface="Calibri"/>
+              </a:defRPr>
+            </a:lvl1pPr>
+          </a:lstStyle>
+          <a:p>
+            <a:pPr indent="0" defTabSz="914400">
+              <a:lnSpc>
+                <a:spcPct val="100000"/>
+              </a:lnSpc>
+              <a:buNone/>
+              <a:tabLst>
+                <a:tab algn="l" pos="0"/>
+              </a:tabLst>
+            </a:pPr>
+            <a:r>
+              <a:rPr lang="fr-FR" sz="1200" b="0" u="none" strike="noStrike">
+                <a:solidFill>
+                  <a:schemeClr val="dk1">
+                    <a:tint val="75000"/>
+                  </a:schemeClr>
+                </a:solidFill>
+                <a:effectLst/>
+                <a:uFillTx/>
+                <a:latin typeface="Calibri"/>
+              </a:rPr>
+              <a:t>&lt;date/heure&gt;</a:t>
+            </a:r>
+            <a:endParaRPr lang="fr-FR" sz="1200" b="0" u="none" strike="noStrike">
+              <a:solidFill>
+                <a:srgbClr val="000000"/>
+              </a:solidFill>
+              <a:effectLst/>
+              <a:uFillTx/>
+              <a:latin typeface="Times New Roman"/>
+            </a:endParaRPr>
+          </a:p>
+        </p:txBody>
+      </p:sp>
+      <p:sp>
+        <p:nvSpPr>
+          <p:cNvPr id="59" name="PlaceHolder 3"/>
+          <p:cNvSpPr>
+            <a:spLocks noGrp="1"/>
+          </p:cNvSpPr>
+          <p:nvPr>
+            <p:ph type="ftr" idx="32"/>
+          </p:nvPr>
+        </p:nvSpPr>
+        <p:spPr>
+          <a:xfrm>
+            <a:off x="4038480" y="6356520"/>
+            <a:ext cx="4114080" cy="364320"/>
+          </a:xfrm>
+          <a:prstGeom prst="rect">
+            <a:avLst/>
+          </a:prstGeom>
+          <a:noFill/>
+          <a:ln w="0">
+            <a:noFill/>
+          </a:ln>
+        </p:spPr>
+        <p:txBody>
+          <a:bodyPr lIns="91440" rIns="91440" tIns="45720" bIns="45720" anchor="ctr">
+            <a:noAutofit/>
+          </a:bodyPr>
+          <a:lstStyle>
+            <a:lvl1pPr indent="0" algn="ctr">
+              <a:lnSpc>
+                <a:spcPct val="100000"/>
+              </a:lnSpc>
+              <a:buNone/>
+              <a:tabLst>
+                <a:tab algn="l" pos="0"/>
+              </a:tabLst>
+              <a:defRPr lang="fr-FR" sz="1400" b="0" u="none" strike="noStrike">
+                <a:solidFill>
+                  <a:srgbClr val="000000"/>
+                </a:solidFill>
+                <a:effectLst/>
+                <a:uFillTx/>
+                <a:latin typeface="Times New Roman"/>
+              </a:defRPr>
+            </a:lvl1pPr>
+          </a:lstStyle>
+          <a:p>
+            <a:pPr indent="0" algn="ctr">
+              <a:lnSpc>
+                <a:spcPct val="100000"/>
+              </a:lnSpc>
+              <a:buNone/>
+              <a:tabLst>
+                <a:tab algn="l" pos="0"/>
+              </a:tabLst>
+            </a:pPr>
+            <a:r>
+              <a:rPr lang="fr-FR" sz="1400" b="0" u="none" strike="noStrike">
+                <a:solidFill>
+                  <a:srgbClr val="000000"/>
+                </a:solidFill>
+                <a:effectLst/>
+                <a:uFillTx/>
+                <a:latin typeface="Times New Roman"/>
+              </a:rPr>
+              <a:t>&lt;pied de page&gt;</a:t>
+            </a:r>
+            <a:endParaRPr lang="fr-FR" sz="1400" b="0" u="none" strike="noStrike">
+              <a:solidFill>
+                <a:srgbClr val="000000"/>
+              </a:solidFill>
+              <a:effectLst/>
+              <a:uFillTx/>
+              <a:latin typeface="Times New Roman"/>
+            </a:endParaRPr>
+          </a:p>
+        </p:txBody>
+      </p:sp>
+      <p:sp>
+        <p:nvSpPr>
+          <p:cNvPr id="60" name="PlaceHolder 4"/>
+          <p:cNvSpPr>
+            <a:spLocks noGrp="1"/>
+          </p:cNvSpPr>
+          <p:nvPr>
+            <p:ph type="sldNum" idx="33"/>
+          </p:nvPr>
+        </p:nvSpPr>
+        <p:spPr>
+          <a:xfrm>
+            <a:off x="8610480" y="6356520"/>
+            <a:ext cx="2742480" cy="364320"/>
+          </a:xfrm>
+          <a:prstGeom prst="rect">
+            <a:avLst/>
+          </a:prstGeom>
+          <a:noFill/>
+          <a:ln w="0">
+            <a:noFill/>
+          </a:ln>
+        </p:spPr>
+        <p:txBody>
+          <a:bodyPr lIns="91440" rIns="91440" tIns="45720" bIns="45720" anchor="ctr">
+            <a:noAutofit/>
+          </a:bodyPr>
+          <a:lstStyle>
+            <a:lvl1pPr indent="0" algn="r" defTabSz="914400">
+              <a:lnSpc>
+                <a:spcPct val="100000"/>
+              </a:lnSpc>
+              <a:buNone/>
+              <a:tabLst>
+                <a:tab algn="l" pos="0"/>
+              </a:tabLst>
+              <a:defRPr lang="fr-FR" sz="1200" b="0" u="none" strike="noStrike">
+                <a:solidFill>
+                  <a:schemeClr val="dk1">
+                    <a:tint val="75000"/>
+                  </a:schemeClr>
+                </a:solidFill>
+                <a:effectLst/>
+                <a:uFillTx/>
+                <a:latin typeface="Calibri"/>
+              </a:defRPr>
+            </a:lvl1pPr>
+          </a:lstStyle>
+          <a:p>
+            <a:pPr indent="0" algn="r" defTabSz="914400">
+              <a:lnSpc>
+                <a:spcPct val="100000"/>
+              </a:lnSpc>
+              <a:buNone/>
+              <a:tabLst>
+                <a:tab algn="l" pos="0"/>
+              </a:tabLst>
+            </a:pPr>
+            <a:fld id="{CC57F57A-ED71-42F8-93EF-94ACA675FCC1}" type="slidenum">
+              <a:rPr lang="fr-FR" sz="1200" b="0" u="none" strike="noStrike">
+                <a:solidFill>
+                  <a:schemeClr val="dk1">
+                    <a:tint val="75000"/>
+                  </a:schemeClr>
+                </a:solidFill>
+                <a:effectLst/>
+                <a:uFillTx/>
+                <a:latin typeface="Calibri"/>
+              </a:rPr>
+              <a:t>&lt;numéro&gt;</a:t>
+            </a:fld>
+            <a:endParaRPr lang="fr-FR" sz="1200" b="0" u="none" strike="noStrike">
+              <a:solidFill>
+                <a:srgbClr val="000000"/>
+              </a:solidFill>
+              <a:effectLst/>
+              <a:uFillTx/>
+              <a:latin typeface="Times New Roman"/>
+            </a:endParaRPr>
+          </a:p>
+        </p:txBody>
+      </p:sp>
+    </p:spTree>
+  </p:cSld>
+</p:sldLayout>
+</file>
+
+<file path=ppt/slideLayouts/slideLayout2.xml><?xml version="1.0" encoding="utf-8"?>
+<p:sldLayout xmlns:a="http://schemas.openxmlformats.org/drawingml/2006/main" xmlns:p="http://schemas.openxmlformats.org/presentationml/2006/main" xmlns:r="http://schemas.openxmlformats.org/officeDocument/2006/relationships" xmlns:p14="http://schemas.microsoft.com/office/powerpoint/2010/main" xmlns:p15="http://schemas.microsoft.com/office/powerpoint/2012/main" xmlns:mc="http://schemas.openxmlformats.org/markup-compatibility/2006" type="blank" preserve="1">
+  <p:cSld name="Contenu avec légende">
+    <p:bg>
+      <p:bgPr>
+        <a:blipFill rotWithShape="0">
+          <a:blip r:embed="rId2"/>
+          <a:stretch/>
+        </a:blipFill>
+      </p:bgPr>
+    </p:bg>
+    <p:spTree>
+      <p:nvGrpSpPr>
+        <p:cNvPr id="1" name=""/>
+        <p:cNvGrpSpPr/>
+        <p:nvPr/>
+      </p:nvGrpSpPr>
+      <p:grpSpPr>
+        <a:xfrm>
+          <a:off x="0" y="0"/>
+          <a:ext cx="0" cy="0"/>
+          <a:chOff x="0" y="0"/>
+          <a:chExt cx="0" cy="0"/>
+        </a:xfrm>
+      </p:grpSpPr>
+      <p:sp>
+        <p:nvSpPr>
+          <p:cNvPr id="7" name="PlaceHolder 1"/>
+          <p:cNvSpPr>
+            <a:spLocks noGrp="1"/>
+          </p:cNvSpPr>
+          <p:nvPr>
+            <p:ph type="title"/>
+          </p:nvPr>
+        </p:nvSpPr>
+        <p:spPr>
+          <a:xfrm>
+            <a:off x="839880" y="457200"/>
+            <a:ext cx="3931560" cy="1599480"/>
+          </a:xfrm>
+          <a:prstGeom prst="rect">
+            <a:avLst/>
+          </a:prstGeom>
+          <a:noFill/>
+          <a:ln w="0">
+            <a:noFill/>
+          </a:ln>
+        </p:spPr>
+        <p:txBody>
+          <a:bodyPr lIns="91440" rIns="91440" tIns="45720" bIns="45720" anchor="b">
+            <a:noAutofit/>
+          </a:bodyPr>
+          <a:p>
+            <a:pPr indent="0" defTabSz="914400">
+              <a:lnSpc>
+                <a:spcPct val="90000"/>
+              </a:lnSpc>
+              <a:buNone/>
+              <a:tabLst>
+                <a:tab algn="l" pos="0"/>
+              </a:tabLst>
+            </a:pPr>
+            <a:r>
+              <a:rPr lang="fr-FR" sz="3200" b="0" u="none" strike="noStrike">
+                <a:solidFill>
+                  <a:schemeClr val="dk1"/>
+                </a:solidFill>
+                <a:effectLst/>
+                <a:uFillTx/>
+                <a:latin typeface="Calibri Light"/>
+              </a:rPr>
+              <a:t>Modifiez le style du titre</a:t>
+            </a:r>
+            <a:endParaRPr lang="fr-FR" sz="3200" b="0" u="none" strike="noStrike">
+              <a:solidFill>
+                <a:srgbClr val="000000"/>
+              </a:solidFill>
+              <a:effectLst/>
+              <a:uFillTx/>
+              <a:latin typeface="Arial"/>
+            </a:endParaRPr>
+          </a:p>
+        </p:txBody>
+      </p:sp>
+      <p:sp>
+        <p:nvSpPr>
+          <p:cNvPr id="8" name="PlaceHolder 2"/>
+          <p:cNvSpPr>
+            <a:spLocks noGrp="1"/>
+          </p:cNvSpPr>
+          <p:nvPr>
+            <p:ph type="body"/>
+          </p:nvPr>
+        </p:nvSpPr>
+        <p:spPr>
+          <a:xfrm>
+            <a:off x="5183280" y="987480"/>
+            <a:ext cx="6171480" cy="4872960"/>
+          </a:xfrm>
+          <a:prstGeom prst="rect">
+            <a:avLst/>
+          </a:prstGeom>
+          <a:noFill/>
+          <a:ln w="0">
+            <a:noFill/>
+          </a:ln>
+        </p:spPr>
+        <p:txBody>
+          <a:bodyPr lIns="91440" rIns="91440" tIns="45720" bIns="45720" anchor="t">
+            <a:noAutofit/>
+          </a:bodyPr>
+          <a:p>
+            <a:pPr marL="228600" indent="-228600" defTabSz="914400">
+              <a:lnSpc>
+                <a:spcPct val="90000"/>
+              </a:lnSpc>
+              <a:spcBef>
+                <a:spcPts val="1001"/>
+              </a:spcBef>
+              <a:buClr>
+                <a:srgbClr val="000000"/>
+              </a:buClr>
+              <a:buFont typeface="Arial"/>
+              <a:buChar char="•"/>
+            </a:pPr>
+            <a:r>
+              <a:rPr lang="fr-FR" sz="3200" b="0" u="none" strike="noStrike">
+                <a:solidFill>
+                  <a:schemeClr val="dk1"/>
+                </a:solidFill>
+                <a:effectLst/>
+                <a:uFillTx/>
+                <a:latin typeface="Calibri"/>
+              </a:rPr>
+              <a:t>Modifier les styles du texte du masque</a:t>
+            </a:r>
+            <a:endParaRPr lang="fr-FR" sz="3200" b="0" u="none" strike="noStrike">
+              <a:solidFill>
+                <a:srgbClr val="000000"/>
+              </a:solidFill>
+              <a:effectLst/>
+              <a:uFillTx/>
+              <a:latin typeface="Arial"/>
+            </a:endParaRPr>
+          </a:p>
+          <a:p>
+            <a:pPr marL="685800" lvl="1" indent="-228600" defTabSz="914400">
+              <a:lnSpc>
+                <a:spcPct val="90000"/>
+              </a:lnSpc>
+              <a:spcBef>
+                <a:spcPts val="499"/>
+              </a:spcBef>
+              <a:buClr>
+                <a:srgbClr val="000000"/>
+              </a:buClr>
+              <a:buFont typeface="Arial"/>
+              <a:buChar char="•"/>
+            </a:pPr>
+            <a:r>
+              <a:rPr lang="fr-FR" sz="2800" b="0" u="none" strike="noStrike">
+                <a:solidFill>
+                  <a:schemeClr val="dk1"/>
+                </a:solidFill>
+                <a:effectLst/>
+                <a:uFillTx/>
+                <a:latin typeface="Calibri"/>
+              </a:rPr>
+              <a:t>Deuxième niveau</a:t>
+            </a:r>
+            <a:endParaRPr lang="fr-FR" sz="2800" b="0" u="none" strike="noStrike">
+              <a:solidFill>
+                <a:srgbClr val="000000"/>
+              </a:solidFill>
+              <a:effectLst/>
+              <a:uFillTx/>
+              <a:latin typeface="Arial"/>
+            </a:endParaRPr>
+          </a:p>
+          <a:p>
+            <a:pPr marL="1143000" lvl="2" indent="-228600" defTabSz="914400">
+              <a:lnSpc>
+                <a:spcPct val="90000"/>
+              </a:lnSpc>
+              <a:spcBef>
+                <a:spcPts val="499"/>
+              </a:spcBef>
+              <a:buClr>
+                <a:srgbClr val="000000"/>
+              </a:buClr>
+              <a:buFont typeface="Arial"/>
+              <a:buChar char="•"/>
+            </a:pPr>
+            <a:r>
+              <a:rPr lang="fr-FR" sz="2400" b="0" u="none" strike="noStrike">
+                <a:solidFill>
+                  <a:schemeClr val="dk1"/>
+                </a:solidFill>
+                <a:effectLst/>
+                <a:uFillTx/>
+                <a:latin typeface="Calibri"/>
+              </a:rPr>
+              <a:t>Troisième niveau</a:t>
+            </a:r>
+            <a:endParaRPr lang="fr-FR" sz="2400" b="0" u="none" strike="noStrike">
+              <a:solidFill>
+                <a:srgbClr val="000000"/>
+              </a:solidFill>
+              <a:effectLst/>
+              <a:uFillTx/>
+              <a:latin typeface="Arial"/>
+            </a:endParaRPr>
+          </a:p>
+          <a:p>
+            <a:pPr marL="1600200" lvl="3" indent="-228600" defTabSz="914400">
+              <a:lnSpc>
+                <a:spcPct val="90000"/>
+              </a:lnSpc>
+              <a:spcBef>
+                <a:spcPts val="499"/>
+              </a:spcBef>
+              <a:buClr>
+                <a:srgbClr val="000000"/>
+              </a:buClr>
+              <a:buFont typeface="Arial"/>
+              <a:buChar char="•"/>
+            </a:pPr>
+            <a:r>
+              <a:rPr lang="fr-FR" sz="2000" b="0" u="none" strike="noStrike">
+                <a:solidFill>
+                  <a:schemeClr val="dk1"/>
+                </a:solidFill>
+                <a:effectLst/>
+                <a:uFillTx/>
+                <a:latin typeface="Calibri"/>
+              </a:rPr>
+              <a:t>Quatrième niveau</a:t>
+            </a:r>
+            <a:endParaRPr lang="fr-FR" sz="2000" b="0" u="none" strike="noStrike">
+              <a:solidFill>
+                <a:srgbClr val="000000"/>
+              </a:solidFill>
+              <a:effectLst/>
+              <a:uFillTx/>
+              <a:latin typeface="Arial"/>
+            </a:endParaRPr>
+          </a:p>
+          <a:p>
+            <a:pPr marL="2057400" lvl="4" indent="-228600" defTabSz="914400">
+              <a:lnSpc>
+                <a:spcPct val="90000"/>
+              </a:lnSpc>
+              <a:spcBef>
+                <a:spcPts val="499"/>
+              </a:spcBef>
+              <a:buClr>
+                <a:srgbClr val="000000"/>
+              </a:buClr>
+              <a:buFont typeface="Arial"/>
+              <a:buChar char="•"/>
+            </a:pPr>
+            <a:r>
+              <a:rPr lang="fr-FR" sz="2000" b="0" u="none" strike="noStrike">
+                <a:solidFill>
+                  <a:schemeClr val="dk1"/>
+                </a:solidFill>
+                <a:effectLst/>
+                <a:uFillTx/>
+                <a:latin typeface="Calibri"/>
+              </a:rPr>
+              <a:t>Cinquième niveau</a:t>
+            </a:r>
+            <a:endParaRPr lang="fr-FR" sz="2000" b="0" u="none" strike="noStrike">
+              <a:solidFill>
+                <a:srgbClr val="000000"/>
+              </a:solidFill>
+              <a:effectLst/>
+              <a:uFillTx/>
+              <a:latin typeface="Arial"/>
+            </a:endParaRPr>
+          </a:p>
+        </p:txBody>
+      </p:sp>
+      <p:sp>
+        <p:nvSpPr>
+          <p:cNvPr id="9" name="PlaceHolder 3"/>
+          <p:cNvSpPr>
+            <a:spLocks noGrp="1"/>
+          </p:cNvSpPr>
+          <p:nvPr>
+            <p:ph type="body"/>
+          </p:nvPr>
+        </p:nvSpPr>
+        <p:spPr>
+          <a:xfrm>
+            <a:off x="839880" y="2057400"/>
+            <a:ext cx="3931560" cy="3810960"/>
+          </a:xfrm>
+          <a:prstGeom prst="rect">
+            <a:avLst/>
+          </a:prstGeom>
+          <a:noFill/>
+          <a:ln w="0">
+            <a:noFill/>
+          </a:ln>
+        </p:spPr>
+        <p:txBody>
+          <a:bodyPr lIns="91440" rIns="91440" tIns="45720" bIns="45720" anchor="t">
+            <a:noAutofit/>
+          </a:bodyPr>
+          <a:p>
+            <a:pPr indent="0" defTabSz="914400">
+              <a:lnSpc>
+                <a:spcPct val="90000"/>
+              </a:lnSpc>
+              <a:spcBef>
+                <a:spcPts val="1001"/>
+              </a:spcBef>
+              <a:buNone/>
+              <a:tabLst>
+                <a:tab algn="l" pos="0"/>
+              </a:tabLst>
+            </a:pPr>
+            <a:r>
+              <a:rPr lang="fr-FR" sz="1600" b="0" u="none" strike="noStrike">
+                <a:solidFill>
+                  <a:schemeClr val="dk1"/>
+                </a:solidFill>
+                <a:effectLst/>
+                <a:uFillTx/>
+                <a:latin typeface="Calibri"/>
+              </a:rPr>
+              <a:t>Modifier les styles du texte du masque</a:t>
+            </a:r>
+            <a:endParaRPr lang="fr-FR" sz="1600" b="0" u="none" strike="noStrike">
+              <a:solidFill>
+                <a:srgbClr val="000000"/>
+              </a:solidFill>
+              <a:effectLst/>
+              <a:uFillTx/>
+              <a:latin typeface="Arial"/>
+            </a:endParaRPr>
+          </a:p>
+        </p:txBody>
+      </p:sp>
+      <p:sp>
+        <p:nvSpPr>
+          <p:cNvPr id="10" name="PlaceHolder 4"/>
+          <p:cNvSpPr>
+            <a:spLocks noGrp="1"/>
+          </p:cNvSpPr>
+          <p:nvPr>
+            <p:ph type="dt" idx="4"/>
+          </p:nvPr>
+        </p:nvSpPr>
+        <p:spPr>
+          <a:xfrm>
+            <a:off x="838080" y="6356520"/>
+            <a:ext cx="2742480" cy="364320"/>
+          </a:xfrm>
+          <a:prstGeom prst="rect">
+            <a:avLst/>
+          </a:prstGeom>
+          <a:noFill/>
+          <a:ln w="0">
+            <a:noFill/>
+          </a:ln>
+        </p:spPr>
+        <p:txBody>
+          <a:bodyPr lIns="91440" rIns="91440" tIns="45720" bIns="45720" anchor="ctr">
+            <a:noAutofit/>
+          </a:bodyPr>
+          <a:lstStyle>
+            <a:lvl1pPr indent="0" defTabSz="914400">
+              <a:lnSpc>
+                <a:spcPct val="100000"/>
+              </a:lnSpc>
+              <a:buNone/>
+              <a:tabLst>
+                <a:tab algn="l" pos="0"/>
+              </a:tabLst>
+              <a:defRPr lang="fr-FR" sz="1200" b="0" u="none" strike="noStrike">
+                <a:solidFill>
+                  <a:schemeClr val="dk1">
+                    <a:tint val="75000"/>
+                  </a:schemeClr>
+                </a:solidFill>
+                <a:effectLst/>
+                <a:uFillTx/>
+                <a:latin typeface="Calibri"/>
+              </a:defRPr>
+            </a:lvl1pPr>
+          </a:lstStyle>
+          <a:p>
+            <a:pPr indent="0" defTabSz="914400">
+              <a:lnSpc>
+                <a:spcPct val="100000"/>
+              </a:lnSpc>
+              <a:buNone/>
+              <a:tabLst>
+                <a:tab algn="l" pos="0"/>
+              </a:tabLst>
+            </a:pPr>
+            <a:r>
+              <a:rPr lang="fr-FR" sz="1200" b="0" u="none" strike="noStrike">
+                <a:solidFill>
+                  <a:schemeClr val="dk1">
+                    <a:tint val="75000"/>
+                  </a:schemeClr>
+                </a:solidFill>
+                <a:effectLst/>
+                <a:uFillTx/>
+                <a:latin typeface="Calibri"/>
+              </a:rPr>
+              <a:t>&lt;date/heure&gt;</a:t>
+            </a:r>
+            <a:endParaRPr lang="fr-FR" sz="1200" b="0" u="none" strike="noStrike">
+              <a:solidFill>
+                <a:srgbClr val="000000"/>
+              </a:solidFill>
+              <a:effectLst/>
+              <a:uFillTx/>
+              <a:latin typeface="Times New Roman"/>
+            </a:endParaRPr>
+          </a:p>
+        </p:txBody>
+      </p:sp>
+      <p:sp>
+        <p:nvSpPr>
+          <p:cNvPr id="11" name="PlaceHolder 5"/>
+          <p:cNvSpPr>
+            <a:spLocks noGrp="1"/>
+          </p:cNvSpPr>
+          <p:nvPr>
+            <p:ph type="ftr" idx="5"/>
+          </p:nvPr>
+        </p:nvSpPr>
+        <p:spPr>
+          <a:xfrm>
+            <a:off x="4038480" y="6356520"/>
+            <a:ext cx="4114080" cy="364320"/>
+          </a:xfrm>
+          <a:prstGeom prst="rect">
+            <a:avLst/>
+          </a:prstGeom>
+          <a:noFill/>
+          <a:ln w="0">
+            <a:noFill/>
+          </a:ln>
+        </p:spPr>
+        <p:txBody>
+          <a:bodyPr lIns="91440" rIns="91440" tIns="45720" bIns="45720" anchor="ctr">
+            <a:noAutofit/>
+          </a:bodyPr>
+          <a:lstStyle>
+            <a:lvl1pPr indent="0" algn="ctr">
+              <a:lnSpc>
+                <a:spcPct val="100000"/>
+              </a:lnSpc>
+              <a:buNone/>
+              <a:tabLst>
+                <a:tab algn="l" pos="0"/>
+              </a:tabLst>
+              <a:defRPr lang="fr-FR" sz="1400" b="0" u="none" strike="noStrike">
+                <a:solidFill>
+                  <a:srgbClr val="000000"/>
+                </a:solidFill>
+                <a:effectLst/>
+                <a:uFillTx/>
+                <a:latin typeface="Times New Roman"/>
+              </a:defRPr>
+            </a:lvl1pPr>
+          </a:lstStyle>
+          <a:p>
+            <a:pPr indent="0" algn="ctr">
+              <a:lnSpc>
+                <a:spcPct val="100000"/>
+              </a:lnSpc>
+              <a:buNone/>
+              <a:tabLst>
+                <a:tab algn="l" pos="0"/>
+              </a:tabLst>
+            </a:pPr>
+            <a:r>
+              <a:rPr lang="fr-FR" sz="1400" b="0" u="none" strike="noStrike">
+                <a:solidFill>
+                  <a:srgbClr val="000000"/>
+                </a:solidFill>
+                <a:effectLst/>
+                <a:uFillTx/>
+                <a:latin typeface="Times New Roman"/>
+              </a:rPr>
+              <a:t>&lt;pied de page&gt;</a:t>
+            </a:r>
+            <a:endParaRPr lang="fr-FR" sz="1400" b="0" u="none" strike="noStrike">
+              <a:solidFill>
+                <a:srgbClr val="000000"/>
+              </a:solidFill>
+              <a:effectLst/>
+              <a:uFillTx/>
+              <a:latin typeface="Times New Roman"/>
+            </a:endParaRPr>
+          </a:p>
+        </p:txBody>
+      </p:sp>
+      <p:sp>
+        <p:nvSpPr>
+          <p:cNvPr id="12" name="PlaceHolder 6"/>
+          <p:cNvSpPr>
+            <a:spLocks noGrp="1"/>
+          </p:cNvSpPr>
+          <p:nvPr>
+            <p:ph type="sldNum" idx="6"/>
+          </p:nvPr>
+        </p:nvSpPr>
+        <p:spPr>
+          <a:xfrm>
+            <a:off x="8610480" y="6356520"/>
+            <a:ext cx="2742480" cy="364320"/>
+          </a:xfrm>
+          <a:prstGeom prst="rect">
+            <a:avLst/>
+          </a:prstGeom>
+          <a:noFill/>
+          <a:ln w="0">
+            <a:noFill/>
+          </a:ln>
+        </p:spPr>
+        <p:txBody>
+          <a:bodyPr lIns="91440" rIns="91440" tIns="45720" bIns="45720" anchor="ctr">
+            <a:noAutofit/>
+          </a:bodyPr>
+          <a:lstStyle>
+            <a:lvl1pPr indent="0" algn="r" defTabSz="914400">
+              <a:lnSpc>
+                <a:spcPct val="100000"/>
+              </a:lnSpc>
+              <a:buNone/>
+              <a:tabLst>
+                <a:tab algn="l" pos="0"/>
+              </a:tabLst>
+              <a:defRPr lang="fr-FR" sz="1200" b="0" u="none" strike="noStrike">
+                <a:solidFill>
+                  <a:schemeClr val="dk1">
+                    <a:tint val="75000"/>
+                  </a:schemeClr>
+                </a:solidFill>
+                <a:effectLst/>
+                <a:uFillTx/>
+                <a:latin typeface="Calibri"/>
+              </a:defRPr>
+            </a:lvl1pPr>
+          </a:lstStyle>
+          <a:p>
+            <a:pPr indent="0" algn="r" defTabSz="914400">
+              <a:lnSpc>
+                <a:spcPct val="100000"/>
+              </a:lnSpc>
+              <a:buNone/>
+              <a:tabLst>
+                <a:tab algn="l" pos="0"/>
+              </a:tabLst>
+            </a:pPr>
+            <a:fld id="{ABF8195C-EC08-41EC-AEC8-3EE150971D23}" type="slidenum">
+              <a:rPr lang="fr-FR" sz="1200" b="0" u="none" strike="noStrike">
+                <a:solidFill>
+                  <a:schemeClr val="dk1">
+                    <a:tint val="75000"/>
+                  </a:schemeClr>
+                </a:solidFill>
+                <a:effectLst/>
+                <a:uFillTx/>
+                <a:latin typeface="Calibri"/>
+              </a:rPr>
+              <a:t>&lt;numéro&gt;</a:t>
+            </a:fld>
+            <a:endParaRPr lang="fr-FR" sz="1200" b="0" u="none" strike="noStrike">
+              <a:solidFill>
+                <a:srgbClr val="000000"/>
+              </a:solidFill>
+              <a:effectLst/>
+              <a:uFillTx/>
+              <a:latin typeface="Times New Roman"/>
+            </a:endParaRPr>
+          </a:p>
+        </p:txBody>
+      </p:sp>
+    </p:spTree>
+  </p:cSld>
+</p:sldLayout>
+</file>
+
+<file path=ppt/slideLayouts/slideLayout3.xml><?xml version="1.0" encoding="utf-8"?>
 <p:sldLayout xmlns:a="http://schemas.openxmlformats.org/drawingml/2006/main" xmlns:p="http://schemas.openxmlformats.org/presentationml/2006/main" xmlns:r="http://schemas.openxmlformats.org/officeDocument/2006/relationships" xmlns:p14="http://schemas.microsoft.com/office/powerpoint/2010/main" xmlns:p15="http://schemas.microsoft.com/office/powerpoint/2012/main" xmlns:mc="http://schemas.openxmlformats.org/markup-compatibility/2006" type="blank" preserve="1">
   <p:cSld name="Image avec légende">
     <p:bg>
@@ -1024,7 +2448,7 @@
       </p:grpSpPr>
       <p:sp>
         <p:nvSpPr>
-          <p:cNvPr id="55" name="PlaceHolder 1"/>
+          <p:cNvPr id="13" name="PlaceHolder 1"/>
           <p:cNvSpPr>
             <a:spLocks noGrp="1"/>
           </p:cNvSpPr>
@@ -1035,7 +2459,7 @@
         <p:spPr>
           <a:xfrm>
             <a:off x="839880" y="457200"/>
-            <a:ext cx="3931920" cy="1599840"/>
+            <a:ext cx="3931560" cy="1599480"/>
           </a:xfrm>
           <a:prstGeom prst="rect">
             <a:avLst/>
@@ -1055,6 +2479,9 @@
                 <a:spcPct val="90000"/>
               </a:lnSpc>
               <a:buNone/>
+              <a:tabLst>
+                <a:tab algn="l" pos="0"/>
+              </a:tabLst>
             </a:pPr>
             <a:r>
               <a:rPr lang="fr-FR" sz="3200" b="0" u="none" strike="noStrike">
@@ -1069,18 +2496,18 @@
             </a:r>
             <a:endParaRPr lang="fr-FR" sz="3200" b="0" u="none" strike="noStrike">
               <a:solidFill>
-                <a:schemeClr val="dk1"/>
-              </a:solidFill>
-              <a:effectLst/>
-              <a:uFillTx/>
-              <a:latin typeface="Calibri"/>
+                <a:srgbClr val="000000"/>
+              </a:solidFill>
+              <a:effectLst/>
+              <a:uFillTx/>
+              <a:latin typeface="Arial"/>
             </a:endParaRPr>
           </a:p>
         </p:txBody>
       </p:sp>
       <p:sp>
         <p:nvSpPr>
-          <p:cNvPr id="56" name="PlaceHolder 2"/>
+          <p:cNvPr id="14" name="PlaceHolder 2"/>
           <p:cNvSpPr>
             <a:spLocks noGrp="1"/>
           </p:cNvSpPr>
@@ -1091,7 +2518,7 @@
         <p:spPr>
           <a:xfrm>
             <a:off x="5183280" y="987480"/>
-            <a:ext cx="6171840" cy="4873320"/>
+            <a:ext cx="6171480" cy="4872960"/>
           </a:xfrm>
           <a:prstGeom prst="rect">
             <a:avLst/>
@@ -1133,11 +2560,11 @@
             </a:r>
             <a:endParaRPr lang="fr-FR" sz="3200" b="0" u="none" strike="noStrike">
               <a:solidFill>
-                <a:schemeClr val="dk1"/>
-              </a:solidFill>
-              <a:effectLst/>
-              <a:uFillTx/>
-              <a:latin typeface="Calibri"/>
+                <a:srgbClr val="000000"/>
+              </a:solidFill>
+              <a:effectLst/>
+              <a:uFillTx/>
+              <a:latin typeface="Arial"/>
             </a:endParaRPr>
           </a:p>
           <a:p>
@@ -1168,11 +2595,11 @@
             </a:r>
             <a:endParaRPr lang="fr-FR" sz="3200" b="0" u="none" strike="noStrike">
               <a:solidFill>
-                <a:schemeClr val="dk1"/>
-              </a:solidFill>
-              <a:effectLst/>
-              <a:uFillTx/>
-              <a:latin typeface="Calibri"/>
+                <a:srgbClr val="000000"/>
+              </a:solidFill>
+              <a:effectLst/>
+              <a:uFillTx/>
+              <a:latin typeface="Arial"/>
             </a:endParaRPr>
           </a:p>
           <a:p>
@@ -1203,11 +2630,11 @@
             </a:r>
             <a:endParaRPr lang="fr-FR" sz="3200" b="0" u="none" strike="noStrike">
               <a:solidFill>
-                <a:schemeClr val="dk1"/>
-              </a:solidFill>
-              <a:effectLst/>
-              <a:uFillTx/>
-              <a:latin typeface="Calibri"/>
+                <a:srgbClr val="000000"/>
+              </a:solidFill>
+              <a:effectLst/>
+              <a:uFillTx/>
+              <a:latin typeface="Arial"/>
             </a:endParaRPr>
           </a:p>
           <a:p>
@@ -1238,11 +2665,11 @@
             </a:r>
             <a:endParaRPr lang="fr-FR" sz="3200" b="0" u="none" strike="noStrike">
               <a:solidFill>
-                <a:schemeClr val="dk1"/>
-              </a:solidFill>
-              <a:effectLst/>
-              <a:uFillTx/>
-              <a:latin typeface="Calibri"/>
+                <a:srgbClr val="000000"/>
+              </a:solidFill>
+              <a:effectLst/>
+              <a:uFillTx/>
+              <a:latin typeface="Arial"/>
             </a:endParaRPr>
           </a:p>
           <a:p>
@@ -1273,11 +2700,11 @@
             </a:r>
             <a:endParaRPr lang="fr-FR" sz="3200" b="0" u="none" strike="noStrike">
               <a:solidFill>
-                <a:schemeClr val="dk1"/>
-              </a:solidFill>
-              <a:effectLst/>
-              <a:uFillTx/>
-              <a:latin typeface="Calibri"/>
+                <a:srgbClr val="000000"/>
+              </a:solidFill>
+              <a:effectLst/>
+              <a:uFillTx/>
+              <a:latin typeface="Arial"/>
             </a:endParaRPr>
           </a:p>
           <a:p>
@@ -1308,11 +2735,11 @@
             </a:r>
             <a:endParaRPr lang="fr-FR" sz="3200" b="0" u="none" strike="noStrike">
               <a:solidFill>
-                <a:schemeClr val="dk1"/>
-              </a:solidFill>
-              <a:effectLst/>
-              <a:uFillTx/>
-              <a:latin typeface="Calibri"/>
+                <a:srgbClr val="000000"/>
+              </a:solidFill>
+              <a:effectLst/>
+              <a:uFillTx/>
+              <a:latin typeface="Arial"/>
             </a:endParaRPr>
           </a:p>
           <a:p>
@@ -1343,18 +2770,18 @@
             </a:r>
             <a:endParaRPr lang="fr-FR" sz="3200" b="0" u="none" strike="noStrike">
               <a:solidFill>
-                <a:schemeClr val="dk1"/>
-              </a:solidFill>
-              <a:effectLst/>
-              <a:uFillTx/>
-              <a:latin typeface="Calibri"/>
+                <a:srgbClr val="000000"/>
+              </a:solidFill>
+              <a:effectLst/>
+              <a:uFillTx/>
+              <a:latin typeface="Arial"/>
             </a:endParaRPr>
           </a:p>
         </p:txBody>
       </p:sp>
       <p:sp>
         <p:nvSpPr>
-          <p:cNvPr id="57" name="PlaceHolder 3"/>
+          <p:cNvPr id="15" name="PlaceHolder 3"/>
           <p:cNvSpPr>
             <a:spLocks noGrp="1"/>
           </p:cNvSpPr>
@@ -1365,7 +2792,7 @@
         <p:spPr>
           <a:xfrm>
             <a:off x="839880" y="2057400"/>
-            <a:ext cx="3931920" cy="3811320"/>
+            <a:ext cx="3931560" cy="3810960"/>
           </a:xfrm>
           <a:prstGeom prst="rect">
             <a:avLst/>
@@ -1405,29 +2832,29 @@
             </a:r>
             <a:endParaRPr lang="fr-FR" sz="1600" b="0" u="none" strike="noStrike">
               <a:solidFill>
-                <a:schemeClr val="dk1"/>
-              </a:solidFill>
-              <a:effectLst/>
-              <a:uFillTx/>
-              <a:latin typeface="Calibri"/>
+                <a:srgbClr val="000000"/>
+              </a:solidFill>
+              <a:effectLst/>
+              <a:uFillTx/>
+              <a:latin typeface="Arial"/>
             </a:endParaRPr>
           </a:p>
         </p:txBody>
       </p:sp>
       <p:sp>
         <p:nvSpPr>
-          <p:cNvPr id="58" name="PlaceHolder 4"/>
+          <p:cNvPr id="16" name="PlaceHolder 4"/>
           <p:cNvSpPr>
             <a:spLocks noGrp="1"/>
           </p:cNvSpPr>
           <p:nvPr>
-            <p:ph type="dt" idx="31"/>
+            <p:ph type="dt" idx="7"/>
           </p:nvPr>
         </p:nvSpPr>
         <p:spPr>
           <a:xfrm>
             <a:off x="838080" y="6356520"/>
-            <a:ext cx="2742840" cy="364680"/>
+            <a:ext cx="2742480" cy="364320"/>
           </a:xfrm>
           <a:prstGeom prst="rect">
             <a:avLst/>
@@ -1447,6 +2874,9 @@
                 <a:spcPct val="100000"/>
               </a:lnSpc>
               <a:buNone/>
+              <a:tabLst>
+                <a:tab algn="l" pos="0"/>
+              </a:tabLst>
               <a:defRPr lang="fr-FR" sz="1200" b="0" u="none" strike="noStrike">
                 <a:solidFill>
                   <a:schemeClr val="dk1">
@@ -1465,6 +2895,9 @@
                 <a:spcPct val="100000"/>
               </a:lnSpc>
               <a:buNone/>
+              <a:tabLst>
+                <a:tab algn="l" pos="0"/>
+              </a:tabLst>
             </a:pPr>
             <a:r>
               <a:rPr lang="fr-FR" sz="1200" b="0" u="none" strike="noStrike">
@@ -1492,18 +2925,18 @@
       </p:sp>
       <p:sp>
         <p:nvSpPr>
-          <p:cNvPr id="59" name="PlaceHolder 5"/>
+          <p:cNvPr id="17" name="PlaceHolder 5"/>
           <p:cNvSpPr>
             <a:spLocks noGrp="1"/>
           </p:cNvSpPr>
           <p:nvPr>
-            <p:ph type="ftr" idx="32"/>
+            <p:ph type="ftr" idx="8"/>
           </p:nvPr>
         </p:nvSpPr>
         <p:spPr>
           <a:xfrm>
             <a:off x="4038480" y="6356520"/>
-            <a:ext cx="4114440" cy="364680"/>
+            <a:ext cx="4114080" cy="364320"/>
           </a:xfrm>
           <a:prstGeom prst="rect">
             <a:avLst/>
@@ -1519,7 +2952,13 @@
           </a:bodyPr>
           <a:lstStyle>
             <a:lvl1pPr indent="0" algn="ctr">
+              <a:lnSpc>
+                <a:spcPct val="100000"/>
+              </a:lnSpc>
               <a:buNone/>
+              <a:tabLst>
+                <a:tab algn="l" pos="0"/>
+              </a:tabLst>
               <a:defRPr lang="fr-FR" sz="1400" b="0" u="none" strike="noStrike">
                 <a:solidFill>
                   <a:srgbClr val="000000"/>
@@ -1532,7 +2971,13 @@
           </a:lstStyle>
           <a:p>
             <a:pPr indent="0" algn="ctr">
+              <a:lnSpc>
+                <a:spcPct val="100000"/>
+              </a:lnSpc>
               <a:buNone/>
+              <a:tabLst>
+                <a:tab algn="l" pos="0"/>
+              </a:tabLst>
             </a:pPr>
             <a:r>
               <a:rPr lang="fr-FR" sz="1400" b="0" u="none" strike="noStrike">
@@ -1558,18 +3003,18 @@
       </p:sp>
       <p:sp>
         <p:nvSpPr>
-          <p:cNvPr id="60" name="PlaceHolder 6"/>
+          <p:cNvPr id="18" name="PlaceHolder 6"/>
           <p:cNvSpPr>
             <a:spLocks noGrp="1"/>
           </p:cNvSpPr>
           <p:nvPr>
-            <p:ph type="sldNum" idx="33"/>
+            <p:ph type="sldNum" idx="9"/>
           </p:nvPr>
         </p:nvSpPr>
         <p:spPr>
           <a:xfrm>
             <a:off x="8610480" y="6356520"/>
-            <a:ext cx="2742840" cy="364680"/>
+            <a:ext cx="2742480" cy="364320"/>
           </a:xfrm>
           <a:prstGeom prst="rect">
             <a:avLst/>
@@ -1589,6 +3034,9 @@
                 <a:spcPct val="100000"/>
               </a:lnSpc>
               <a:buNone/>
+              <a:tabLst>
+                <a:tab algn="l" pos="0"/>
+              </a:tabLst>
               <a:defRPr lang="fr-FR" sz="1200" b="0" u="none" strike="noStrike">
                 <a:solidFill>
                   <a:schemeClr val="dk1">
@@ -1607,8 +3055,11 @@
                 <a:spcPct val="100000"/>
               </a:lnSpc>
               <a:buNone/>
-            </a:pPr>
-            <a:fld id="{CC6AE3FD-1031-43A9-B327-983BF8D02133}" type="slidenum">
+              <a:tabLst>
+                <a:tab algn="l" pos="0"/>
+              </a:tabLst>
+            </a:pPr>
+            <a:fld id="{F744AC42-C51E-4765-A06C-83EB4B911106}" type="slidenum">
               <a:rPr lang="fr-FR" sz="1200" b="0" u="none" strike="noStrike">
                 <a:solidFill>
                   <a:schemeClr val="dk1">
@@ -1637,7 +3088,338 @@
 </p:sldLayout>
 </file>
 
-<file path=ppt/slideLayouts/slideLayout2.xml><?xml version="1.0" encoding="utf-8"?>
+<file path=ppt/slideLayouts/slideLayout4.xml><?xml version="1.0" encoding="utf-8"?>
+<p:sldLayout xmlns:a="http://schemas.openxmlformats.org/drawingml/2006/main" xmlns:p="http://schemas.openxmlformats.org/presentationml/2006/main" xmlns:r="http://schemas.openxmlformats.org/officeDocument/2006/relationships" xmlns:p14="http://schemas.microsoft.com/office/powerpoint/2010/main" xmlns:p15="http://schemas.microsoft.com/office/powerpoint/2012/main" xmlns:mc="http://schemas.openxmlformats.org/markup-compatibility/2006" type="title" preserve="1">
+  <p:cSld name="Diapositive de titre">
+    <p:bg>
+      <p:bgPr>
+        <a:blipFill rotWithShape="0">
+          <a:blip r:embed="rId2"/>
+          <a:stretch/>
+        </a:blipFill>
+      </p:bgPr>
+    </p:bg>
+    <p:spTree>
+      <p:nvGrpSpPr>
+        <p:cNvPr id="1" name=""/>
+        <p:cNvGrpSpPr/>
+        <p:nvPr/>
+      </p:nvGrpSpPr>
+      <p:grpSpPr>
+        <a:xfrm>
+          <a:off x="0" y="0"/>
+          <a:ext cx="0" cy="0"/>
+          <a:chOff x="0" y="0"/>
+          <a:chExt cx="0" cy="0"/>
+        </a:xfrm>
+      </p:grpSpPr>
+      <p:sp>
+        <p:nvSpPr>
+          <p:cNvPr id="19" name="PlaceHolder 1"/>
+          <p:cNvSpPr>
+            <a:spLocks noGrp="1"/>
+          </p:cNvSpPr>
+          <p:nvPr>
+            <p:ph type="title"/>
+          </p:nvPr>
+        </p:nvSpPr>
+        <p:spPr>
+          <a:xfrm>
+            <a:off x="1523880" y="1122480"/>
+            <a:ext cx="9143280" cy="2386800"/>
+          </a:xfrm>
+          <a:prstGeom prst="rect">
+            <a:avLst/>
+          </a:prstGeom>
+          <a:noFill/>
+          <a:ln w="0">
+            <a:noFill/>
+          </a:ln>
+        </p:spPr>
+        <p:txBody>
+          <a:bodyPr lIns="91440" rIns="91440" tIns="45720" bIns="45720" anchor="b">
+            <a:noAutofit/>
+          </a:bodyPr>
+          <a:p>
+            <a:pPr indent="0" algn="ctr" defTabSz="914400">
+              <a:lnSpc>
+                <a:spcPct val="90000"/>
+              </a:lnSpc>
+              <a:buNone/>
+              <a:tabLst>
+                <a:tab algn="l" pos="0"/>
+              </a:tabLst>
+            </a:pPr>
+            <a:r>
+              <a:rPr lang="fr-FR" sz="6000" b="0" u="none" strike="noStrike">
+                <a:solidFill>
+                  <a:schemeClr val="dk1"/>
+                </a:solidFill>
+                <a:effectLst/>
+                <a:uFillTx/>
+                <a:latin typeface="Calibri Light"/>
+              </a:rPr>
+              <a:t>Modifiez le style du titre</a:t>
+            </a:r>
+            <a:endParaRPr lang="fr-FR" sz="6000" b="0" u="none" strike="noStrike">
+              <a:solidFill>
+                <a:srgbClr val="000000"/>
+              </a:solidFill>
+              <a:effectLst/>
+              <a:uFillTx/>
+              <a:latin typeface="Arial"/>
+            </a:endParaRPr>
+          </a:p>
+        </p:txBody>
+      </p:sp>
+      <p:sp>
+        <p:nvSpPr>
+          <p:cNvPr id="20" name="PlaceHolder 2"/>
+          <p:cNvSpPr>
+            <a:spLocks noGrp="1"/>
+          </p:cNvSpPr>
+          <p:nvPr>
+            <p:ph type="dt" idx="10"/>
+          </p:nvPr>
+        </p:nvSpPr>
+        <p:spPr>
+          <a:xfrm>
+            <a:off x="838080" y="6356520"/>
+            <a:ext cx="2742480" cy="364320"/>
+          </a:xfrm>
+          <a:prstGeom prst="rect">
+            <a:avLst/>
+          </a:prstGeom>
+          <a:noFill/>
+          <a:ln w="0">
+            <a:noFill/>
+          </a:ln>
+        </p:spPr>
+        <p:txBody>
+          <a:bodyPr lIns="91440" rIns="91440" tIns="45720" bIns="45720" anchor="ctr">
+            <a:noAutofit/>
+          </a:bodyPr>
+          <a:lstStyle>
+            <a:lvl1pPr indent="0" defTabSz="914400">
+              <a:lnSpc>
+                <a:spcPct val="100000"/>
+              </a:lnSpc>
+              <a:buNone/>
+              <a:tabLst>
+                <a:tab algn="l" pos="0"/>
+              </a:tabLst>
+              <a:defRPr lang="fr-FR" sz="1200" b="0" u="none" strike="noStrike">
+                <a:solidFill>
+                  <a:schemeClr val="dk1">
+                    <a:tint val="75000"/>
+                  </a:schemeClr>
+                </a:solidFill>
+                <a:effectLst/>
+                <a:uFillTx/>
+                <a:latin typeface="Calibri"/>
+              </a:defRPr>
+            </a:lvl1pPr>
+          </a:lstStyle>
+          <a:p>
+            <a:pPr indent="0" defTabSz="914400">
+              <a:lnSpc>
+                <a:spcPct val="100000"/>
+              </a:lnSpc>
+              <a:buNone/>
+              <a:tabLst>
+                <a:tab algn="l" pos="0"/>
+              </a:tabLst>
+            </a:pPr>
+            <a:r>
+              <a:rPr lang="fr-FR" sz="1200" b="0" u="none" strike="noStrike">
+                <a:solidFill>
+                  <a:schemeClr val="dk1">
+                    <a:tint val="75000"/>
+                  </a:schemeClr>
+                </a:solidFill>
+                <a:effectLst/>
+                <a:uFillTx/>
+                <a:latin typeface="Calibri"/>
+              </a:rPr>
+              <a:t>&lt;date/heure&gt;</a:t>
+            </a:r>
+            <a:endParaRPr lang="fr-FR" sz="1200" b="0" u="none" strike="noStrike">
+              <a:solidFill>
+                <a:srgbClr val="000000"/>
+              </a:solidFill>
+              <a:effectLst/>
+              <a:uFillTx/>
+              <a:latin typeface="Times New Roman"/>
+            </a:endParaRPr>
+          </a:p>
+        </p:txBody>
+      </p:sp>
+      <p:sp>
+        <p:nvSpPr>
+          <p:cNvPr id="21" name="PlaceHolder 3"/>
+          <p:cNvSpPr>
+            <a:spLocks noGrp="1"/>
+          </p:cNvSpPr>
+          <p:nvPr>
+            <p:ph type="ftr" idx="11"/>
+          </p:nvPr>
+        </p:nvSpPr>
+        <p:spPr>
+          <a:xfrm>
+            <a:off x="4038480" y="6356520"/>
+            <a:ext cx="4114080" cy="364320"/>
+          </a:xfrm>
+          <a:prstGeom prst="rect">
+            <a:avLst/>
+          </a:prstGeom>
+          <a:noFill/>
+          <a:ln w="0">
+            <a:noFill/>
+          </a:ln>
+        </p:spPr>
+        <p:txBody>
+          <a:bodyPr lIns="91440" rIns="91440" tIns="45720" bIns="45720" anchor="ctr">
+            <a:noAutofit/>
+          </a:bodyPr>
+          <a:lstStyle>
+            <a:lvl1pPr indent="0" algn="ctr">
+              <a:lnSpc>
+                <a:spcPct val="100000"/>
+              </a:lnSpc>
+              <a:buNone/>
+              <a:tabLst>
+                <a:tab algn="l" pos="0"/>
+              </a:tabLst>
+              <a:defRPr lang="fr-FR" sz="1400" b="0" u="none" strike="noStrike">
+                <a:solidFill>
+                  <a:srgbClr val="000000"/>
+                </a:solidFill>
+                <a:effectLst/>
+                <a:uFillTx/>
+                <a:latin typeface="Times New Roman"/>
+              </a:defRPr>
+            </a:lvl1pPr>
+          </a:lstStyle>
+          <a:p>
+            <a:pPr indent="0" algn="ctr">
+              <a:lnSpc>
+                <a:spcPct val="100000"/>
+              </a:lnSpc>
+              <a:buNone/>
+              <a:tabLst>
+                <a:tab algn="l" pos="0"/>
+              </a:tabLst>
+            </a:pPr>
+            <a:r>
+              <a:rPr lang="fr-FR" sz="1400" b="0" u="none" strike="noStrike">
+                <a:solidFill>
+                  <a:srgbClr val="000000"/>
+                </a:solidFill>
+                <a:effectLst/>
+                <a:uFillTx/>
+                <a:latin typeface="Times New Roman"/>
+              </a:rPr>
+              <a:t>&lt;pied de page&gt;</a:t>
+            </a:r>
+            <a:endParaRPr lang="fr-FR" sz="1400" b="0" u="none" strike="noStrike">
+              <a:solidFill>
+                <a:srgbClr val="000000"/>
+              </a:solidFill>
+              <a:effectLst/>
+              <a:uFillTx/>
+              <a:latin typeface="Times New Roman"/>
+            </a:endParaRPr>
+          </a:p>
+        </p:txBody>
+      </p:sp>
+      <p:sp>
+        <p:nvSpPr>
+          <p:cNvPr id="22" name="PlaceHolder 4"/>
+          <p:cNvSpPr>
+            <a:spLocks noGrp="1"/>
+          </p:cNvSpPr>
+          <p:nvPr>
+            <p:ph type="sldNum" idx="12"/>
+          </p:nvPr>
+        </p:nvSpPr>
+        <p:spPr>
+          <a:xfrm>
+            <a:off x="8610480" y="6356520"/>
+            <a:ext cx="2742480" cy="364320"/>
+          </a:xfrm>
+          <a:prstGeom prst="rect">
+            <a:avLst/>
+          </a:prstGeom>
+          <a:noFill/>
+          <a:ln w="0">
+            <a:noFill/>
+          </a:ln>
+        </p:spPr>
+        <p:txBody>
+          <a:bodyPr lIns="91440" rIns="91440" tIns="45720" bIns="45720" anchor="ctr">
+            <a:noAutofit/>
+          </a:bodyPr>
+          <a:lstStyle>
+            <a:lvl1pPr indent="0" algn="r" defTabSz="914400">
+              <a:lnSpc>
+                <a:spcPct val="100000"/>
+              </a:lnSpc>
+              <a:buNone/>
+              <a:tabLst>
+                <a:tab algn="l" pos="0"/>
+              </a:tabLst>
+              <a:defRPr lang="fr-FR" sz="1200" b="0" u="none" strike="noStrike">
+                <a:solidFill>
+                  <a:schemeClr val="dk1">
+                    <a:tint val="75000"/>
+                  </a:schemeClr>
+                </a:solidFill>
+                <a:effectLst/>
+                <a:uFillTx/>
+                <a:latin typeface="Calibri"/>
+              </a:defRPr>
+            </a:lvl1pPr>
+          </a:lstStyle>
+          <a:p>
+            <a:pPr indent="0" algn="r" defTabSz="914400">
+              <a:lnSpc>
+                <a:spcPct val="100000"/>
+              </a:lnSpc>
+              <a:buNone/>
+              <a:tabLst>
+                <a:tab algn="l" pos="0"/>
+              </a:tabLst>
+            </a:pPr>
+            <a:fld id="{39354379-C1FC-4014-8DAA-BFB166783825}" type="slidenum">
+              <a:rPr lang="fr-FR" sz="1200" b="0" u="none" strike="noStrike">
+                <a:solidFill>
+                  <a:schemeClr val="dk1">
+                    <a:tint val="75000"/>
+                  </a:schemeClr>
+                </a:solidFill>
+                <a:effectLst/>
+                <a:uFillTx/>
+                <a:latin typeface="Calibri"/>
+              </a:rPr>
+              <a:t>&lt;numéro&gt;</a:t>
+            </a:fld>
+            <a:endParaRPr lang="fr-FR" sz="1200" b="0" u="none" strike="noStrike">
+              <a:solidFill>
+                <a:srgbClr val="000000"/>
+              </a:solidFill>
+              <a:effectLst/>
+              <a:uFillTx/>
+              <a:latin typeface="Times New Roman"/>
+            </a:endParaRPr>
+          </a:p>
+        </p:txBody>
+      </p:sp>
+    </p:spTree>
+  </p:cSld>
+</p:sldLayout>
+</file>
+
+<file path=ppt/slideLayouts/slideLayout5.xml><?xml version="1.0" encoding="utf-8"?>
 <p:sldLayout xmlns:a="http://schemas.openxmlformats.org/drawingml/2006/main" xmlns:p="http://schemas.openxmlformats.org/presentationml/2006/main" xmlns:r="http://schemas.openxmlformats.org/officeDocument/2006/relationships" xmlns:p14="http://schemas.microsoft.com/office/powerpoint/2010/main" xmlns:p15="http://schemas.microsoft.com/office/powerpoint/2012/main" xmlns:mc="http://schemas.openxmlformats.org/markup-compatibility/2006" type="vertTx" preserve="1">
   <p:cSld name="Titre et texte vertical">
     <p:bg>
@@ -1664,7 +3446,7 @@
       </p:grpSpPr>
       <p:sp>
         <p:nvSpPr>
-          <p:cNvPr id="6" name="PlaceHolder 1"/>
+          <p:cNvPr id="23" name="PlaceHolder 1"/>
           <p:cNvSpPr>
             <a:spLocks noGrp="1"/>
           </p:cNvSpPr>
@@ -1675,7 +3457,7 @@
         <p:spPr>
           <a:xfrm>
             <a:off x="838080" y="365040"/>
-            <a:ext cx="10515240" cy="1325160"/>
+            <a:ext cx="10514880" cy="1324800"/>
           </a:xfrm>
           <a:prstGeom prst="rect">
             <a:avLst/>
@@ -1695,6 +3477,9 @@
                 <a:spcPct val="90000"/>
               </a:lnSpc>
               <a:buNone/>
+              <a:tabLst>
+                <a:tab algn="l" pos="0"/>
+              </a:tabLst>
             </a:pPr>
             <a:r>
               <a:rPr lang="fr-FR" sz="4400" b="0" u="none" strike="noStrike">
@@ -1797,18 +3582,18 @@
             </a:r>
             <a:endParaRPr lang="fr-FR" sz="4400" b="0" u="none" strike="noStrike">
               <a:solidFill>
-                <a:schemeClr val="dk1"/>
-              </a:solidFill>
-              <a:effectLst/>
-              <a:uFillTx/>
-              <a:latin typeface="Calibri"/>
+                <a:srgbClr val="000000"/>
+              </a:solidFill>
+              <a:effectLst/>
+              <a:uFillTx/>
+              <a:latin typeface="Arial"/>
             </a:endParaRPr>
           </a:p>
         </p:txBody>
       </p:sp>
       <p:sp>
         <p:nvSpPr>
-          <p:cNvPr id="7" name="PlaceHolder 2"/>
+          <p:cNvPr id="24" name="PlaceHolder 2"/>
           <p:cNvSpPr>
             <a:spLocks noGrp="1"/>
           </p:cNvSpPr>
@@ -1819,7 +3604,7 @@
         <p:spPr>
           <a:xfrm>
             <a:off x="838080" y="1825560"/>
-            <a:ext cx="10515240" cy="4350960"/>
+            <a:ext cx="10514880" cy="4350600"/>
           </a:xfrm>
           <a:prstGeom prst="rect">
             <a:avLst/>
@@ -1860,11 +3645,11 @@
             </a:r>
             <a:endParaRPr lang="fr-FR" sz="2800" b="0" u="none" strike="noStrike">
               <a:solidFill>
-                <a:schemeClr val="dk1"/>
-              </a:solidFill>
-              <a:effectLst/>
-              <a:uFillTx/>
-              <a:latin typeface="Calibri"/>
+                <a:srgbClr val="000000"/>
+              </a:solidFill>
+              <a:effectLst/>
+              <a:uFillTx/>
+              <a:latin typeface="Arial"/>
             </a:endParaRPr>
           </a:p>
           <a:p>
@@ -1894,11 +3679,11 @@
             </a:r>
             <a:endParaRPr lang="fr-FR" sz="2400" b="0" u="none" strike="noStrike">
               <a:solidFill>
-                <a:schemeClr val="dk1"/>
-              </a:solidFill>
-              <a:effectLst/>
-              <a:uFillTx/>
-              <a:latin typeface="Calibri"/>
+                <a:srgbClr val="000000"/>
+              </a:solidFill>
+              <a:effectLst/>
+              <a:uFillTx/>
+              <a:latin typeface="Arial"/>
             </a:endParaRPr>
           </a:p>
           <a:p>
@@ -1928,11 +3713,11 @@
             </a:r>
             <a:endParaRPr lang="fr-FR" sz="2000" b="0" u="none" strike="noStrike">
               <a:solidFill>
-                <a:schemeClr val="dk1"/>
-              </a:solidFill>
-              <a:effectLst/>
-              <a:uFillTx/>
-              <a:latin typeface="Calibri"/>
+                <a:srgbClr val="000000"/>
+              </a:solidFill>
+              <a:effectLst/>
+              <a:uFillTx/>
+              <a:latin typeface="Arial"/>
             </a:endParaRPr>
           </a:p>
           <a:p>
@@ -1962,11 +3747,11 @@
             </a:r>
             <a:endParaRPr lang="fr-FR" sz="1800" b="0" u="none" strike="noStrike">
               <a:solidFill>
-                <a:schemeClr val="dk1"/>
-              </a:solidFill>
-              <a:effectLst/>
-              <a:uFillTx/>
-              <a:latin typeface="Calibri"/>
+                <a:srgbClr val="000000"/>
+              </a:solidFill>
+              <a:effectLst/>
+              <a:uFillTx/>
+              <a:latin typeface="Arial"/>
             </a:endParaRPr>
           </a:p>
           <a:p>
@@ -1996,29 +3781,29 @@
             </a:r>
             <a:endParaRPr lang="fr-FR" sz="1800" b="0" u="none" strike="noStrike">
               <a:solidFill>
-                <a:schemeClr val="dk1"/>
-              </a:solidFill>
-              <a:effectLst/>
-              <a:uFillTx/>
-              <a:latin typeface="Calibri"/>
+                <a:srgbClr val="000000"/>
+              </a:solidFill>
+              <a:effectLst/>
+              <a:uFillTx/>
+              <a:latin typeface="Arial"/>
             </a:endParaRPr>
           </a:p>
         </p:txBody>
       </p:sp>
       <p:sp>
         <p:nvSpPr>
-          <p:cNvPr id="8" name="PlaceHolder 3"/>
+          <p:cNvPr id="25" name="PlaceHolder 3"/>
           <p:cNvSpPr>
             <a:spLocks noGrp="1"/>
           </p:cNvSpPr>
           <p:nvPr>
-            <p:ph type="dt" idx="4"/>
+            <p:ph type="dt" idx="13"/>
           </p:nvPr>
         </p:nvSpPr>
         <p:spPr>
           <a:xfrm>
             <a:off x="838080" y="6356520"/>
-            <a:ext cx="2742840" cy="364680"/>
+            <a:ext cx="2742480" cy="364320"/>
           </a:xfrm>
           <a:prstGeom prst="rect">
             <a:avLst/>
@@ -2038,6 +3823,9 @@
                 <a:spcPct val="100000"/>
               </a:lnSpc>
               <a:buNone/>
+              <a:tabLst>
+                <a:tab algn="l" pos="0"/>
+              </a:tabLst>
               <a:defRPr lang="fr-FR" sz="1200" b="0" u="none" strike="noStrike">
                 <a:solidFill>
                   <a:schemeClr val="dk1">
@@ -2056,6 +3844,9 @@
                 <a:spcPct val="100000"/>
               </a:lnSpc>
               <a:buNone/>
+              <a:tabLst>
+                <a:tab algn="l" pos="0"/>
+              </a:tabLst>
             </a:pPr>
             <a:r>
               <a:rPr lang="fr-FR" sz="1200" b="0" u="none" strike="noStrike">
@@ -2083,18 +3874,18 @@
       </p:sp>
       <p:sp>
         <p:nvSpPr>
-          <p:cNvPr id="9" name="PlaceHolder 4"/>
+          <p:cNvPr id="26" name="PlaceHolder 4"/>
           <p:cNvSpPr>
             <a:spLocks noGrp="1"/>
           </p:cNvSpPr>
           <p:nvPr>
-            <p:ph type="ftr" idx="5"/>
+            <p:ph type="ftr" idx="14"/>
           </p:nvPr>
         </p:nvSpPr>
         <p:spPr>
           <a:xfrm>
             <a:off x="4038480" y="6356520"/>
-            <a:ext cx="4114440" cy="364680"/>
+            <a:ext cx="4114080" cy="364320"/>
           </a:xfrm>
           <a:prstGeom prst="rect">
             <a:avLst/>
@@ -2110,7 +3901,13 @@
           </a:bodyPr>
           <a:lstStyle>
             <a:lvl1pPr indent="0" algn="ctr">
+              <a:lnSpc>
+                <a:spcPct val="100000"/>
+              </a:lnSpc>
               <a:buNone/>
+              <a:tabLst>
+                <a:tab algn="l" pos="0"/>
+              </a:tabLst>
               <a:defRPr lang="fr-FR" sz="1400" b="0" u="none" strike="noStrike">
                 <a:solidFill>
                   <a:srgbClr val="000000"/>
@@ -2123,7 +3920,13 @@
           </a:lstStyle>
           <a:p>
             <a:pPr indent="0" algn="ctr">
+              <a:lnSpc>
+                <a:spcPct val="100000"/>
+              </a:lnSpc>
               <a:buNone/>
+              <a:tabLst>
+                <a:tab algn="l" pos="0"/>
+              </a:tabLst>
             </a:pPr>
             <a:r>
               <a:rPr lang="fr-FR" sz="1400" b="0" u="none" strike="noStrike">
@@ -2149,18 +3952,18 @@
       </p:sp>
       <p:sp>
         <p:nvSpPr>
-          <p:cNvPr id="10" name="PlaceHolder 5"/>
+          <p:cNvPr id="27" name="PlaceHolder 5"/>
           <p:cNvSpPr>
             <a:spLocks noGrp="1"/>
           </p:cNvSpPr>
           <p:nvPr>
-            <p:ph type="sldNum" idx="6"/>
+            <p:ph type="sldNum" idx="15"/>
           </p:nvPr>
         </p:nvSpPr>
         <p:spPr>
           <a:xfrm>
             <a:off x="8610480" y="6356520"/>
-            <a:ext cx="2742840" cy="364680"/>
+            <a:ext cx="2742480" cy="364320"/>
           </a:xfrm>
           <a:prstGeom prst="rect">
             <a:avLst/>
@@ -2180,6 +3983,9 @@
                 <a:spcPct val="100000"/>
               </a:lnSpc>
               <a:buNone/>
+              <a:tabLst>
+                <a:tab algn="l" pos="0"/>
+              </a:tabLst>
               <a:defRPr lang="fr-FR" sz="1200" b="0" u="none" strike="noStrike">
                 <a:solidFill>
                   <a:schemeClr val="dk1">
@@ -2198,8 +4004,11 @@
                 <a:spcPct val="100000"/>
               </a:lnSpc>
               <a:buNone/>
-            </a:pPr>
-            <a:fld id="{B588A31D-CE79-45BE-A32F-4EE99D1E8C9A}" type="slidenum">
+              <a:tabLst>
+                <a:tab algn="l" pos="0"/>
+              </a:tabLst>
+            </a:pPr>
+            <a:fld id="{BFC3E3C8-2587-4AED-91D9-8CA47D5D8B0C}" type="slidenum">
               <a:rPr lang="fr-FR" sz="1200" b="0" u="none" strike="noStrike">
                 <a:solidFill>
                   <a:schemeClr val="dk1">
@@ -2228,7 +4037,7 @@
 </p:sldLayout>
 </file>
 
-<file path=ppt/slideLayouts/slideLayout3.xml><?xml version="1.0" encoding="utf-8"?>
+<file path=ppt/slideLayouts/slideLayout6.xml><?xml version="1.0" encoding="utf-8"?>
 <p:sldLayout xmlns:a="http://schemas.openxmlformats.org/drawingml/2006/main" xmlns:p="http://schemas.openxmlformats.org/presentationml/2006/main" xmlns:r="http://schemas.openxmlformats.org/officeDocument/2006/relationships" xmlns:p14="http://schemas.microsoft.com/office/powerpoint/2010/main" xmlns:p15="http://schemas.microsoft.com/office/powerpoint/2012/main" xmlns:mc="http://schemas.openxmlformats.org/markup-compatibility/2006" type="vertTitleAndTx" preserve="1">
   <p:cSld name="Titre vertical et texte">
     <p:bg>
@@ -2255,7 +4064,7 @@
       </p:grpSpPr>
       <p:sp>
         <p:nvSpPr>
-          <p:cNvPr id="11" name="PlaceHolder 1"/>
+          <p:cNvPr id="28" name="PlaceHolder 1"/>
           <p:cNvSpPr>
             <a:spLocks noGrp="1"/>
           </p:cNvSpPr>
@@ -2266,7 +4075,7 @@
         <p:spPr>
           <a:xfrm>
             <a:off x="8724960" y="365040"/>
-            <a:ext cx="2628720" cy="5811480"/>
+            <a:ext cx="2628360" cy="5811120"/>
           </a:xfrm>
           <a:prstGeom prst="rect">
             <a:avLst/>
@@ -2286,6 +4095,9 @@
                 <a:spcPct val="90000"/>
               </a:lnSpc>
               <a:buNone/>
+              <a:tabLst>
+                <a:tab algn="l" pos="0"/>
+              </a:tabLst>
             </a:pPr>
             <a:r>
               <a:rPr lang="fr-FR" sz="4400" b="0" u="none" strike="noStrike">
@@ -2296,297 +4108,22 @@
                 <a:uFillTx/>
                 <a:latin typeface="Calibri Light"/>
               </a:rPr>
-              <a:t>M</a:t>
-            </a:r>
-            <a:r>
-              <a:rPr lang="fr-FR" sz="4400" b="0" u="none" strike="noStrike">
-                <a:solidFill>
-                  <a:schemeClr val="dk1"/>
-                </a:solidFill>
-                <a:effectLst/>
-                <a:uFillTx/>
-                <a:latin typeface="Calibri Light"/>
-              </a:rPr>
-              <a:t>o</a:t>
-            </a:r>
-            <a:r>
-              <a:rPr lang="fr-FR" sz="4400" b="0" u="none" strike="noStrike">
-                <a:solidFill>
-                  <a:schemeClr val="dk1"/>
-                </a:solidFill>
-                <a:effectLst/>
-                <a:uFillTx/>
-                <a:latin typeface="Calibri Light"/>
-              </a:rPr>
-              <a:t>d</a:t>
-            </a:r>
-            <a:r>
-              <a:rPr lang="fr-FR" sz="4400" b="0" u="none" strike="noStrike">
-                <a:solidFill>
-                  <a:schemeClr val="dk1"/>
-                </a:solidFill>
-                <a:effectLst/>
-                <a:uFillTx/>
-                <a:latin typeface="Calibri Light"/>
-              </a:rPr>
-              <a:t>i</a:t>
-            </a:r>
-            <a:r>
-              <a:rPr lang="fr-FR" sz="4400" b="0" u="none" strike="noStrike">
-                <a:solidFill>
-                  <a:schemeClr val="dk1"/>
-                </a:solidFill>
-                <a:effectLst/>
-                <a:uFillTx/>
-                <a:latin typeface="Calibri Light"/>
-              </a:rPr>
-              <a:t>f</a:t>
-            </a:r>
-            <a:r>
-              <a:rPr lang="fr-FR" sz="4400" b="0" u="none" strike="noStrike">
-                <a:solidFill>
-                  <a:schemeClr val="dk1"/>
-                </a:solidFill>
-                <a:effectLst/>
-                <a:uFillTx/>
-                <a:latin typeface="Calibri Light"/>
-              </a:rPr>
-              <a:t>i</a:t>
-            </a:r>
-            <a:r>
-              <a:rPr lang="fr-FR" sz="4400" b="0" u="none" strike="noStrike">
-                <a:solidFill>
-                  <a:schemeClr val="dk1"/>
-                </a:solidFill>
-                <a:effectLst/>
-                <a:uFillTx/>
-                <a:latin typeface="Calibri Light"/>
-              </a:rPr>
-              <a:t>e</a:t>
-            </a:r>
-            <a:r>
-              <a:rPr lang="fr-FR" sz="4400" b="0" u="none" strike="noStrike">
-                <a:solidFill>
-                  <a:schemeClr val="dk1"/>
-                </a:solidFill>
-                <a:effectLst/>
-                <a:uFillTx/>
-                <a:latin typeface="Calibri Light"/>
-              </a:rPr>
-              <a:t>z</a:t>
-            </a:r>
-            <a:r>
-              <a:rPr lang="fr-FR" sz="4400" b="0" u="none" strike="noStrike">
-                <a:solidFill>
-                  <a:schemeClr val="dk1"/>
-                </a:solidFill>
-                <a:effectLst/>
-                <a:uFillTx/>
-                <a:latin typeface="Calibri Light"/>
-              </a:rPr>
-              <a:t> </a:t>
-            </a:r>
-            <a:r>
-              <a:rPr lang="fr-FR" sz="4400" b="0" u="none" strike="noStrike">
-                <a:solidFill>
-                  <a:schemeClr val="dk1"/>
-                </a:solidFill>
-                <a:effectLst/>
-                <a:uFillTx/>
-                <a:latin typeface="Calibri Light"/>
-              </a:rPr>
-              <a:t>l</a:t>
-            </a:r>
-            <a:r>
-              <a:rPr lang="fr-FR" sz="4400" b="0" u="none" strike="noStrike">
-                <a:solidFill>
-                  <a:schemeClr val="dk1"/>
-                </a:solidFill>
-                <a:effectLst/>
-                <a:uFillTx/>
-                <a:latin typeface="Calibri Light"/>
-              </a:rPr>
-              <a:t>e</a:t>
-            </a:r>
-            <a:r>
-              <a:rPr lang="fr-FR" sz="4400" b="0" u="none" strike="noStrike">
-                <a:solidFill>
-                  <a:schemeClr val="dk1"/>
-                </a:solidFill>
-                <a:effectLst/>
-                <a:uFillTx/>
-                <a:latin typeface="Calibri Light"/>
-              </a:rPr>
-              <a:t> </a:t>
-            </a:r>
-            <a:r>
-              <a:rPr lang="fr-FR" sz="4400" b="0" u="none" strike="noStrike">
-                <a:solidFill>
-                  <a:schemeClr val="dk1"/>
-                </a:solidFill>
-                <a:effectLst/>
-                <a:uFillTx/>
-                <a:latin typeface="Calibri Light"/>
-              </a:rPr>
-              <a:t>s</a:t>
-            </a:r>
-            <a:r>
-              <a:rPr lang="fr-FR" sz="4400" b="0" u="none" strike="noStrike">
-                <a:solidFill>
-                  <a:schemeClr val="dk1"/>
-                </a:solidFill>
-                <a:effectLst/>
-                <a:uFillTx/>
-                <a:latin typeface="Calibri Light"/>
-              </a:rPr>
-              <a:t>t</a:t>
-            </a:r>
-            <a:r>
-              <a:rPr lang="fr-FR" sz="4400" b="0" u="none" strike="noStrike">
-                <a:solidFill>
-                  <a:schemeClr val="dk1"/>
-                </a:solidFill>
-                <a:effectLst/>
-                <a:uFillTx/>
-                <a:latin typeface="Calibri Light"/>
-              </a:rPr>
-              <a:t>y</a:t>
-            </a:r>
-            <a:r>
-              <a:rPr lang="fr-FR" sz="4400" b="0" u="none" strike="noStrike">
-                <a:solidFill>
-                  <a:schemeClr val="dk1"/>
-                </a:solidFill>
-                <a:effectLst/>
-                <a:uFillTx/>
-                <a:latin typeface="Calibri Light"/>
-              </a:rPr>
-              <a:t>l</a:t>
-            </a:r>
-            <a:r>
-              <a:rPr lang="fr-FR" sz="4400" b="0" u="none" strike="noStrike">
-                <a:solidFill>
-                  <a:schemeClr val="dk1"/>
-                </a:solidFill>
-                <a:effectLst/>
-                <a:uFillTx/>
-                <a:latin typeface="Calibri Light"/>
-              </a:rPr>
-              <a:t>e</a:t>
-            </a:r>
-            <a:r>
-              <a:rPr lang="fr-FR" sz="4400" b="0" u="none" strike="noStrike">
-                <a:solidFill>
-                  <a:schemeClr val="dk1"/>
-                </a:solidFill>
-                <a:effectLst/>
-                <a:uFillTx/>
-                <a:latin typeface="Calibri Light"/>
-              </a:rPr>
-              <a:t> </a:t>
-            </a:r>
-            <a:r>
-              <a:rPr lang="fr-FR" sz="4400" b="0" u="none" strike="noStrike">
-                <a:solidFill>
-                  <a:schemeClr val="dk1"/>
-                </a:solidFill>
-                <a:effectLst/>
-                <a:uFillTx/>
-                <a:latin typeface="Calibri Light"/>
-              </a:rPr>
-              <a:t>d</a:t>
-            </a:r>
-            <a:r>
-              <a:rPr lang="fr-FR" sz="4400" b="0" u="none" strike="noStrike">
-                <a:solidFill>
-                  <a:schemeClr val="dk1"/>
-                </a:solidFill>
-                <a:effectLst/>
-                <a:uFillTx/>
-                <a:latin typeface="Calibri Light"/>
-              </a:rPr>
-              <a:t>u</a:t>
-            </a:r>
-            <a:r>
-              <a:rPr lang="fr-FR" sz="4400" b="0" u="none" strike="noStrike">
-                <a:solidFill>
-                  <a:schemeClr val="dk1"/>
-                </a:solidFill>
-                <a:effectLst/>
-                <a:uFillTx/>
-                <a:latin typeface="Calibri Light"/>
-              </a:rPr>
-              <a:t> </a:t>
-            </a:r>
-            <a:r>
-              <a:rPr lang="fr-FR" sz="4400" b="0" u="none" strike="noStrike">
-                <a:solidFill>
-                  <a:schemeClr val="dk1"/>
-                </a:solidFill>
-                <a:effectLst/>
-                <a:uFillTx/>
-                <a:latin typeface="Calibri Light"/>
-              </a:rPr>
-              <a:t>t</a:t>
-            </a:r>
-            <a:r>
-              <a:rPr lang="fr-FR" sz="4400" b="0" u="none" strike="noStrike">
-                <a:solidFill>
-                  <a:schemeClr val="dk1"/>
-                </a:solidFill>
-                <a:effectLst/>
-                <a:uFillTx/>
-                <a:latin typeface="Calibri Light"/>
-              </a:rPr>
-              <a:t>i</a:t>
-            </a:r>
-            <a:r>
-              <a:rPr lang="fr-FR" sz="4400" b="0" u="none" strike="noStrike">
-                <a:solidFill>
-                  <a:schemeClr val="dk1"/>
-                </a:solidFill>
-                <a:effectLst/>
-                <a:uFillTx/>
-                <a:latin typeface="Calibri Light"/>
-              </a:rPr>
-              <a:t>t</a:t>
-            </a:r>
-            <a:r>
-              <a:rPr lang="fr-FR" sz="4400" b="0" u="none" strike="noStrike">
-                <a:solidFill>
-                  <a:schemeClr val="dk1"/>
-                </a:solidFill>
-                <a:effectLst/>
-                <a:uFillTx/>
-                <a:latin typeface="Calibri Light"/>
-              </a:rPr>
-              <a:t>r</a:t>
-            </a:r>
-            <a:r>
-              <a:rPr lang="fr-FR" sz="4400" b="0" u="none" strike="noStrike">
-                <a:solidFill>
-                  <a:schemeClr val="dk1"/>
-                </a:solidFill>
-                <a:effectLst/>
-                <a:uFillTx/>
-                <a:latin typeface="Calibri Light"/>
-              </a:rPr>
-              <a:t>e</a:t>
+              <a:t>Modifiez le style du titre</a:t>
             </a:r>
             <a:endParaRPr lang="fr-FR" sz="4400" b="0" u="none" strike="noStrike">
               <a:solidFill>
-                <a:schemeClr val="dk1"/>
-              </a:solidFill>
-              <a:effectLst/>
-              <a:uFillTx/>
-              <a:latin typeface="Calibri"/>
+                <a:srgbClr val="000000"/>
+              </a:solidFill>
+              <a:effectLst/>
+              <a:uFillTx/>
+              <a:latin typeface="Arial"/>
             </a:endParaRPr>
           </a:p>
         </p:txBody>
       </p:sp>
       <p:sp>
         <p:nvSpPr>
-          <p:cNvPr id="12" name="PlaceHolder 2"/>
+          <p:cNvPr id="29" name="PlaceHolder 2"/>
           <p:cNvSpPr>
             <a:spLocks noGrp="1"/>
           </p:cNvSpPr>
@@ -2597,7 +4134,7 @@
         <p:spPr>
           <a:xfrm>
             <a:off x="838080" y="365040"/>
-            <a:ext cx="7733880" cy="5811480"/>
+            <a:ext cx="7733520" cy="5811120"/>
           </a:xfrm>
           <a:prstGeom prst="rect">
             <a:avLst/>
@@ -2638,11 +4175,11 @@
             </a:r>
             <a:endParaRPr lang="fr-FR" sz="2800" b="0" u="none" strike="noStrike">
               <a:solidFill>
-                <a:schemeClr val="dk1"/>
-              </a:solidFill>
-              <a:effectLst/>
-              <a:uFillTx/>
-              <a:latin typeface="Calibri"/>
+                <a:srgbClr val="000000"/>
+              </a:solidFill>
+              <a:effectLst/>
+              <a:uFillTx/>
+              <a:latin typeface="Arial"/>
             </a:endParaRPr>
           </a:p>
           <a:p>
@@ -2672,11 +4209,11 @@
             </a:r>
             <a:endParaRPr lang="fr-FR" sz="2400" b="0" u="none" strike="noStrike">
               <a:solidFill>
-                <a:schemeClr val="dk1"/>
-              </a:solidFill>
-              <a:effectLst/>
-              <a:uFillTx/>
-              <a:latin typeface="Calibri"/>
+                <a:srgbClr val="000000"/>
+              </a:solidFill>
+              <a:effectLst/>
+              <a:uFillTx/>
+              <a:latin typeface="Arial"/>
             </a:endParaRPr>
           </a:p>
           <a:p>
@@ -2706,11 +4243,11 @@
             </a:r>
             <a:endParaRPr lang="fr-FR" sz="2000" b="0" u="none" strike="noStrike">
               <a:solidFill>
-                <a:schemeClr val="dk1"/>
-              </a:solidFill>
-              <a:effectLst/>
-              <a:uFillTx/>
-              <a:latin typeface="Calibri"/>
+                <a:srgbClr val="000000"/>
+              </a:solidFill>
+              <a:effectLst/>
+              <a:uFillTx/>
+              <a:latin typeface="Arial"/>
             </a:endParaRPr>
           </a:p>
           <a:p>
@@ -2740,11 +4277,11 @@
             </a:r>
             <a:endParaRPr lang="fr-FR" sz="1800" b="0" u="none" strike="noStrike">
               <a:solidFill>
-                <a:schemeClr val="dk1"/>
-              </a:solidFill>
-              <a:effectLst/>
-              <a:uFillTx/>
-              <a:latin typeface="Calibri"/>
+                <a:srgbClr val="000000"/>
+              </a:solidFill>
+              <a:effectLst/>
+              <a:uFillTx/>
+              <a:latin typeface="Arial"/>
             </a:endParaRPr>
           </a:p>
           <a:p>
@@ -2774,29 +4311,29 @@
             </a:r>
             <a:endParaRPr lang="fr-FR" sz="1800" b="0" u="none" strike="noStrike">
               <a:solidFill>
-                <a:schemeClr val="dk1"/>
-              </a:solidFill>
-              <a:effectLst/>
-              <a:uFillTx/>
-              <a:latin typeface="Calibri"/>
+                <a:srgbClr val="000000"/>
+              </a:solidFill>
+              <a:effectLst/>
+              <a:uFillTx/>
+              <a:latin typeface="Arial"/>
             </a:endParaRPr>
           </a:p>
         </p:txBody>
       </p:sp>
       <p:sp>
         <p:nvSpPr>
-          <p:cNvPr id="13" name="PlaceHolder 3"/>
+          <p:cNvPr id="30" name="PlaceHolder 3"/>
           <p:cNvSpPr>
             <a:spLocks noGrp="1"/>
           </p:cNvSpPr>
           <p:nvPr>
-            <p:ph type="dt" idx="7"/>
+            <p:ph type="dt" idx="16"/>
           </p:nvPr>
         </p:nvSpPr>
         <p:spPr>
           <a:xfrm>
             <a:off x="838080" y="6356520"/>
-            <a:ext cx="2742840" cy="364680"/>
+            <a:ext cx="2742480" cy="364320"/>
           </a:xfrm>
           <a:prstGeom prst="rect">
             <a:avLst/>
@@ -2816,6 +4353,9 @@
                 <a:spcPct val="100000"/>
               </a:lnSpc>
               <a:buNone/>
+              <a:tabLst>
+                <a:tab algn="l" pos="0"/>
+              </a:tabLst>
               <a:defRPr lang="fr-FR" sz="1200" b="0" u="none" strike="noStrike">
                 <a:solidFill>
                   <a:schemeClr val="dk1">
@@ -2834,6 +4374,9 @@
                 <a:spcPct val="100000"/>
               </a:lnSpc>
               <a:buNone/>
+              <a:tabLst>
+                <a:tab algn="l" pos="0"/>
+              </a:tabLst>
             </a:pPr>
             <a:r>
               <a:rPr lang="fr-FR" sz="1200" b="0" u="none" strike="noStrike">
@@ -2861,18 +4404,18 @@
       </p:sp>
       <p:sp>
         <p:nvSpPr>
-          <p:cNvPr id="14" name="PlaceHolder 4"/>
+          <p:cNvPr id="31" name="PlaceHolder 4"/>
           <p:cNvSpPr>
             <a:spLocks noGrp="1"/>
           </p:cNvSpPr>
           <p:nvPr>
-            <p:ph type="ftr" idx="8"/>
+            <p:ph type="ftr" idx="17"/>
           </p:nvPr>
         </p:nvSpPr>
         <p:spPr>
           <a:xfrm>
             <a:off x="4038480" y="6356520"/>
-            <a:ext cx="4114440" cy="364680"/>
+            <a:ext cx="4114080" cy="364320"/>
           </a:xfrm>
           <a:prstGeom prst="rect">
             <a:avLst/>
@@ -2888,7 +4431,13 @@
           </a:bodyPr>
           <a:lstStyle>
             <a:lvl1pPr indent="0" algn="ctr">
+              <a:lnSpc>
+                <a:spcPct val="100000"/>
+              </a:lnSpc>
               <a:buNone/>
+              <a:tabLst>
+                <a:tab algn="l" pos="0"/>
+              </a:tabLst>
               <a:defRPr lang="fr-FR" sz="1400" b="0" u="none" strike="noStrike">
                 <a:solidFill>
                   <a:srgbClr val="000000"/>
@@ -2901,7 +4450,13 @@
           </a:lstStyle>
           <a:p>
             <a:pPr indent="0" algn="ctr">
+              <a:lnSpc>
+                <a:spcPct val="100000"/>
+              </a:lnSpc>
               <a:buNone/>
+              <a:tabLst>
+                <a:tab algn="l" pos="0"/>
+              </a:tabLst>
             </a:pPr>
             <a:r>
               <a:rPr lang="fr-FR" sz="1400" b="0" u="none" strike="noStrike">
@@ -2927,18 +4482,18 @@
       </p:sp>
       <p:sp>
         <p:nvSpPr>
-          <p:cNvPr id="15" name="PlaceHolder 5"/>
+          <p:cNvPr id="32" name="PlaceHolder 5"/>
           <p:cNvSpPr>
             <a:spLocks noGrp="1"/>
           </p:cNvSpPr>
           <p:nvPr>
-            <p:ph type="sldNum" idx="9"/>
+            <p:ph type="sldNum" idx="18"/>
           </p:nvPr>
         </p:nvSpPr>
         <p:spPr>
           <a:xfrm>
             <a:off x="8610480" y="6356520"/>
-            <a:ext cx="2742840" cy="364680"/>
+            <a:ext cx="2742480" cy="364320"/>
           </a:xfrm>
           <a:prstGeom prst="rect">
             <a:avLst/>
@@ -2958,6 +4513,9 @@
                 <a:spcPct val="100000"/>
               </a:lnSpc>
               <a:buNone/>
+              <a:tabLst>
+                <a:tab algn="l" pos="0"/>
+              </a:tabLst>
               <a:defRPr lang="fr-FR" sz="1200" b="0" u="none" strike="noStrike">
                 <a:solidFill>
                   <a:schemeClr val="dk1">
@@ -2976,8 +4534,11 @@
                 <a:spcPct val="100000"/>
               </a:lnSpc>
               <a:buNone/>
-            </a:pPr>
-            <a:fld id="{8F74A659-91D1-4683-A6DD-4960AFA7FFF7}" type="slidenum">
+              <a:tabLst>
+                <a:tab algn="l" pos="0"/>
+              </a:tabLst>
+            </a:pPr>
+            <a:fld id="{258985B8-083D-41BE-8819-F11539A76FA9}" type="slidenum">
               <a:rPr lang="fr-FR" sz="1200" b="0" u="none" strike="noStrike">
                 <a:solidFill>
                   <a:schemeClr val="dk1">
@@ -3006,7 +4567,7 @@
 </p:sldLayout>
 </file>
 
-<file path=ppt/slideLayouts/slideLayout4.xml><?xml version="1.0" encoding="utf-8"?>
+<file path=ppt/slideLayouts/slideLayout7.xml><?xml version="1.0" encoding="utf-8"?>
 <p:sldLayout xmlns:a="http://schemas.openxmlformats.org/drawingml/2006/main" xmlns:p="http://schemas.openxmlformats.org/presentationml/2006/main" xmlns:r="http://schemas.openxmlformats.org/officeDocument/2006/relationships" xmlns:p14="http://schemas.microsoft.com/office/powerpoint/2010/main" xmlns:p15="http://schemas.microsoft.com/office/powerpoint/2012/main" xmlns:mc="http://schemas.openxmlformats.org/markup-compatibility/2006" type="obj" preserve="1">
   <p:cSld name="Titre et contenu">
     <p:bg>
@@ -3033,7 +4594,7 @@
       </p:grpSpPr>
       <p:sp>
         <p:nvSpPr>
-          <p:cNvPr id="16" name="PlaceHolder 1"/>
+          <p:cNvPr id="33" name="PlaceHolder 1"/>
           <p:cNvSpPr>
             <a:spLocks noGrp="1"/>
           </p:cNvSpPr>
@@ -3044,7 +4605,7 @@
         <p:spPr>
           <a:xfrm>
             <a:off x="838080" y="365040"/>
-            <a:ext cx="10515240" cy="1325160"/>
+            <a:ext cx="10514880" cy="1324800"/>
           </a:xfrm>
           <a:prstGeom prst="rect">
             <a:avLst/>
@@ -3064,6 +4625,9 @@
                 <a:spcPct val="90000"/>
               </a:lnSpc>
               <a:buNone/>
+              <a:tabLst>
+                <a:tab algn="l" pos="0"/>
+              </a:tabLst>
             </a:pPr>
             <a:r>
               <a:rPr lang="fr-FR" sz="4400" b="0" u="none" strike="noStrike">
@@ -3074,7 +4638,7 @@
                 <a:uFillTx/>
                 <a:latin typeface="Calibri Light"/>
               </a:rPr>
-              <a:t>Modifiez </a:t>
+              <a:t>Mo</a:t>
             </a:r>
             <a:r>
               <a:rPr lang="fr-FR" sz="4400" b="0" u="none" strike="noStrike">
@@ -3085,7 +4649,7 @@
                 <a:uFillTx/>
                 <a:latin typeface="Calibri Light"/>
               </a:rPr>
-              <a:t>le style </a:t>
+              <a:t>difi</a:t>
             </a:r>
             <a:r>
               <a:rPr lang="fr-FR" sz="4400" b="0" u="none" strike="noStrike">
@@ -3096,22 +4660,88 @@
                 <a:uFillTx/>
                 <a:latin typeface="Calibri Light"/>
               </a:rPr>
-              <a:t>du titre</a:t>
+              <a:t>ez </a:t>
+            </a:r>
+            <a:r>
+              <a:rPr lang="fr-FR" sz="4400" b="0" u="none" strike="noStrike">
+                <a:solidFill>
+                  <a:schemeClr val="dk1"/>
+                </a:solidFill>
+                <a:effectLst/>
+                <a:uFillTx/>
+                <a:latin typeface="Calibri Light"/>
+              </a:rPr>
+              <a:t>le </a:t>
+            </a:r>
+            <a:r>
+              <a:rPr lang="fr-FR" sz="4400" b="0" u="none" strike="noStrike">
+                <a:solidFill>
+                  <a:schemeClr val="dk1"/>
+                </a:solidFill>
+                <a:effectLst/>
+                <a:uFillTx/>
+                <a:latin typeface="Calibri Light"/>
+              </a:rPr>
+              <a:t>styl</a:t>
+            </a:r>
+            <a:r>
+              <a:rPr lang="fr-FR" sz="4400" b="0" u="none" strike="noStrike">
+                <a:solidFill>
+                  <a:schemeClr val="dk1"/>
+                </a:solidFill>
+                <a:effectLst/>
+                <a:uFillTx/>
+                <a:latin typeface="Calibri Light"/>
+              </a:rPr>
+              <a:t>e </a:t>
+            </a:r>
+            <a:r>
+              <a:rPr lang="fr-FR" sz="4400" b="0" u="none" strike="noStrike">
+                <a:solidFill>
+                  <a:schemeClr val="dk1"/>
+                </a:solidFill>
+                <a:effectLst/>
+                <a:uFillTx/>
+                <a:latin typeface="Calibri Light"/>
+              </a:rPr>
+              <a:t>du </a:t>
+            </a:r>
+            <a:r>
+              <a:rPr lang="fr-FR" sz="4400" b="0" u="none" strike="noStrike">
+                <a:solidFill>
+                  <a:schemeClr val="dk1"/>
+                </a:solidFill>
+                <a:effectLst/>
+                <a:uFillTx/>
+                <a:latin typeface="Calibri Light"/>
+              </a:rPr>
+              <a:t>titr</a:t>
+            </a:r>
+            <a:r>
+              <a:rPr lang="fr-FR" sz="4400" b="0" u="none" strike="noStrike">
+                <a:solidFill>
+                  <a:schemeClr val="dk1"/>
+                </a:solidFill>
+                <a:effectLst/>
+                <a:uFillTx/>
+                <a:latin typeface="Calibri Light"/>
+              </a:rPr>
+              <a:t>e</a:t>
             </a:r>
             <a:endParaRPr lang="fr-FR" sz="4400" b="0" u="none" strike="noStrike">
               <a:solidFill>
-                <a:schemeClr val="dk1"/>
-              </a:solidFill>
-              <a:effectLst/>
-              <a:uFillTx/>
-              <a:latin typeface="Calibri"/>
+                <a:srgbClr val="000000"/>
+              </a:solidFill>
+              <a:effectLst/>
+              <a:uFillTx/>
+              <a:latin typeface="Arial"/>
             </a:endParaRPr>
           </a:p>
         </p:txBody>
       </p:sp>
       <p:sp>
         <p:nvSpPr>
-          <p:cNvPr id="17" name="PlaceHolder 2"/>
+          <p:cNvPr id="34" name="PlaceHolder 2"/>
           <p:cNvSpPr>
             <a:spLocks noGrp="1"/>
           </p:cNvSpPr>
@@ -3122,7 +4752,7 @@
         <p:spPr>
           <a:xfrm>
             <a:off x="838080" y="1825560"/>
-            <a:ext cx="10515240" cy="4350960"/>
+            <a:ext cx="10514880" cy="4350600"/>
           </a:xfrm>
           <a:prstGeom prst="rect">
             <a:avLst/>
@@ -3163,11 +4793,11 @@
             </a:r>
             <a:endParaRPr lang="fr-FR" sz="2800" b="0" u="none" strike="noStrike">
               <a:solidFill>
-                <a:schemeClr val="dk1"/>
-              </a:solidFill>
-              <a:effectLst/>
-              <a:uFillTx/>
-              <a:latin typeface="Calibri"/>
+                <a:srgbClr val="000000"/>
+              </a:solidFill>
+              <a:effectLst/>
+              <a:uFillTx/>
+              <a:latin typeface="Arial"/>
             </a:endParaRPr>
           </a:p>
           <a:p>
@@ -3197,11 +4827,11 @@
             </a:r>
             <a:endParaRPr lang="fr-FR" sz="2400" b="0" u="none" strike="noStrike">
               <a:solidFill>
-                <a:schemeClr val="dk1"/>
-              </a:solidFill>
-              <a:effectLst/>
-              <a:uFillTx/>
-              <a:latin typeface="Calibri"/>
+                <a:srgbClr val="000000"/>
+              </a:solidFill>
+              <a:effectLst/>
+              <a:uFillTx/>
+              <a:latin typeface="Arial"/>
             </a:endParaRPr>
           </a:p>
           <a:p>
@@ -3231,11 +4861,11 @@
             </a:r>
             <a:endParaRPr lang="fr-FR" sz="2000" b="0" u="none" strike="noStrike">
               <a:solidFill>
-                <a:schemeClr val="dk1"/>
-              </a:solidFill>
-              <a:effectLst/>
-              <a:uFillTx/>
-              <a:latin typeface="Calibri"/>
+                <a:srgbClr val="000000"/>
+              </a:solidFill>
+              <a:effectLst/>
+              <a:uFillTx/>
+              <a:latin typeface="Arial"/>
             </a:endParaRPr>
           </a:p>
           <a:p>
@@ -3265,11 +4895,11 @@
             </a:r>
             <a:endParaRPr lang="fr-FR" sz="1800" b="0" u="none" strike="noStrike">
               <a:solidFill>
-                <a:schemeClr val="dk1"/>
-              </a:solidFill>
-              <a:effectLst/>
-              <a:uFillTx/>
-              <a:latin typeface="Calibri"/>
+                <a:srgbClr val="000000"/>
+              </a:solidFill>
+              <a:effectLst/>
+              <a:uFillTx/>
+              <a:latin typeface="Arial"/>
             </a:endParaRPr>
           </a:p>
           <a:p>
@@ -3299,29 +4929,29 @@
             </a:r>
             <a:endParaRPr lang="fr-FR" sz="1800" b="0" u="none" strike="noStrike">
               <a:solidFill>
-                <a:schemeClr val="dk1"/>
-              </a:solidFill>
-              <a:effectLst/>
-              <a:uFillTx/>
-              <a:latin typeface="Calibri"/>
+                <a:srgbClr val="000000"/>
+              </a:solidFill>
+              <a:effectLst/>
+              <a:uFillTx/>
+              <a:latin typeface="Arial"/>
             </a:endParaRPr>
           </a:p>
         </p:txBody>
       </p:sp>
       <p:sp>
         <p:nvSpPr>
-          <p:cNvPr id="18" name="PlaceHolder 3"/>
+          <p:cNvPr id="35" name="PlaceHolder 3"/>
           <p:cNvSpPr>
             <a:spLocks noGrp="1"/>
           </p:cNvSpPr>
           <p:nvPr>
-            <p:ph type="dt" idx="10"/>
+            <p:ph type="dt" idx="19"/>
           </p:nvPr>
         </p:nvSpPr>
         <p:spPr>
           <a:xfrm>
             <a:off x="838080" y="6356520"/>
-            <a:ext cx="2742840" cy="364680"/>
+            <a:ext cx="2742480" cy="364320"/>
           </a:xfrm>
           <a:prstGeom prst="rect">
             <a:avLst/>
@@ -3341,6 +4971,9 @@
                 <a:spcPct val="100000"/>
               </a:lnSpc>
               <a:buNone/>
+              <a:tabLst>
+                <a:tab algn="l" pos="0"/>
+              </a:tabLst>
               <a:defRPr lang="fr-FR" sz="1200" b="0" u="none" strike="noStrike">
                 <a:solidFill>
                   <a:schemeClr val="dk1">
@@ -3359,6 +4992,9 @@
                 <a:spcPct val="100000"/>
               </a:lnSpc>
               <a:buNone/>
+              <a:tabLst>
+                <a:tab algn="l" pos="0"/>
+              </a:tabLst>
             </a:pPr>
             <a:r>
               <a:rPr lang="fr-FR" sz="1200" b="0" u="none" strike="noStrike">
@@ -3386,18 +5022,18 @@
       </p:sp>
       <p:sp>
         <p:nvSpPr>
-          <p:cNvPr id="19" name="PlaceHolder 4"/>
+          <p:cNvPr id="36" name="PlaceHolder 4"/>
           <p:cNvSpPr>
             <a:spLocks noGrp="1"/>
           </p:cNvSpPr>
           <p:nvPr>
-            <p:ph type="ftr" idx="11"/>
+            <p:ph type="ftr" idx="20"/>
           </p:nvPr>
         </p:nvSpPr>
         <p:spPr>
           <a:xfrm>
             <a:off x="4038480" y="6356520"/>
-            <a:ext cx="4114440" cy="364680"/>
+            <a:ext cx="4114080" cy="364320"/>
           </a:xfrm>
           <a:prstGeom prst="rect">
             <a:avLst/>
@@ -3413,7 +5049,13 @@
           </a:bodyPr>
           <a:lstStyle>
             <a:lvl1pPr indent="0" algn="ctr">
+              <a:lnSpc>
+                <a:spcPct val="100000"/>
+              </a:lnSpc>
               <a:buNone/>
+              <a:tabLst>
+                <a:tab algn="l" pos="0"/>
+              </a:tabLst>
               <a:defRPr lang="fr-FR" sz="1400" b="0" u="none" strike="noStrike">
                 <a:solidFill>
                   <a:srgbClr val="000000"/>
@@ -3426,7 +5068,13 @@
           </a:lstStyle>
           <a:p>
             <a:pPr indent="0" algn="ctr">
+              <a:lnSpc>
+                <a:spcPct val="100000"/>
+              </a:lnSpc>
               <a:buNone/>
+              <a:tabLst>
+                <a:tab algn="l" pos="0"/>
+              </a:tabLst>
             </a:pPr>
             <a:r>
               <a:rPr lang="fr-FR" sz="1400" b="0" u="none" strike="noStrike">
@@ -3452,18 +5100,18 @@
       </p:sp>
       <p:sp>
         <p:nvSpPr>
-          <p:cNvPr id="20" name="PlaceHolder 5"/>
+          <p:cNvPr id="37" name="PlaceHolder 5"/>
           <p:cNvSpPr>
             <a:spLocks noGrp="1"/>
           </p:cNvSpPr>
           <p:nvPr>
-            <p:ph type="sldNum" idx="12"/>
+            <p:ph type="sldNum" idx="21"/>
           </p:nvPr>
         </p:nvSpPr>
         <p:spPr>
           <a:xfrm>
             <a:off x="8610480" y="6356520"/>
-            <a:ext cx="2742840" cy="364680"/>
+            <a:ext cx="2742480" cy="364320"/>
           </a:xfrm>
           <a:prstGeom prst="rect">
             <a:avLst/>
@@ -3483,6 +5131,9 @@
                 <a:spcPct val="100000"/>
               </a:lnSpc>
               <a:buNone/>
+              <a:tabLst>
+                <a:tab algn="l" pos="0"/>
+              </a:tabLst>
               <a:defRPr lang="fr-FR" sz="1200" b="0" u="none" strike="noStrike">
                 <a:solidFill>
                   <a:schemeClr val="dk1">
@@ -3501,8 +5152,11 @@
                 <a:spcPct val="100000"/>
               </a:lnSpc>
               <a:buNone/>
-            </a:pPr>
-            <a:fld id="{66161B57-8D5A-4859-B50E-FB56F5D8B4C1}" type="slidenum">
+              <a:tabLst>
+                <a:tab algn="l" pos="0"/>
+              </a:tabLst>
+            </a:pPr>
+            <a:fld id="{C3FB5139-5626-4C0E-90DE-D36E57AD8A36}" type="slidenum">
               <a:rPr lang="fr-FR" sz="1200" b="0" u="none" strike="noStrike">
                 <a:solidFill>
                   <a:schemeClr val="dk1">
@@ -3531,7 +5185,7 @@
 </p:sldLayout>
 </file>
 
-<file path=ppt/slideLayouts/slideLayout5.xml><?xml version="1.0" encoding="utf-8"?>
+<file path=ppt/slideLayouts/slideLayout8.xml><?xml version="1.0" encoding="utf-8"?>
 <p:sldLayout xmlns:a="http://schemas.openxmlformats.org/drawingml/2006/main" xmlns:p="http://schemas.openxmlformats.org/presentationml/2006/main" xmlns:r="http://schemas.openxmlformats.org/officeDocument/2006/relationships" xmlns:p14="http://schemas.microsoft.com/office/powerpoint/2010/main" xmlns:p15="http://schemas.microsoft.com/office/powerpoint/2012/main" xmlns:mc="http://schemas.openxmlformats.org/markup-compatibility/2006" type="blank" preserve="1">
   <p:cSld name="Titre de section">
     <p:bg>
@@ -3558,7 +5212,7 @@
       </p:grpSpPr>
       <p:sp>
         <p:nvSpPr>
-          <p:cNvPr id="21" name="PlaceHolder 1"/>
+          <p:cNvPr id="38" name="PlaceHolder 1"/>
           <p:cNvSpPr>
             <a:spLocks noGrp="1"/>
           </p:cNvSpPr>
@@ -3569,7 +5223,7 @@
         <p:spPr>
           <a:xfrm>
             <a:off x="831960" y="1709640"/>
-            <a:ext cx="10515240" cy="2852280"/>
+            <a:ext cx="10514880" cy="2851920"/>
           </a:xfrm>
           <a:prstGeom prst="rect">
             <a:avLst/>
@@ -3589,6 +5243,9 @@
                 <a:spcPct val="90000"/>
               </a:lnSpc>
               <a:buNone/>
+              <a:tabLst>
+                <a:tab algn="l" pos="0"/>
+              </a:tabLst>
             </a:pPr>
             <a:r>
               <a:rPr lang="fr-FR" sz="6000" b="0" u="none" strike="noStrike">
@@ -3599,7 +5256,7 @@
                 <a:uFillTx/>
                 <a:latin typeface="Calibri Light"/>
               </a:rPr>
-              <a:t>Modifiez le style du </a:t>
+              <a:t>M</a:t>
             </a:r>
             <a:r>
               <a:rPr lang="fr-FR" sz="6000" b="0" u="none" strike="noStrike">
@@ -3610,22 +5267,110 @@
                 <a:uFillTx/>
                 <a:latin typeface="Calibri Light"/>
               </a:rPr>
-              <a:t>titre</a:t>
+              <a:t>od</a:t>
+            </a:r>
+            <a:r>
+              <a:rPr lang="fr-FR" sz="6000" b="0" u="none" strike="noStrike">
+                <a:solidFill>
+                  <a:schemeClr val="dk1"/>
+                </a:solidFill>
+                <a:effectLst/>
+                <a:uFillTx/>
+                <a:latin typeface="Calibri Light"/>
+              </a:rPr>
+              <a:t>ifi</a:t>
+            </a:r>
+            <a:r>
+              <a:rPr lang="fr-FR" sz="6000" b="0" u="none" strike="noStrike">
+                <a:solidFill>
+                  <a:schemeClr val="dk1"/>
+                </a:solidFill>
+                <a:effectLst/>
+                <a:uFillTx/>
+                <a:latin typeface="Calibri Light"/>
+              </a:rPr>
+              <a:t>ez </a:t>
+            </a:r>
+            <a:r>
+              <a:rPr lang="fr-FR" sz="6000" b="0" u="none" strike="noStrike">
+                <a:solidFill>
+                  <a:schemeClr val="dk1"/>
+                </a:solidFill>
+                <a:effectLst/>
+                <a:uFillTx/>
+                <a:latin typeface="Calibri Light"/>
+              </a:rPr>
+              <a:t>le </a:t>
+            </a:r>
+            <a:r>
+              <a:rPr lang="fr-FR" sz="6000" b="0" u="none" strike="noStrike">
+                <a:solidFill>
+                  <a:schemeClr val="dk1"/>
+                </a:solidFill>
+                <a:effectLst/>
+                <a:uFillTx/>
+                <a:latin typeface="Calibri Light"/>
+              </a:rPr>
+              <a:t>sty</a:t>
+            </a:r>
+            <a:r>
+              <a:rPr lang="fr-FR" sz="6000" b="0" u="none" strike="noStrike">
+                <a:solidFill>
+                  <a:schemeClr val="dk1"/>
+                </a:solidFill>
+                <a:effectLst/>
+                <a:uFillTx/>
+                <a:latin typeface="Calibri Light"/>
+              </a:rPr>
+              <a:t>le </a:t>
+            </a:r>
+            <a:r>
+              <a:rPr lang="fr-FR" sz="6000" b="0" u="none" strike="noStrike">
+                <a:solidFill>
+                  <a:schemeClr val="dk1"/>
+                </a:solidFill>
+                <a:effectLst/>
+                <a:uFillTx/>
+                <a:latin typeface="Calibri Light"/>
+              </a:rPr>
+              <a:t>du </a:t>
+            </a:r>
+            <a:r>
+              <a:rPr lang="fr-FR" sz="6000" b="0" u="none" strike="noStrike">
+                <a:solidFill>
+                  <a:schemeClr val="dk1"/>
+                </a:solidFill>
+                <a:effectLst/>
+                <a:uFillTx/>
+                <a:latin typeface="Calibri Light"/>
+              </a:rPr>
+              <a:t>titr</a:t>
+            </a:r>
+            <a:r>
+              <a:rPr lang="fr-FR" sz="6000" b="0" u="none" strike="noStrike">
+                <a:solidFill>
+                  <a:schemeClr val="dk1"/>
+                </a:solidFill>
+                <a:effectLst/>
+                <a:uFillTx/>
+                <a:latin typeface="Calibri Light"/>
+              </a:rPr>
+              <a:t>e</a:t>
             </a:r>
             <a:endParaRPr lang="fr-FR" sz="6000" b="0" u="none" strike="noStrike">
               <a:solidFill>
-                <a:schemeClr val="dk1"/>
-              </a:solidFill>
-              <a:effectLst/>
-              <a:uFillTx/>
-              <a:latin typeface="Calibri"/>
+                <a:srgbClr val="000000"/>
+              </a:solidFill>
+              <a:effectLst/>
+              <a:uFillTx/>
+              <a:latin typeface="Arial"/>
             </a:endParaRPr>
           </a:p>
         </p:txBody>
       </p:sp>
       <p:sp>
         <p:nvSpPr>
-          <p:cNvPr id="22" name="PlaceHolder 2"/>
+          <p:cNvPr id="39" name="PlaceHolder 2"/>
           <p:cNvSpPr>
             <a:spLocks noGrp="1"/>
           </p:cNvSpPr>
@@ -3636,7 +5381,7 @@
         <p:spPr>
           <a:xfrm>
             <a:off x="831960" y="4589640"/>
-            <a:ext cx="10515240" cy="1499760"/>
+            <a:ext cx="10514880" cy="1499400"/>
           </a:xfrm>
           <a:prstGeom prst="rect">
             <a:avLst/>
@@ -3678,29 +5423,29 @@
             </a:r>
             <a:endParaRPr lang="fr-FR" sz="2400" b="0" u="none" strike="noStrike">
               <a:solidFill>
-                <a:schemeClr val="dk1"/>
-              </a:solidFill>
-              <a:effectLst/>
-              <a:uFillTx/>
-              <a:latin typeface="Calibri"/>
+                <a:srgbClr val="000000"/>
+              </a:solidFill>
+              <a:effectLst/>
+              <a:uFillTx/>
+              <a:latin typeface="Arial"/>
             </a:endParaRPr>
           </a:p>
         </p:txBody>
       </p:sp>
       <p:sp>
         <p:nvSpPr>
-          <p:cNvPr id="23" name="PlaceHolder 3"/>
+          <p:cNvPr id="40" name="PlaceHolder 3"/>
           <p:cNvSpPr>
             <a:spLocks noGrp="1"/>
           </p:cNvSpPr>
           <p:nvPr>
-            <p:ph type="dt" idx="13"/>
+            <p:ph type="dt" idx="22"/>
           </p:nvPr>
         </p:nvSpPr>
         <p:spPr>
           <a:xfrm>
             <a:off x="838080" y="6356520"/>
-            <a:ext cx="2742840" cy="364680"/>
+            <a:ext cx="2742480" cy="364320"/>
           </a:xfrm>
           <a:prstGeom prst="rect">
             <a:avLst/>
@@ -3720,6 +5465,9 @@
                 <a:spcPct val="100000"/>
               </a:lnSpc>
               <a:buNone/>
+              <a:tabLst>
+                <a:tab algn="l" pos="0"/>
+              </a:tabLst>
               <a:defRPr lang="fr-FR" sz="1200" b="0" u="none" strike="noStrike">
                 <a:solidFill>
                   <a:schemeClr val="dk1">
@@ -3738,6 +5486,9 @@
                 <a:spcPct val="100000"/>
               </a:lnSpc>
               <a:buNone/>
+              <a:tabLst>
+                <a:tab algn="l" pos="0"/>
+              </a:tabLst>
             </a:pPr>
             <a:r>
               <a:rPr lang="fr-FR" sz="1200" b="0" u="none" strike="noStrike">
@@ -3765,18 +5516,18 @@
       </p:sp>
       <p:sp>
         <p:nvSpPr>
-          <p:cNvPr id="24" name="PlaceHolder 4"/>
+          <p:cNvPr id="41" name="PlaceHolder 4"/>
           <p:cNvSpPr>
             <a:spLocks noGrp="1"/>
           </p:cNvSpPr>
           <p:nvPr>
-            <p:ph type="ftr" idx="14"/>
+            <p:ph type="ftr" idx="23"/>
           </p:nvPr>
         </p:nvSpPr>
         <p:spPr>
           <a:xfrm>
             <a:off x="4038480" y="6356520"/>
-            <a:ext cx="4114440" cy="364680"/>
+            <a:ext cx="4114080" cy="364320"/>
           </a:xfrm>
           <a:prstGeom prst="rect">
             <a:avLst/>
@@ -3792,7 +5543,13 @@
           </a:bodyPr>
           <a:lstStyle>
             <a:lvl1pPr indent="0" algn="ctr">
+              <a:lnSpc>
+                <a:spcPct val="100000"/>
+              </a:lnSpc>
               <a:buNone/>
+              <a:tabLst>
+                <a:tab algn="l" pos="0"/>
+              </a:tabLst>
               <a:defRPr lang="fr-FR" sz="1400" b="0" u="none" strike="noStrike">
                 <a:solidFill>
                   <a:srgbClr val="000000"/>
@@ -3805,7 +5562,13 @@
           </a:lstStyle>
           <a:p>
             <a:pPr indent="0" algn="ctr">
+              <a:lnSpc>
+                <a:spcPct val="100000"/>
+              </a:lnSpc>
               <a:buNone/>
+              <a:tabLst>
+                <a:tab algn="l" pos="0"/>
+              </a:tabLst>
             </a:pPr>
             <a:r>
               <a:rPr lang="fr-FR" sz="1400" b="0" u="none" strike="noStrike">
@@ -3831,18 +5594,18 @@
       </p:sp>
       <p:sp>
         <p:nvSpPr>
-          <p:cNvPr id="25" name="PlaceHolder 5"/>
+          <p:cNvPr id="42" name="PlaceHolder 5"/>
           <p:cNvSpPr>
             <a:spLocks noGrp="1"/>
           </p:cNvSpPr>
           <p:nvPr>
-            <p:ph type="sldNum" idx="15"/>
+            <p:ph type="sldNum" idx="24"/>
           </p:nvPr>
         </p:nvSpPr>
         <p:spPr>
           <a:xfrm>
             <a:off x="8610480" y="6356520"/>
-            <a:ext cx="2742840" cy="364680"/>
+            <a:ext cx="2742480" cy="364320"/>
           </a:xfrm>
           <a:prstGeom prst="rect">
             <a:avLst/>
@@ -3862,6 +5625,9 @@
                 <a:spcPct val="100000"/>
               </a:lnSpc>
               <a:buNone/>
+              <a:tabLst>
+                <a:tab algn="l" pos="0"/>
+              </a:tabLst>
               <a:defRPr lang="fr-FR" sz="1200" b="0" u="none" strike="noStrike">
                 <a:solidFill>
                   <a:schemeClr val="dk1">
@@ -3880,8 +5646,11 @@
                 <a:spcPct val="100000"/>
               </a:lnSpc>
               <a:buNone/>
-            </a:pPr>
-            <a:fld id="{FCB73517-6DCE-4EE0-AF03-2B820365E965}" type="slidenum">
+              <a:tabLst>
+                <a:tab algn="l" pos="0"/>
+              </a:tabLst>
+            </a:pPr>
+            <a:fld id="{0B9CC3E8-830A-4A9B-A213-5BF1289EFDF5}" type="slidenum">
               <a:rPr lang="fr-FR" sz="1200" b="0" u="none" strike="noStrike">
                 <a:solidFill>
                   <a:schemeClr val="dk1">
@@ -3910,7 +5679,7 @@
 </p:sldLayout>
 </file>
 
-<file path=ppt/slideLayouts/slideLayout6.xml><?xml version="1.0" encoding="utf-8"?>
+<file path=ppt/slideLayouts/slideLayout9.xml><?xml version="1.0" encoding="utf-8"?>
 <p:sldLayout xmlns:a="http://schemas.openxmlformats.org/drawingml/2006/main" xmlns:p="http://schemas.openxmlformats.org/presentationml/2006/main" xmlns:r="http://schemas.openxmlformats.org/officeDocument/2006/relationships" xmlns:p14="http://schemas.microsoft.com/office/powerpoint/2010/main" xmlns:p15="http://schemas.microsoft.com/office/powerpoint/2012/main" xmlns:mc="http://schemas.openxmlformats.org/markup-compatibility/2006" type="twoObj" preserve="1">
   <p:cSld name="Deux contenus">
     <p:bg>
@@ -3937,7 +5706,7 @@
       </p:grpSpPr>
       <p:sp>
         <p:nvSpPr>
-          <p:cNvPr id="26" name="PlaceHolder 1"/>
+          <p:cNvPr id="43" name="PlaceHolder 1"/>
           <p:cNvSpPr>
             <a:spLocks noGrp="1"/>
           </p:cNvSpPr>
@@ -3948,7 +5717,7 @@
         <p:spPr>
           <a:xfrm>
             <a:off x="838080" y="365040"/>
-            <a:ext cx="10515240" cy="1325160"/>
+            <a:ext cx="10514880" cy="1324800"/>
           </a:xfrm>
           <a:prstGeom prst="rect">
             <a:avLst/>
@@ -3968,6 +5737,9 @@
                 <a:spcPct val="90000"/>
               </a:lnSpc>
               <a:buNone/>
+              <a:tabLst>
+                <a:tab algn="l" pos="0"/>
+              </a:tabLst>
             </a:pPr>
             <a:r>
               <a:rPr lang="fr-FR" sz="4400" b="0" u="none" strike="noStrike">
@@ -3982,18 +5754,18 @@
             </a:r>
             <a:endParaRPr lang="fr-FR" sz="4400" b="0" u="none" strike="noStrike">
               <a:solidFill>
-                <a:schemeClr val="dk1"/>
-              </a:solidFill>
-              <a:effectLst/>
-              <a:uFillTx/>
-              <a:latin typeface="Calibri"/>
+                <a:srgbClr val="000000"/>
+              </a:solidFill>
+              <a:effectLst/>
+              <a:uFillTx/>
+              <a:latin typeface="Arial"/>
             </a:endParaRPr>
           </a:p>
         </p:txBody>
       </p:sp>
       <p:sp>
         <p:nvSpPr>
-          <p:cNvPr id="27" name="PlaceHolder 2"/>
+          <p:cNvPr id="44" name="PlaceHolder 2"/>
           <p:cNvSpPr>
             <a:spLocks noGrp="1"/>
           </p:cNvSpPr>
@@ -4004,7 +5776,7 @@
         <p:spPr>
           <a:xfrm>
             <a:off x="838080" y="1825560"/>
-            <a:ext cx="5181120" cy="4350960"/>
+            <a:ext cx="5180760" cy="4350600"/>
           </a:xfrm>
           <a:prstGeom prst="rect">
             <a:avLst/>
@@ -4045,11 +5817,11 @@
             </a:r>
             <a:endParaRPr lang="fr-FR" sz="2800" b="0" u="none" strike="noStrike">
               <a:solidFill>
-                <a:schemeClr val="dk1"/>
-              </a:solidFill>
-              <a:effectLst/>
-              <a:uFillTx/>
-              <a:latin typeface="Calibri"/>
+                <a:srgbClr val="000000"/>
+              </a:solidFill>
+              <a:effectLst/>
+              <a:uFillTx/>
+              <a:latin typeface="Arial"/>
             </a:endParaRPr>
           </a:p>
           <a:p>
@@ -4079,11 +5851,11 @@
             </a:r>
             <a:endParaRPr lang="fr-FR" sz="2400" b="0" u="none" strike="noStrike">
               <a:solidFill>
-                <a:schemeClr val="dk1"/>
-              </a:solidFill>
-              <a:effectLst/>
-              <a:uFillTx/>
-              <a:latin typeface="Calibri"/>
+                <a:srgbClr val="000000"/>
+              </a:solidFill>
+              <a:effectLst/>
+              <a:uFillTx/>
+              <a:latin typeface="Arial"/>
             </a:endParaRPr>
           </a:p>
           <a:p>
@@ -4113,11 +5885,11 @@
             </a:r>
             <a:endParaRPr lang="fr-FR" sz="2000" b="0" u="none" strike="noStrike">
               <a:solidFill>
-                <a:schemeClr val="dk1"/>
-              </a:solidFill>
-              <a:effectLst/>
-              <a:uFillTx/>
-              <a:latin typeface="Calibri"/>
+                <a:srgbClr val="000000"/>
+              </a:solidFill>
+              <a:effectLst/>
+              <a:uFillTx/>
+              <a:latin typeface="Arial"/>
             </a:endParaRPr>
           </a:p>
           <a:p>
@@ -4147,11 +5919,11 @@
             </a:r>
             <a:endParaRPr lang="fr-FR" sz="1800" b="0" u="none" strike="noStrike">
               <a:solidFill>
-                <a:schemeClr val="dk1"/>
-              </a:solidFill>
-              <a:effectLst/>
-              <a:uFillTx/>
-              <a:latin typeface="Calibri"/>
+                <a:srgbClr val="000000"/>
+              </a:solidFill>
+              <a:effectLst/>
+              <a:uFillTx/>
+              <a:latin typeface="Arial"/>
             </a:endParaRPr>
           </a:p>
           <a:p>
@@ -4181,18 +5953,18 @@
             </a:r>
             <a:endParaRPr lang="fr-FR" sz="1800" b="0" u="none" strike="noStrike">
               <a:solidFill>
-                <a:schemeClr val="dk1"/>
-              </a:solidFill>
-              <a:effectLst/>
-              <a:uFillTx/>
-              <a:latin typeface="Calibri"/>
+                <a:srgbClr val="000000"/>
+              </a:solidFill>
+              <a:effectLst/>
+              <a:uFillTx/>
+              <a:latin typeface="Arial"/>
             </a:endParaRPr>
           </a:p>
         </p:txBody>
       </p:sp>
       <p:sp>
         <p:nvSpPr>
-          <p:cNvPr id="28" name="PlaceHolder 3"/>
+          <p:cNvPr id="45" name="PlaceHolder 3"/>
           <p:cNvSpPr>
             <a:spLocks noGrp="1"/>
           </p:cNvSpPr>
@@ -4203,7 +5975,7 @@
         <p:spPr>
           <a:xfrm>
             <a:off x="6172200" y="1825560"/>
-            <a:ext cx="5181120" cy="4350960"/>
+            <a:ext cx="5180760" cy="4350600"/>
           </a:xfrm>
           <a:prstGeom prst="rect">
             <a:avLst/>
@@ -4244,11 +6016,11 @@
             </a:r>
             <a:endParaRPr lang="fr-FR" sz="2800" b="0" u="none" strike="noStrike">
               <a:solidFill>
-                <a:schemeClr val="dk1"/>
-              </a:solidFill>
-              <a:effectLst/>
-              <a:uFillTx/>
-              <a:latin typeface="Calibri"/>
+                <a:srgbClr val="000000"/>
+              </a:solidFill>
+              <a:effectLst/>
+              <a:uFillTx/>
+              <a:latin typeface="Arial"/>
             </a:endParaRPr>
           </a:p>
           <a:p>
@@ -4278,11 +6050,11 @@
             </a:r>
             <a:endParaRPr lang="fr-FR" sz="2400" b="0" u="none" strike="noStrike">
               <a:solidFill>
-                <a:schemeClr val="dk1"/>
-              </a:solidFill>
-              <a:effectLst/>
-              <a:uFillTx/>
-              <a:latin typeface="Calibri"/>
+                <a:srgbClr val="000000"/>
+              </a:solidFill>
+              <a:effectLst/>
+              <a:uFillTx/>
+              <a:latin typeface="Arial"/>
             </a:endParaRPr>
           </a:p>
           <a:p>
@@ -4312,11 +6084,11 @@
             </a:r>
             <a:endParaRPr lang="fr-FR" sz="2000" b="0" u="none" strike="noStrike">
               <a:solidFill>
-                <a:schemeClr val="dk1"/>
-              </a:solidFill>
-              <a:effectLst/>
-              <a:uFillTx/>
-              <a:latin typeface="Calibri"/>
+                <a:srgbClr val="000000"/>
+              </a:solidFill>
+              <a:effectLst/>
+              <a:uFillTx/>
+              <a:latin typeface="Arial"/>
             </a:endParaRPr>
           </a:p>
           <a:p>
@@ -4346,11 +6118,11 @@
             </a:r>
             <a:endParaRPr lang="fr-FR" sz="1800" b="0" u="none" strike="noStrike">
               <a:solidFill>
-                <a:schemeClr val="dk1"/>
-              </a:solidFill>
-              <a:effectLst/>
-              <a:uFillTx/>
-              <a:latin typeface="Calibri"/>
+                <a:srgbClr val="000000"/>
+              </a:solidFill>
+              <a:effectLst/>
+              <a:uFillTx/>
+              <a:latin typeface="Arial"/>
             </a:endParaRPr>
           </a:p>
           <a:p>
@@ -4380,1396 +6152,18 @@
             </a:r>
             <a:endParaRPr lang="fr-FR" sz="1800" b="0" u="none" strike="noStrike">
               <a:solidFill>
-                <a:schemeClr val="dk1"/>
-              </a:solidFill>
-              <a:effectLst/>
-              <a:uFillTx/>
-              <a:latin typeface="Calibri"/>
+                <a:srgbClr val="000000"/>
+              </a:solidFill>
+              <a:effectLst/>
+              <a:uFillTx/>
+              <a:latin typeface="Arial"/>
             </a:endParaRPr>
           </a:p>
         </p:txBody>
       </p:sp>
       <p:sp>
         <p:nvSpPr>
-          <p:cNvPr id="29" name="PlaceHolder 4"/>
-          <p:cNvSpPr>
-            <a:spLocks noGrp="1"/>
-          </p:cNvSpPr>
-          <p:nvPr>
-            <p:ph type="dt" idx="16"/>
-          </p:nvPr>
-        </p:nvSpPr>
-        <p:spPr>
-          <a:xfrm>
-            <a:off x="838080" y="6356520"/>
-            <a:ext cx="2742840" cy="364680"/>
-          </a:xfrm>
-          <a:prstGeom prst="rect">
-            <a:avLst/>
-          </a:prstGeom>
-          <a:noFill/>
-          <a:ln w="0">
-            <a:noFill/>
-          </a:ln>
-        </p:spPr>
-        <p:txBody>
-          <a:bodyPr lIns="91440" rIns="91440" tIns="45720" bIns="45720" anchor="ctr">
-            <a:noAutofit/>
-          </a:bodyPr>
-          <a:lstStyle>
-            <a:lvl1pPr indent="0" defTabSz="914400">
-              <a:lnSpc>
-                <a:spcPct val="100000"/>
-              </a:lnSpc>
-              <a:buNone/>
-              <a:defRPr lang="fr-FR" sz="1200" b="0" u="none" strike="noStrike">
-                <a:solidFill>
-                  <a:schemeClr val="dk1">
-                    <a:tint val="75000"/>
-                  </a:schemeClr>
-                </a:solidFill>
-                <a:effectLst/>
-                <a:uFillTx/>
-                <a:latin typeface="Calibri"/>
-              </a:defRPr>
-            </a:lvl1pPr>
-          </a:lstStyle>
-          <a:p>
-            <a:pPr indent="0" defTabSz="914400">
-              <a:lnSpc>
-                <a:spcPct val="100000"/>
-              </a:lnSpc>
-              <a:buNone/>
-            </a:pPr>
-            <a:r>
-              <a:rPr lang="fr-FR" sz="1200" b="0" u="none" strike="noStrike">
-                <a:solidFill>
-                  <a:schemeClr val="dk1">
-                    <a:tint val="75000"/>
-                  </a:schemeClr>
-                </a:solidFill>
-                <a:effectLst/>
-                <a:uFillTx/>
-                <a:latin typeface="Calibri"/>
-              </a:rPr>
-              <a:t>&lt;date/heure&gt;</a:t>
-            </a:r>
-            <a:endParaRPr lang="fr-FR" sz="1200" b="0" u="none" strike="noStrike">
-              <a:solidFill>
-                <a:srgbClr val="000000"/>
-              </a:solidFill>
-              <a:effectLst/>
-              <a:uFillTx/>
-              <a:latin typeface="Times New Roman"/>
-            </a:endParaRPr>
-          </a:p>
-        </p:txBody>
-      </p:sp>
-      <p:sp>
-        <p:nvSpPr>
-          <p:cNvPr id="30" name="PlaceHolder 5"/>
-          <p:cNvSpPr>
-            <a:spLocks noGrp="1"/>
-          </p:cNvSpPr>
-          <p:nvPr>
-            <p:ph type="ftr" idx="17"/>
-          </p:nvPr>
-        </p:nvSpPr>
-        <p:spPr>
-          <a:xfrm>
-            <a:off x="4038480" y="6356520"/>
-            <a:ext cx="4114440" cy="364680"/>
-          </a:xfrm>
-          <a:prstGeom prst="rect">
-            <a:avLst/>
-          </a:prstGeom>
-          <a:noFill/>
-          <a:ln w="0">
-            <a:noFill/>
-          </a:ln>
-        </p:spPr>
-        <p:txBody>
-          <a:bodyPr lIns="91440" rIns="91440" tIns="45720" bIns="45720" anchor="ctr">
-            <a:noAutofit/>
-          </a:bodyPr>
-          <a:lstStyle>
-            <a:lvl1pPr indent="0" algn="ctr">
-              <a:buNone/>
-              <a:defRPr lang="fr-FR" sz="1400" b="0" u="none" strike="noStrike">
-                <a:solidFill>
-                  <a:srgbClr val="000000"/>
-                </a:solidFill>
-                <a:effectLst/>
-                <a:uFillTx/>
-                <a:latin typeface="Times New Roman"/>
-              </a:defRPr>
-            </a:lvl1pPr>
-          </a:lstStyle>
-          <a:p>
-            <a:pPr indent="0" algn="ctr">
-              <a:buNone/>
-            </a:pPr>
-            <a:r>
-              <a:rPr lang="fr-FR" sz="1400" b="0" u="none" strike="noStrike">
-                <a:solidFill>
-                  <a:srgbClr val="000000"/>
-                </a:solidFill>
-                <a:effectLst/>
-                <a:uFillTx/>
-                <a:latin typeface="Times New Roman"/>
-              </a:rPr>
-              <a:t>&lt;pied de page&gt;</a:t>
-            </a:r>
-            <a:endParaRPr lang="fr-FR" sz="1400" b="0" u="none" strike="noStrike">
-              <a:solidFill>
-                <a:srgbClr val="000000"/>
-              </a:solidFill>
-              <a:effectLst/>
-              <a:uFillTx/>
-              <a:latin typeface="Times New Roman"/>
-            </a:endParaRPr>
-          </a:p>
-        </p:txBody>
-      </p:sp>
-      <p:sp>
-        <p:nvSpPr>
-          <p:cNvPr id="31" name="PlaceHolder 6"/>
-          <p:cNvSpPr>
-            <a:spLocks noGrp="1"/>
-          </p:cNvSpPr>
-          <p:nvPr>
-            <p:ph type="sldNum" idx="18"/>
-          </p:nvPr>
-        </p:nvSpPr>
-        <p:spPr>
-          <a:xfrm>
-            <a:off x="8610480" y="6356520"/>
-            <a:ext cx="2742840" cy="364680"/>
-          </a:xfrm>
-          <a:prstGeom prst="rect">
-            <a:avLst/>
-          </a:prstGeom>
-          <a:noFill/>
-          <a:ln w="0">
-            <a:noFill/>
-          </a:ln>
-        </p:spPr>
-        <p:txBody>
-          <a:bodyPr lIns="91440" rIns="91440" tIns="45720" bIns="45720" anchor="ctr">
-            <a:noAutofit/>
-          </a:bodyPr>
-          <a:lstStyle>
-            <a:lvl1pPr indent="0" algn="r" defTabSz="914400">
-              <a:lnSpc>
-                <a:spcPct val="100000"/>
-              </a:lnSpc>
-              <a:buNone/>
-              <a:defRPr lang="fr-FR" sz="1200" b="0" u="none" strike="noStrike">
-                <a:solidFill>
-                  <a:schemeClr val="dk1">
-                    <a:tint val="75000"/>
-                  </a:schemeClr>
-                </a:solidFill>
-                <a:effectLst/>
-                <a:uFillTx/>
-                <a:latin typeface="Calibri"/>
-              </a:defRPr>
-            </a:lvl1pPr>
-          </a:lstStyle>
-          <a:p>
-            <a:pPr indent="0" algn="r" defTabSz="914400">
-              <a:lnSpc>
-                <a:spcPct val="100000"/>
-              </a:lnSpc>
-              <a:buNone/>
-            </a:pPr>
-            <a:fld id="{73DC756B-173A-4547-B313-8DA532FFD061}" type="slidenum">
-              <a:rPr lang="fr-FR" sz="1200" b="0" u="none" strike="noStrike">
-                <a:solidFill>
-                  <a:schemeClr val="dk1">
-                    <a:tint val="75000"/>
-                  </a:schemeClr>
-                </a:solidFill>
-                <a:effectLst/>
-                <a:uFillTx/>
-                <a:latin typeface="Calibri"/>
-              </a:rPr>
-              <a:t>&lt;numéro&gt;</a:t>
-            </a:fld>
-            <a:endParaRPr lang="fr-FR" sz="1200" b="0" u="none" strike="noStrike">
-              <a:solidFill>
-                <a:srgbClr val="000000"/>
-              </a:solidFill>
-              <a:effectLst/>
-              <a:uFillTx/>
-              <a:latin typeface="Times New Roman"/>
-            </a:endParaRPr>
-          </a:p>
-        </p:txBody>
-      </p:sp>
-    </p:spTree>
-  </p:cSld>
-</p:sldLayout>
-</file>
-
-<file path=ppt/slideLayouts/slideLayout7.xml><?xml version="1.0" encoding="utf-8"?>
-<p:sldLayout xmlns:a="http://schemas.openxmlformats.org/drawingml/2006/main" xmlns:p="http://schemas.openxmlformats.org/presentationml/2006/main" xmlns:r="http://schemas.openxmlformats.org/officeDocument/2006/relationships" xmlns:p14="http://schemas.microsoft.com/office/powerpoint/2010/main" xmlns:p15="http://schemas.microsoft.com/office/powerpoint/2012/main" xmlns:mc="http://schemas.openxmlformats.org/markup-compatibility/2006" type="blank" preserve="1">
-  <p:cSld name="Comparaison">
-    <p:bg>
-      <p:bgPr>
-        <a:blipFill rotWithShape="0">
-          <a:blip r:embed="rId2"/>
-          <a:stretch/>
-        </a:blipFill>
-      </p:bgPr>
-    </p:bg>
-    <p:spTree>
-      <p:nvGrpSpPr>
-        <p:cNvPr id="1" name=""/>
-        <p:cNvGrpSpPr/>
-        <p:nvPr/>
-      </p:nvGrpSpPr>
-      <p:grpSpPr>
-        <a:xfrm>
-          <a:off x="0" y="0"/>
-          <a:ext cx="0" cy="0"/>
-          <a:chOff x="0" y="0"/>
-          <a:chExt cx="0" cy="0"/>
-        </a:xfrm>
-      </p:grpSpPr>
-      <p:sp>
-        <p:nvSpPr>
-          <p:cNvPr id="32" name="PlaceHolder 1"/>
-          <p:cNvSpPr>
-            <a:spLocks noGrp="1"/>
-          </p:cNvSpPr>
-          <p:nvPr>
-            <p:ph type="title"/>
-          </p:nvPr>
-        </p:nvSpPr>
-        <p:spPr>
-          <a:xfrm>
-            <a:off x="839880" y="365040"/>
-            <a:ext cx="10515240" cy="1325160"/>
-          </a:xfrm>
-          <a:prstGeom prst="rect">
-            <a:avLst/>
-          </a:prstGeom>
-          <a:noFill/>
-          <a:ln w="0">
-            <a:noFill/>
-          </a:ln>
-        </p:spPr>
-        <p:txBody>
-          <a:bodyPr lIns="91440" rIns="91440" tIns="45720" bIns="45720" anchor="ctr">
-            <a:noAutofit/>
-          </a:bodyPr>
-          <a:p>
-            <a:pPr indent="0" defTabSz="914400">
-              <a:lnSpc>
-                <a:spcPct val="90000"/>
-              </a:lnSpc>
-              <a:buNone/>
-            </a:pPr>
-            <a:r>
-              <a:rPr lang="fr-FR" sz="4400" b="0" u="none" strike="noStrike">
-                <a:solidFill>
-                  <a:schemeClr val="dk1"/>
-                </a:solidFill>
-                <a:effectLst/>
-                <a:uFillTx/>
-                <a:latin typeface="Calibri Light"/>
-              </a:rPr>
-              <a:t>Modifiez le style du titre</a:t>
-            </a:r>
-            <a:endParaRPr lang="fr-FR" sz="4400" b="0" u="none" strike="noStrike">
-              <a:solidFill>
-                <a:schemeClr val="dk1"/>
-              </a:solidFill>
-              <a:effectLst/>
-              <a:uFillTx/>
-              <a:latin typeface="Calibri"/>
-            </a:endParaRPr>
-          </a:p>
-        </p:txBody>
-      </p:sp>
-      <p:sp>
-        <p:nvSpPr>
-          <p:cNvPr id="33" name="PlaceHolder 2"/>
-          <p:cNvSpPr>
-            <a:spLocks noGrp="1"/>
-          </p:cNvSpPr>
-          <p:nvPr>
-            <p:ph type="body"/>
-          </p:nvPr>
-        </p:nvSpPr>
-        <p:spPr>
-          <a:xfrm>
-            <a:off x="839880" y="1681200"/>
-            <a:ext cx="5157360" cy="823680"/>
-          </a:xfrm>
-          <a:prstGeom prst="rect">
-            <a:avLst/>
-          </a:prstGeom>
-          <a:noFill/>
-          <a:ln w="0">
-            <a:noFill/>
-          </a:ln>
-        </p:spPr>
-        <p:txBody>
-          <a:bodyPr lIns="91440" rIns="91440" tIns="45720" bIns="45720" anchor="b">
-            <a:noAutofit/>
-          </a:bodyPr>
-          <a:p>
-            <a:pPr indent="0" defTabSz="914400">
-              <a:lnSpc>
-                <a:spcPct val="90000"/>
-              </a:lnSpc>
-              <a:spcBef>
-                <a:spcPts val="1001"/>
-              </a:spcBef>
-              <a:buNone/>
-              <a:tabLst>
-                <a:tab algn="l" pos="0"/>
-              </a:tabLst>
-            </a:pPr>
-            <a:r>
-              <a:rPr lang="fr-FR" sz="2400" b="1" u="none" strike="noStrike">
-                <a:solidFill>
-                  <a:schemeClr val="dk1"/>
-                </a:solidFill>
-                <a:effectLst/>
-                <a:uFillTx/>
-                <a:latin typeface="Calibri"/>
-              </a:rPr>
-              <a:t>Modifier les styles du texte du masque</a:t>
-            </a:r>
-            <a:endParaRPr lang="fr-FR" sz="2400" b="0" u="none" strike="noStrike">
-              <a:solidFill>
-                <a:schemeClr val="dk1"/>
-              </a:solidFill>
-              <a:effectLst/>
-              <a:uFillTx/>
-              <a:latin typeface="Calibri"/>
-            </a:endParaRPr>
-          </a:p>
-        </p:txBody>
-      </p:sp>
-      <p:sp>
-        <p:nvSpPr>
-          <p:cNvPr id="34" name="PlaceHolder 3"/>
-          <p:cNvSpPr>
-            <a:spLocks noGrp="1"/>
-          </p:cNvSpPr>
-          <p:nvPr>
-            <p:ph type="body"/>
-          </p:nvPr>
-        </p:nvSpPr>
-        <p:spPr>
-          <a:xfrm>
-            <a:off x="839880" y="2505240"/>
-            <a:ext cx="5157360" cy="3684240"/>
-          </a:xfrm>
-          <a:prstGeom prst="rect">
-            <a:avLst/>
-          </a:prstGeom>
-          <a:noFill/>
-          <a:ln w="0">
-            <a:noFill/>
-          </a:ln>
-        </p:spPr>
-        <p:txBody>
-          <a:bodyPr lIns="91440" rIns="91440" tIns="45720" bIns="45720" anchor="t">
-            <a:noAutofit/>
-          </a:bodyPr>
-          <a:p>
-            <a:pPr marL="228600" indent="-228600" defTabSz="914400">
-              <a:lnSpc>
-                <a:spcPct val="90000"/>
-              </a:lnSpc>
-              <a:spcBef>
-                <a:spcPts val="1001"/>
-              </a:spcBef>
-              <a:buClr>
-                <a:srgbClr val="000000"/>
-              </a:buClr>
-              <a:buFont typeface="Arial"/>
-              <a:buChar char="•"/>
-            </a:pPr>
-            <a:r>
-              <a:rPr lang="fr-FR" sz="2800" b="0" u="none" strike="noStrike">
-                <a:solidFill>
-                  <a:schemeClr val="dk1"/>
-                </a:solidFill>
-                <a:effectLst/>
-                <a:uFillTx/>
-                <a:latin typeface="Calibri"/>
-              </a:rPr>
-              <a:t>Modifier les styles du texte du masque</a:t>
-            </a:r>
-            <a:endParaRPr lang="fr-FR" sz="2800" b="0" u="none" strike="noStrike">
-              <a:solidFill>
-                <a:schemeClr val="dk1"/>
-              </a:solidFill>
-              <a:effectLst/>
-              <a:uFillTx/>
-              <a:latin typeface="Calibri"/>
-            </a:endParaRPr>
-          </a:p>
-          <a:p>
-            <a:pPr marL="685800" lvl="1" indent="-228600" defTabSz="914400">
-              <a:lnSpc>
-                <a:spcPct val="90000"/>
-              </a:lnSpc>
-              <a:spcBef>
-                <a:spcPts val="499"/>
-              </a:spcBef>
-              <a:buClr>
-                <a:srgbClr val="000000"/>
-              </a:buClr>
-              <a:buFont typeface="Arial"/>
-              <a:buChar char="•"/>
-            </a:pPr>
-            <a:r>
-              <a:rPr lang="fr-FR" sz="2400" b="0" u="none" strike="noStrike">
-                <a:solidFill>
-                  <a:schemeClr val="dk1"/>
-                </a:solidFill>
-                <a:effectLst/>
-                <a:uFillTx/>
-                <a:latin typeface="Calibri"/>
-              </a:rPr>
-              <a:t>Deuxième niveau</a:t>
-            </a:r>
-            <a:endParaRPr lang="fr-FR" sz="2400" b="0" u="none" strike="noStrike">
-              <a:solidFill>
-                <a:schemeClr val="dk1"/>
-              </a:solidFill>
-              <a:effectLst/>
-              <a:uFillTx/>
-              <a:latin typeface="Calibri"/>
-            </a:endParaRPr>
-          </a:p>
-          <a:p>
-            <a:pPr marL="1143000" lvl="2" indent="-228600" defTabSz="914400">
-              <a:lnSpc>
-                <a:spcPct val="90000"/>
-              </a:lnSpc>
-              <a:spcBef>
-                <a:spcPts val="499"/>
-              </a:spcBef>
-              <a:buClr>
-                <a:srgbClr val="000000"/>
-              </a:buClr>
-              <a:buFont typeface="Arial"/>
-              <a:buChar char="•"/>
-            </a:pPr>
-            <a:r>
-              <a:rPr lang="fr-FR" sz="2000" b="0" u="none" strike="noStrike">
-                <a:solidFill>
-                  <a:schemeClr val="dk1"/>
-                </a:solidFill>
-                <a:effectLst/>
-                <a:uFillTx/>
-                <a:latin typeface="Calibri"/>
-              </a:rPr>
-              <a:t>Troisième niveau</a:t>
-            </a:r>
-            <a:endParaRPr lang="fr-FR" sz="2000" b="0" u="none" strike="noStrike">
-              <a:solidFill>
-                <a:schemeClr val="dk1"/>
-              </a:solidFill>
-              <a:effectLst/>
-              <a:uFillTx/>
-              <a:latin typeface="Calibri"/>
-            </a:endParaRPr>
-          </a:p>
-          <a:p>
-            <a:pPr marL="1600200" lvl="3" indent="-228600" defTabSz="914400">
-              <a:lnSpc>
-                <a:spcPct val="90000"/>
-              </a:lnSpc>
-              <a:spcBef>
-                <a:spcPts val="499"/>
-              </a:spcBef>
-              <a:buClr>
-                <a:srgbClr val="000000"/>
-              </a:buClr>
-              <a:buFont typeface="Arial"/>
-              <a:buChar char="•"/>
-            </a:pPr>
-            <a:r>
-              <a:rPr lang="fr-FR" sz="1800" b="0" u="none" strike="noStrike">
-                <a:solidFill>
-                  <a:schemeClr val="dk1"/>
-                </a:solidFill>
-                <a:effectLst/>
-                <a:uFillTx/>
-                <a:latin typeface="Calibri"/>
-              </a:rPr>
-              <a:t>Quatrième niveau</a:t>
-            </a:r>
-            <a:endParaRPr lang="fr-FR" sz="1800" b="0" u="none" strike="noStrike">
-              <a:solidFill>
-                <a:schemeClr val="dk1"/>
-              </a:solidFill>
-              <a:effectLst/>
-              <a:uFillTx/>
-              <a:latin typeface="Calibri"/>
-            </a:endParaRPr>
-          </a:p>
-          <a:p>
-            <a:pPr marL="2057400" lvl="4" indent="-228600" defTabSz="914400">
-              <a:lnSpc>
-                <a:spcPct val="90000"/>
-              </a:lnSpc>
-              <a:spcBef>
-                <a:spcPts val="499"/>
-              </a:spcBef>
-              <a:buClr>
-                <a:srgbClr val="000000"/>
-              </a:buClr>
-              <a:buFont typeface="Arial"/>
-              <a:buChar char="•"/>
-            </a:pPr>
-            <a:r>
-              <a:rPr lang="fr-FR" sz="1800" b="0" u="none" strike="noStrike">
-                <a:solidFill>
-                  <a:schemeClr val="dk1"/>
-                </a:solidFill>
-                <a:effectLst/>
-                <a:uFillTx/>
-                <a:latin typeface="Calibri"/>
-              </a:rPr>
-              <a:t>Cinquième niveau</a:t>
-            </a:r>
-            <a:endParaRPr lang="fr-FR" sz="1800" b="0" u="none" strike="noStrike">
-              <a:solidFill>
-                <a:schemeClr val="dk1"/>
-              </a:solidFill>
-              <a:effectLst/>
-              <a:uFillTx/>
-              <a:latin typeface="Calibri"/>
-            </a:endParaRPr>
-          </a:p>
-        </p:txBody>
-      </p:sp>
-      <p:sp>
-        <p:nvSpPr>
-          <p:cNvPr id="35" name="PlaceHolder 4"/>
-          <p:cNvSpPr>
-            <a:spLocks noGrp="1"/>
-          </p:cNvSpPr>
-          <p:nvPr>
-            <p:ph type="body"/>
-          </p:nvPr>
-        </p:nvSpPr>
-        <p:spPr>
-          <a:xfrm>
-            <a:off x="6172200" y="1681200"/>
-            <a:ext cx="5182920" cy="823680"/>
-          </a:xfrm>
-          <a:prstGeom prst="rect">
-            <a:avLst/>
-          </a:prstGeom>
-          <a:noFill/>
-          <a:ln w="0">
-            <a:noFill/>
-          </a:ln>
-        </p:spPr>
-        <p:txBody>
-          <a:bodyPr lIns="91440" rIns="91440" tIns="45720" bIns="45720" anchor="b">
-            <a:noAutofit/>
-          </a:bodyPr>
-          <a:p>
-            <a:pPr indent="0" defTabSz="914400">
-              <a:lnSpc>
-                <a:spcPct val="90000"/>
-              </a:lnSpc>
-              <a:spcBef>
-                <a:spcPts val="1001"/>
-              </a:spcBef>
-              <a:buNone/>
-              <a:tabLst>
-                <a:tab algn="l" pos="0"/>
-              </a:tabLst>
-            </a:pPr>
-            <a:r>
-              <a:rPr lang="fr-FR" sz="2400" b="1" u="none" strike="noStrike">
-                <a:solidFill>
-                  <a:schemeClr val="dk1"/>
-                </a:solidFill>
-                <a:effectLst/>
-                <a:uFillTx/>
-                <a:latin typeface="Calibri"/>
-              </a:rPr>
-              <a:t>Modifier les styles du texte du masque</a:t>
-            </a:r>
-            <a:endParaRPr lang="fr-FR" sz="2400" b="0" u="none" strike="noStrike">
-              <a:solidFill>
-                <a:schemeClr val="dk1"/>
-              </a:solidFill>
-              <a:effectLst/>
-              <a:uFillTx/>
-              <a:latin typeface="Calibri"/>
-            </a:endParaRPr>
-          </a:p>
-        </p:txBody>
-      </p:sp>
-      <p:sp>
-        <p:nvSpPr>
-          <p:cNvPr id="36" name="PlaceHolder 5"/>
-          <p:cNvSpPr>
-            <a:spLocks noGrp="1"/>
-          </p:cNvSpPr>
-          <p:nvPr>
-            <p:ph type="body"/>
-          </p:nvPr>
-        </p:nvSpPr>
-        <p:spPr>
-          <a:xfrm>
-            <a:off x="6172200" y="2505240"/>
-            <a:ext cx="5182920" cy="3684240"/>
-          </a:xfrm>
-          <a:prstGeom prst="rect">
-            <a:avLst/>
-          </a:prstGeom>
-          <a:noFill/>
-          <a:ln w="0">
-            <a:noFill/>
-          </a:ln>
-        </p:spPr>
-        <p:txBody>
-          <a:bodyPr lIns="91440" rIns="91440" tIns="45720" bIns="45720" anchor="t">
-            <a:noAutofit/>
-          </a:bodyPr>
-          <a:p>
-            <a:pPr marL="228600" indent="-228600" defTabSz="914400">
-              <a:lnSpc>
-                <a:spcPct val="90000"/>
-              </a:lnSpc>
-              <a:spcBef>
-                <a:spcPts val="1001"/>
-              </a:spcBef>
-              <a:buClr>
-                <a:srgbClr val="000000"/>
-              </a:buClr>
-              <a:buFont typeface="Arial"/>
-              <a:buChar char="•"/>
-            </a:pPr>
-            <a:r>
-              <a:rPr lang="fr-FR" sz="2800" b="0" u="none" strike="noStrike">
-                <a:solidFill>
-                  <a:schemeClr val="dk1"/>
-                </a:solidFill>
-                <a:effectLst/>
-                <a:uFillTx/>
-                <a:latin typeface="Calibri"/>
-              </a:rPr>
-              <a:t>Modifier les styles du texte du masque</a:t>
-            </a:r>
-            <a:endParaRPr lang="fr-FR" sz="2800" b="0" u="none" strike="noStrike">
-              <a:solidFill>
-                <a:schemeClr val="dk1"/>
-              </a:solidFill>
-              <a:effectLst/>
-              <a:uFillTx/>
-              <a:latin typeface="Calibri"/>
-            </a:endParaRPr>
-          </a:p>
-          <a:p>
-            <a:pPr marL="685800" lvl="1" indent="-228600" defTabSz="914400">
-              <a:lnSpc>
-                <a:spcPct val="90000"/>
-              </a:lnSpc>
-              <a:spcBef>
-                <a:spcPts val="499"/>
-              </a:spcBef>
-              <a:buClr>
-                <a:srgbClr val="000000"/>
-              </a:buClr>
-              <a:buFont typeface="Arial"/>
-              <a:buChar char="•"/>
-            </a:pPr>
-            <a:r>
-              <a:rPr lang="fr-FR" sz="2400" b="0" u="none" strike="noStrike">
-                <a:solidFill>
-                  <a:schemeClr val="dk1"/>
-                </a:solidFill>
-                <a:effectLst/>
-                <a:uFillTx/>
-                <a:latin typeface="Calibri"/>
-              </a:rPr>
-              <a:t>Deuxième niveau</a:t>
-            </a:r>
-            <a:endParaRPr lang="fr-FR" sz="2400" b="0" u="none" strike="noStrike">
-              <a:solidFill>
-                <a:schemeClr val="dk1"/>
-              </a:solidFill>
-              <a:effectLst/>
-              <a:uFillTx/>
-              <a:latin typeface="Calibri"/>
-            </a:endParaRPr>
-          </a:p>
-          <a:p>
-            <a:pPr marL="1143000" lvl="2" indent="-228600" defTabSz="914400">
-              <a:lnSpc>
-                <a:spcPct val="90000"/>
-              </a:lnSpc>
-              <a:spcBef>
-                <a:spcPts val="499"/>
-              </a:spcBef>
-              <a:buClr>
-                <a:srgbClr val="000000"/>
-              </a:buClr>
-              <a:buFont typeface="Arial"/>
-              <a:buChar char="•"/>
-            </a:pPr>
-            <a:r>
-              <a:rPr lang="fr-FR" sz="2000" b="0" u="none" strike="noStrike">
-                <a:solidFill>
-                  <a:schemeClr val="dk1"/>
-                </a:solidFill>
-                <a:effectLst/>
-                <a:uFillTx/>
-                <a:latin typeface="Calibri"/>
-              </a:rPr>
-              <a:t>Troisième niveau</a:t>
-            </a:r>
-            <a:endParaRPr lang="fr-FR" sz="2000" b="0" u="none" strike="noStrike">
-              <a:solidFill>
-                <a:schemeClr val="dk1"/>
-              </a:solidFill>
-              <a:effectLst/>
-              <a:uFillTx/>
-              <a:latin typeface="Calibri"/>
-            </a:endParaRPr>
-          </a:p>
-          <a:p>
-            <a:pPr marL="1600200" lvl="3" indent="-228600" defTabSz="914400">
-              <a:lnSpc>
-                <a:spcPct val="90000"/>
-              </a:lnSpc>
-              <a:spcBef>
-                <a:spcPts val="499"/>
-              </a:spcBef>
-              <a:buClr>
-                <a:srgbClr val="000000"/>
-              </a:buClr>
-              <a:buFont typeface="Arial"/>
-              <a:buChar char="•"/>
-            </a:pPr>
-            <a:r>
-              <a:rPr lang="fr-FR" sz="1800" b="0" u="none" strike="noStrike">
-                <a:solidFill>
-                  <a:schemeClr val="dk1"/>
-                </a:solidFill>
-                <a:effectLst/>
-                <a:uFillTx/>
-                <a:latin typeface="Calibri"/>
-              </a:rPr>
-              <a:t>Quatrième niveau</a:t>
-            </a:r>
-            <a:endParaRPr lang="fr-FR" sz="1800" b="0" u="none" strike="noStrike">
-              <a:solidFill>
-                <a:schemeClr val="dk1"/>
-              </a:solidFill>
-              <a:effectLst/>
-              <a:uFillTx/>
-              <a:latin typeface="Calibri"/>
-            </a:endParaRPr>
-          </a:p>
-          <a:p>
-            <a:pPr marL="2057400" lvl="4" indent="-228600" defTabSz="914400">
-              <a:lnSpc>
-                <a:spcPct val="90000"/>
-              </a:lnSpc>
-              <a:spcBef>
-                <a:spcPts val="499"/>
-              </a:spcBef>
-              <a:buClr>
-                <a:srgbClr val="000000"/>
-              </a:buClr>
-              <a:buFont typeface="Arial"/>
-              <a:buChar char="•"/>
-            </a:pPr>
-            <a:r>
-              <a:rPr lang="fr-FR" sz="1800" b="0" u="none" strike="noStrike">
-                <a:solidFill>
-                  <a:schemeClr val="dk1"/>
-                </a:solidFill>
-                <a:effectLst/>
-                <a:uFillTx/>
-                <a:latin typeface="Calibri"/>
-              </a:rPr>
-              <a:t>Cinquième niveau</a:t>
-            </a:r>
-            <a:endParaRPr lang="fr-FR" sz="1800" b="0" u="none" strike="noStrike">
-              <a:solidFill>
-                <a:schemeClr val="dk1"/>
-              </a:solidFill>
-              <a:effectLst/>
-              <a:uFillTx/>
-              <a:latin typeface="Calibri"/>
-            </a:endParaRPr>
-          </a:p>
-        </p:txBody>
-      </p:sp>
-      <p:sp>
-        <p:nvSpPr>
-          <p:cNvPr id="37" name="PlaceHolder 6"/>
-          <p:cNvSpPr>
-            <a:spLocks noGrp="1"/>
-          </p:cNvSpPr>
-          <p:nvPr>
-            <p:ph type="dt" idx="19"/>
-          </p:nvPr>
-        </p:nvSpPr>
-        <p:spPr>
-          <a:xfrm>
-            <a:off x="838080" y="6356520"/>
-            <a:ext cx="2742840" cy="364680"/>
-          </a:xfrm>
-          <a:prstGeom prst="rect">
-            <a:avLst/>
-          </a:prstGeom>
-          <a:noFill/>
-          <a:ln w="0">
-            <a:noFill/>
-          </a:ln>
-        </p:spPr>
-        <p:txBody>
-          <a:bodyPr lIns="91440" rIns="91440" tIns="45720" bIns="45720" anchor="ctr">
-            <a:noAutofit/>
-          </a:bodyPr>
-          <a:lstStyle>
-            <a:lvl1pPr indent="0" defTabSz="914400">
-              <a:lnSpc>
-                <a:spcPct val="100000"/>
-              </a:lnSpc>
-              <a:buNone/>
-              <a:defRPr lang="fr-FR" sz="1200" b="0" u="none" strike="noStrike">
-                <a:solidFill>
-                  <a:schemeClr val="dk1">
-                    <a:tint val="75000"/>
-                  </a:schemeClr>
-                </a:solidFill>
-                <a:effectLst/>
-                <a:uFillTx/>
-                <a:latin typeface="Calibri"/>
-              </a:defRPr>
-            </a:lvl1pPr>
-          </a:lstStyle>
-          <a:p>
-            <a:pPr indent="0" defTabSz="914400">
-              <a:lnSpc>
-                <a:spcPct val="100000"/>
-              </a:lnSpc>
-              <a:buNone/>
-            </a:pPr>
-            <a:r>
-              <a:rPr lang="fr-FR" sz="1200" b="0" u="none" strike="noStrike">
-                <a:solidFill>
-                  <a:schemeClr val="dk1">
-                    <a:tint val="75000"/>
-                  </a:schemeClr>
-                </a:solidFill>
-                <a:effectLst/>
-                <a:uFillTx/>
-                <a:latin typeface="Calibri"/>
-              </a:rPr>
-              <a:t>&lt;date/heure&gt;</a:t>
-            </a:r>
-            <a:endParaRPr lang="fr-FR" sz="1200" b="0" u="none" strike="noStrike">
-              <a:solidFill>
-                <a:srgbClr val="000000"/>
-              </a:solidFill>
-              <a:effectLst/>
-              <a:uFillTx/>
-              <a:latin typeface="Times New Roman"/>
-            </a:endParaRPr>
-          </a:p>
-        </p:txBody>
-      </p:sp>
-      <p:sp>
-        <p:nvSpPr>
-          <p:cNvPr id="38" name="PlaceHolder 7"/>
-          <p:cNvSpPr>
-            <a:spLocks noGrp="1"/>
-          </p:cNvSpPr>
-          <p:nvPr>
-            <p:ph type="ftr" idx="20"/>
-          </p:nvPr>
-        </p:nvSpPr>
-        <p:spPr>
-          <a:xfrm>
-            <a:off x="4038480" y="6356520"/>
-            <a:ext cx="4114440" cy="364680"/>
-          </a:xfrm>
-          <a:prstGeom prst="rect">
-            <a:avLst/>
-          </a:prstGeom>
-          <a:noFill/>
-          <a:ln w="0">
-            <a:noFill/>
-          </a:ln>
-        </p:spPr>
-        <p:txBody>
-          <a:bodyPr lIns="91440" rIns="91440" tIns="45720" bIns="45720" anchor="ctr">
-            <a:noAutofit/>
-          </a:bodyPr>
-          <a:lstStyle>
-            <a:lvl1pPr indent="0" algn="ctr">
-              <a:buNone/>
-              <a:defRPr lang="fr-FR" sz="1400" b="0" u="none" strike="noStrike">
-                <a:solidFill>
-                  <a:srgbClr val="000000"/>
-                </a:solidFill>
-                <a:effectLst/>
-                <a:uFillTx/>
-                <a:latin typeface="Times New Roman"/>
-              </a:defRPr>
-            </a:lvl1pPr>
-          </a:lstStyle>
-          <a:p>
-            <a:pPr indent="0" algn="ctr">
-              <a:buNone/>
-            </a:pPr>
-            <a:r>
-              <a:rPr lang="fr-FR" sz="1400" b="0" u="none" strike="noStrike">
-                <a:solidFill>
-                  <a:srgbClr val="000000"/>
-                </a:solidFill>
-                <a:effectLst/>
-                <a:uFillTx/>
-                <a:latin typeface="Times New Roman"/>
-              </a:rPr>
-              <a:t>&lt;pied de page&gt;</a:t>
-            </a:r>
-            <a:endParaRPr lang="fr-FR" sz="1400" b="0" u="none" strike="noStrike">
-              <a:solidFill>
-                <a:srgbClr val="000000"/>
-              </a:solidFill>
-              <a:effectLst/>
-              <a:uFillTx/>
-              <a:latin typeface="Times New Roman"/>
-            </a:endParaRPr>
-          </a:p>
-        </p:txBody>
-      </p:sp>
-      <p:sp>
-        <p:nvSpPr>
-          <p:cNvPr id="39" name="PlaceHolder 8"/>
-          <p:cNvSpPr>
-            <a:spLocks noGrp="1"/>
-          </p:cNvSpPr>
-          <p:nvPr>
-            <p:ph type="sldNum" idx="21"/>
-          </p:nvPr>
-        </p:nvSpPr>
-        <p:spPr>
-          <a:xfrm>
-            <a:off x="8610480" y="6356520"/>
-            <a:ext cx="2742840" cy="364680"/>
-          </a:xfrm>
-          <a:prstGeom prst="rect">
-            <a:avLst/>
-          </a:prstGeom>
-          <a:noFill/>
-          <a:ln w="0">
-            <a:noFill/>
-          </a:ln>
-        </p:spPr>
-        <p:txBody>
-          <a:bodyPr lIns="91440" rIns="91440" tIns="45720" bIns="45720" anchor="ctr">
-            <a:noAutofit/>
-          </a:bodyPr>
-          <a:lstStyle>
-            <a:lvl1pPr indent="0" algn="r" defTabSz="914400">
-              <a:lnSpc>
-                <a:spcPct val="100000"/>
-              </a:lnSpc>
-              <a:buNone/>
-              <a:defRPr lang="fr-FR" sz="1200" b="0" u="none" strike="noStrike">
-                <a:solidFill>
-                  <a:schemeClr val="dk1">
-                    <a:tint val="75000"/>
-                  </a:schemeClr>
-                </a:solidFill>
-                <a:effectLst/>
-                <a:uFillTx/>
-                <a:latin typeface="Calibri"/>
-              </a:defRPr>
-            </a:lvl1pPr>
-          </a:lstStyle>
-          <a:p>
-            <a:pPr indent="0" algn="r" defTabSz="914400">
-              <a:lnSpc>
-                <a:spcPct val="100000"/>
-              </a:lnSpc>
-              <a:buNone/>
-            </a:pPr>
-            <a:fld id="{535F3A41-EE9C-4A7C-9E35-BBF4A24FE4DF}" type="slidenum">
-              <a:rPr lang="fr-FR" sz="1200" b="0" u="none" strike="noStrike">
-                <a:solidFill>
-                  <a:schemeClr val="dk1">
-                    <a:tint val="75000"/>
-                  </a:schemeClr>
-                </a:solidFill>
-                <a:effectLst/>
-                <a:uFillTx/>
-                <a:latin typeface="Calibri"/>
-              </a:rPr>
-              <a:t>&lt;numéro&gt;</a:t>
-            </a:fld>
-            <a:endParaRPr lang="fr-FR" sz="1200" b="0" u="none" strike="noStrike">
-              <a:solidFill>
-                <a:srgbClr val="000000"/>
-              </a:solidFill>
-              <a:effectLst/>
-              <a:uFillTx/>
-              <a:latin typeface="Times New Roman"/>
-            </a:endParaRPr>
-          </a:p>
-        </p:txBody>
-      </p:sp>
-    </p:spTree>
-  </p:cSld>
-</p:sldLayout>
-</file>
-
-<file path=ppt/slideLayouts/slideLayout8.xml><?xml version="1.0" encoding="utf-8"?>
-<p:sldLayout xmlns:a="http://schemas.openxmlformats.org/drawingml/2006/main" xmlns:p="http://schemas.openxmlformats.org/presentationml/2006/main" xmlns:r="http://schemas.openxmlformats.org/officeDocument/2006/relationships" xmlns:p14="http://schemas.microsoft.com/office/powerpoint/2010/main" xmlns:p15="http://schemas.microsoft.com/office/powerpoint/2012/main" xmlns:mc="http://schemas.openxmlformats.org/markup-compatibility/2006" type="titleOnly" preserve="1">
-  <p:cSld name="Titre seul">
-    <p:bg>
-      <p:bgPr>
-        <a:blipFill rotWithShape="0">
-          <a:blip r:embed="rId2"/>
-          <a:stretch/>
-        </a:blipFill>
-      </p:bgPr>
-    </p:bg>
-    <p:spTree>
-      <p:nvGrpSpPr>
-        <p:cNvPr id="1" name=""/>
-        <p:cNvGrpSpPr/>
-        <p:nvPr/>
-      </p:nvGrpSpPr>
-      <p:grpSpPr>
-        <a:xfrm>
-          <a:off x="0" y="0"/>
-          <a:ext cx="0" cy="0"/>
-          <a:chOff x="0" y="0"/>
-          <a:chExt cx="0" cy="0"/>
-        </a:xfrm>
-      </p:grpSpPr>
-      <p:sp>
-        <p:nvSpPr>
-          <p:cNvPr id="40" name="PlaceHolder 1"/>
-          <p:cNvSpPr>
-            <a:spLocks noGrp="1"/>
-          </p:cNvSpPr>
-          <p:nvPr>
-            <p:ph type="title"/>
-          </p:nvPr>
-        </p:nvSpPr>
-        <p:spPr>
-          <a:xfrm>
-            <a:off x="838080" y="365040"/>
-            <a:ext cx="10515240" cy="1325160"/>
-          </a:xfrm>
-          <a:prstGeom prst="rect">
-            <a:avLst/>
-          </a:prstGeom>
-          <a:noFill/>
-          <a:ln w="0">
-            <a:noFill/>
-          </a:ln>
-        </p:spPr>
-        <p:txBody>
-          <a:bodyPr lIns="91440" rIns="91440" tIns="45720" bIns="45720" anchor="ctr">
-            <a:noAutofit/>
-          </a:bodyPr>
-          <a:p>
-            <a:pPr indent="0" defTabSz="914400">
-              <a:lnSpc>
-                <a:spcPct val="90000"/>
-              </a:lnSpc>
-              <a:buNone/>
-            </a:pPr>
-            <a:r>
-              <a:rPr lang="fr-FR" sz="4400" b="0" u="none" strike="noStrike">
-                <a:solidFill>
-                  <a:schemeClr val="dk1"/>
-                </a:solidFill>
-                <a:effectLst/>
-                <a:uFillTx/>
-                <a:latin typeface="Calibri Light"/>
-              </a:rPr>
-              <a:t>Modifiez le style du titre</a:t>
-            </a:r>
-            <a:endParaRPr lang="fr-FR" sz="4400" b="0" u="none" strike="noStrike">
-              <a:solidFill>
-                <a:schemeClr val="dk1"/>
-              </a:solidFill>
-              <a:effectLst/>
-              <a:uFillTx/>
-              <a:latin typeface="Calibri"/>
-            </a:endParaRPr>
-          </a:p>
-        </p:txBody>
-      </p:sp>
-      <p:sp>
-        <p:nvSpPr>
-          <p:cNvPr id="41" name="PlaceHolder 2"/>
-          <p:cNvSpPr>
-            <a:spLocks noGrp="1"/>
-          </p:cNvSpPr>
-          <p:nvPr>
-            <p:ph type="dt" idx="22"/>
-          </p:nvPr>
-        </p:nvSpPr>
-        <p:spPr>
-          <a:xfrm>
-            <a:off x="838080" y="6356520"/>
-            <a:ext cx="2742840" cy="364680"/>
-          </a:xfrm>
-          <a:prstGeom prst="rect">
-            <a:avLst/>
-          </a:prstGeom>
-          <a:noFill/>
-          <a:ln w="0">
-            <a:noFill/>
-          </a:ln>
-        </p:spPr>
-        <p:txBody>
-          <a:bodyPr lIns="91440" rIns="91440" tIns="45720" bIns="45720" anchor="ctr">
-            <a:noAutofit/>
-          </a:bodyPr>
-          <a:lstStyle>
-            <a:lvl1pPr indent="0" defTabSz="914400">
-              <a:lnSpc>
-                <a:spcPct val="100000"/>
-              </a:lnSpc>
-              <a:buNone/>
-              <a:defRPr lang="fr-FR" sz="1200" b="0" u="none" strike="noStrike">
-                <a:solidFill>
-                  <a:schemeClr val="dk1">
-                    <a:tint val="75000"/>
-                  </a:schemeClr>
-                </a:solidFill>
-                <a:effectLst/>
-                <a:uFillTx/>
-                <a:latin typeface="Calibri"/>
-              </a:defRPr>
-            </a:lvl1pPr>
-          </a:lstStyle>
-          <a:p>
-            <a:pPr indent="0" defTabSz="914400">
-              <a:lnSpc>
-                <a:spcPct val="100000"/>
-              </a:lnSpc>
-              <a:buNone/>
-            </a:pPr>
-            <a:r>
-              <a:rPr lang="fr-FR" sz="1200" b="0" u="none" strike="noStrike">
-                <a:solidFill>
-                  <a:schemeClr val="dk1">
-                    <a:tint val="75000"/>
-                  </a:schemeClr>
-                </a:solidFill>
-                <a:effectLst/>
-                <a:uFillTx/>
-                <a:latin typeface="Calibri"/>
-              </a:rPr>
-              <a:t>&lt;date/heure&gt;</a:t>
-            </a:r>
-            <a:endParaRPr lang="fr-FR" sz="1200" b="0" u="none" strike="noStrike">
-              <a:solidFill>
-                <a:srgbClr val="000000"/>
-              </a:solidFill>
-              <a:effectLst/>
-              <a:uFillTx/>
-              <a:latin typeface="Times New Roman"/>
-            </a:endParaRPr>
-          </a:p>
-        </p:txBody>
-      </p:sp>
-      <p:sp>
-        <p:nvSpPr>
-          <p:cNvPr id="42" name="PlaceHolder 3"/>
-          <p:cNvSpPr>
-            <a:spLocks noGrp="1"/>
-          </p:cNvSpPr>
-          <p:nvPr>
-            <p:ph type="ftr" idx="23"/>
-          </p:nvPr>
-        </p:nvSpPr>
-        <p:spPr>
-          <a:xfrm>
-            <a:off x="4038480" y="6356520"/>
-            <a:ext cx="4114440" cy="364680"/>
-          </a:xfrm>
-          <a:prstGeom prst="rect">
-            <a:avLst/>
-          </a:prstGeom>
-          <a:noFill/>
-          <a:ln w="0">
-            <a:noFill/>
-          </a:ln>
-        </p:spPr>
-        <p:txBody>
-          <a:bodyPr lIns="91440" rIns="91440" tIns="45720" bIns="45720" anchor="ctr">
-            <a:noAutofit/>
-          </a:bodyPr>
-          <a:lstStyle>
-            <a:lvl1pPr indent="0" algn="ctr">
-              <a:buNone/>
-              <a:defRPr lang="fr-FR" sz="1400" b="0" u="none" strike="noStrike">
-                <a:solidFill>
-                  <a:srgbClr val="000000"/>
-                </a:solidFill>
-                <a:effectLst/>
-                <a:uFillTx/>
-                <a:latin typeface="Times New Roman"/>
-              </a:defRPr>
-            </a:lvl1pPr>
-          </a:lstStyle>
-          <a:p>
-            <a:pPr indent="0" algn="ctr">
-              <a:buNone/>
-            </a:pPr>
-            <a:r>
-              <a:rPr lang="fr-FR" sz="1400" b="0" u="none" strike="noStrike">
-                <a:solidFill>
-                  <a:srgbClr val="000000"/>
-                </a:solidFill>
-                <a:effectLst/>
-                <a:uFillTx/>
-                <a:latin typeface="Times New Roman"/>
-              </a:rPr>
-              <a:t>&lt;pied de page&gt;</a:t>
-            </a:r>
-            <a:endParaRPr lang="fr-FR" sz="1400" b="0" u="none" strike="noStrike">
-              <a:solidFill>
-                <a:srgbClr val="000000"/>
-              </a:solidFill>
-              <a:effectLst/>
-              <a:uFillTx/>
-              <a:latin typeface="Times New Roman"/>
-            </a:endParaRPr>
-          </a:p>
-        </p:txBody>
-      </p:sp>
-      <p:sp>
-        <p:nvSpPr>
-          <p:cNvPr id="43" name="PlaceHolder 4"/>
-          <p:cNvSpPr>
-            <a:spLocks noGrp="1"/>
-          </p:cNvSpPr>
-          <p:nvPr>
-            <p:ph type="sldNum" idx="24"/>
-          </p:nvPr>
-        </p:nvSpPr>
-        <p:spPr>
-          <a:xfrm>
-            <a:off x="8610480" y="6356520"/>
-            <a:ext cx="2742840" cy="364680"/>
-          </a:xfrm>
-          <a:prstGeom prst="rect">
-            <a:avLst/>
-          </a:prstGeom>
-          <a:noFill/>
-          <a:ln w="0">
-            <a:noFill/>
-          </a:ln>
-        </p:spPr>
-        <p:txBody>
-          <a:bodyPr lIns="91440" rIns="91440" tIns="45720" bIns="45720" anchor="ctr">
-            <a:noAutofit/>
-          </a:bodyPr>
-          <a:lstStyle>
-            <a:lvl1pPr indent="0" algn="r" defTabSz="914400">
-              <a:lnSpc>
-                <a:spcPct val="100000"/>
-              </a:lnSpc>
-              <a:buNone/>
-              <a:defRPr lang="fr-FR" sz="1200" b="0" u="none" strike="noStrike">
-                <a:solidFill>
-                  <a:schemeClr val="dk1">
-                    <a:tint val="75000"/>
-                  </a:schemeClr>
-                </a:solidFill>
-                <a:effectLst/>
-                <a:uFillTx/>
-                <a:latin typeface="Calibri"/>
-              </a:defRPr>
-            </a:lvl1pPr>
-          </a:lstStyle>
-          <a:p>
-            <a:pPr indent="0" algn="r" defTabSz="914400">
-              <a:lnSpc>
-                <a:spcPct val="100000"/>
-              </a:lnSpc>
-              <a:buNone/>
-            </a:pPr>
-            <a:fld id="{EA15DF7C-C022-45BE-963E-34207DC0E7AD}" type="slidenum">
-              <a:rPr lang="fr-FR" sz="1200" b="0" u="none" strike="noStrike">
-                <a:solidFill>
-                  <a:schemeClr val="dk1">
-                    <a:tint val="75000"/>
-                  </a:schemeClr>
-                </a:solidFill>
-                <a:effectLst/>
-                <a:uFillTx/>
-                <a:latin typeface="Calibri"/>
-              </a:rPr>
-              <a:t>&lt;numéro&gt;</a:t>
-            </a:fld>
-            <a:endParaRPr lang="fr-FR" sz="1200" b="0" u="none" strike="noStrike">
-              <a:solidFill>
-                <a:srgbClr val="000000"/>
-              </a:solidFill>
-              <a:effectLst/>
-              <a:uFillTx/>
-              <a:latin typeface="Times New Roman"/>
-            </a:endParaRPr>
-          </a:p>
-        </p:txBody>
-      </p:sp>
-    </p:spTree>
-  </p:cSld>
-</p:sldLayout>
-</file>
-
-<file path=ppt/slideLayouts/slideLayout9.xml><?xml version="1.0" encoding="utf-8"?>
-<p:sldLayout xmlns:a="http://schemas.openxmlformats.org/drawingml/2006/main" xmlns:p="http://schemas.openxmlformats.org/presentationml/2006/main" xmlns:r="http://schemas.openxmlformats.org/officeDocument/2006/relationships" xmlns:p14="http://schemas.microsoft.com/office/powerpoint/2010/main" xmlns:p15="http://schemas.microsoft.com/office/powerpoint/2012/main" xmlns:mc="http://schemas.openxmlformats.org/markup-compatibility/2006" type="blank" preserve="1">
-  <p:cSld name="Vide">
-    <p:bg>
-      <p:bgPr>
-        <a:blipFill rotWithShape="0">
-          <a:blip r:embed="rId2"/>
-          <a:stretch/>
-        </a:blipFill>
-      </p:bgPr>
-    </p:bg>
-    <p:spTree>
-      <p:nvGrpSpPr>
-        <p:cNvPr id="1" name=""/>
-        <p:cNvGrpSpPr/>
-        <p:nvPr/>
-      </p:nvGrpSpPr>
-      <p:grpSpPr>
-        <a:xfrm>
-          <a:off x="0" y="0"/>
-          <a:ext cx="0" cy="0"/>
-          <a:chOff x="0" y="0"/>
-          <a:chExt cx="0" cy="0"/>
-        </a:xfrm>
-      </p:grpSpPr>
-      <p:sp>
-        <p:nvSpPr>
-          <p:cNvPr id="44" name="PlaceHolder 1"/>
+          <p:cNvPr id="46" name="PlaceHolder 4"/>
           <p:cNvSpPr>
             <a:spLocks noGrp="1"/>
           </p:cNvSpPr>
@@ -5780,7 +6174,7 @@
         <p:spPr>
           <a:xfrm>
             <a:off x="838080" y="6356520"/>
-            <a:ext cx="2742840" cy="364680"/>
+            <a:ext cx="2742480" cy="364320"/>
           </a:xfrm>
           <a:prstGeom prst="rect">
             <a:avLst/>
@@ -5800,6 +6194,9 @@
                 <a:spcPct val="100000"/>
               </a:lnSpc>
               <a:buNone/>
+              <a:tabLst>
+                <a:tab algn="l" pos="0"/>
+              </a:tabLst>
               <a:defRPr lang="fr-FR" sz="1200" b="0" u="none" strike="noStrike">
                 <a:solidFill>
                   <a:schemeClr val="dk1">
@@ -5818,6 +6215,9 @@
                 <a:spcPct val="100000"/>
               </a:lnSpc>
               <a:buNone/>
+              <a:tabLst>
+                <a:tab algn="l" pos="0"/>
+              </a:tabLst>
             </a:pPr>
             <a:r>
               <a:rPr lang="fr-FR" sz="1200" b="0" u="none" strike="noStrike">
@@ -5845,7 +6245,7 @@
       </p:sp>
       <p:sp>
         <p:nvSpPr>
-          <p:cNvPr id="45" name="PlaceHolder 2"/>
+          <p:cNvPr id="47" name="PlaceHolder 5"/>
           <p:cNvSpPr>
             <a:spLocks noGrp="1"/>
           </p:cNvSpPr>
@@ -5856,7 +6256,7 @@
         <p:spPr>
           <a:xfrm>
             <a:off x="4038480" y="6356520"/>
-            <a:ext cx="4114440" cy="364680"/>
+            <a:ext cx="4114080" cy="364320"/>
           </a:xfrm>
           <a:prstGeom prst="rect">
             <a:avLst/>
@@ -5872,7 +6272,13 @@
           </a:bodyPr>
           <a:lstStyle>
             <a:lvl1pPr indent="0" algn="ctr">
+              <a:lnSpc>
+                <a:spcPct val="100000"/>
+              </a:lnSpc>
               <a:buNone/>
+              <a:tabLst>
+                <a:tab algn="l" pos="0"/>
+              </a:tabLst>
               <a:defRPr lang="fr-FR" sz="1400" b="0" u="none" strike="noStrike">
                 <a:solidFill>
                   <a:srgbClr val="000000"/>
@@ -5885,7 +6291,13 @@
           </a:lstStyle>
           <a:p>
             <a:pPr indent="0" algn="ctr">
+              <a:lnSpc>
+                <a:spcPct val="100000"/>
+              </a:lnSpc>
               <a:buNone/>
+              <a:tabLst>
+                <a:tab algn="l" pos="0"/>
+              </a:tabLst>
             </a:pPr>
             <a:r>
               <a:rPr lang="fr-FR" sz="1400" b="0" u="none" strike="noStrike">
@@ -5911,7 +6323,7 @@
       </p:sp>
       <p:sp>
         <p:nvSpPr>
-          <p:cNvPr id="46" name="PlaceHolder 3"/>
+          <p:cNvPr id="48" name="PlaceHolder 6"/>
           <p:cNvSpPr>
             <a:spLocks noGrp="1"/>
           </p:cNvSpPr>
@@ -5922,7 +6334,7 @@
         <p:spPr>
           <a:xfrm>
             <a:off x="8610480" y="6356520"/>
-            <a:ext cx="2742840" cy="364680"/>
+            <a:ext cx="2742480" cy="364320"/>
           </a:xfrm>
           <a:prstGeom prst="rect">
             <a:avLst/>
@@ -5942,6 +6354,9 @@
                 <a:spcPct val="100000"/>
               </a:lnSpc>
               <a:buNone/>
+              <a:tabLst>
+                <a:tab algn="l" pos="0"/>
+              </a:tabLst>
               <a:defRPr lang="fr-FR" sz="1200" b="0" u="none" strike="noStrike">
                 <a:solidFill>
                   <a:schemeClr val="dk1">
@@ -5960,8 +6375,11 @@
                 <a:spcPct val="100000"/>
               </a:lnSpc>
               <a:buNone/>
-            </a:pPr>
-            <a:fld id="{F2E6D80A-1232-4A20-807D-148289028F5A}" type="slidenum">
+              <a:tabLst>
+                <a:tab algn="l" pos="0"/>
+              </a:tabLst>
+            </a:pPr>
+            <a:fld id="{1BCBB795-AB7F-4D68-AB5E-24240CA5DD70}" type="slidenum">
               <a:rPr lang="fr-FR" sz="1200" b="0" u="none" strike="noStrike">
                 <a:solidFill>
                   <a:schemeClr val="dk1">
@@ -5981,333 +6399,6 @@
               <a:effectLst/>
               <a:uFillTx/>
               <a:latin typeface="Times New Roman"/>
-            </a:endParaRPr>
-          </a:p>
-        </p:txBody>
-      </p:sp>
-      <p:sp>
-        <p:nvSpPr>
-          <p:cNvPr id="47" name="PlaceHolder 4"/>
-          <p:cNvSpPr>
-            <a:spLocks noGrp="1"/>
-          </p:cNvSpPr>
-          <p:nvPr>
-            <p:ph type="title"/>
-          </p:nvPr>
-        </p:nvSpPr>
-        <p:spPr>
-          <a:xfrm>
-            <a:off x="609480" y="273600"/>
-            <a:ext cx="10972440" cy="1144800"/>
-          </a:xfrm>
-          <a:prstGeom prst="rect">
-            <a:avLst/>
-          </a:prstGeom>
-          <a:noFill/>
-          <a:ln w="0">
-            <a:noFill/>
-          </a:ln>
-        </p:spPr>
-        <p:txBody>
-          <a:bodyPr lIns="0" rIns="0" tIns="0" bIns="0" anchor="ctr">
-            <a:noAutofit/>
-          </a:bodyPr>
-          <a:p>
-            <a:pPr indent="0">
-              <a:buNone/>
-            </a:pPr>
-            <a:r>
-              <a:rPr lang="fr-FR" sz="1800" b="0" u="none" strike="noStrike">
-                <a:solidFill>
-                  <a:schemeClr val="dk1"/>
-                </a:solidFill>
-                <a:effectLst/>
-                <a:uFillTx/>
-                <a:latin typeface="Calibri"/>
-              </a:rPr>
-              <a:t>Cliquez pour éditer le format du texte-titre</a:t>
-            </a:r>
-            <a:endParaRPr lang="fr-FR" sz="1800" b="0" u="none" strike="noStrike">
-              <a:solidFill>
-                <a:schemeClr val="dk1"/>
-              </a:solidFill>
-              <a:effectLst/>
-              <a:uFillTx/>
-              <a:latin typeface="Calibri"/>
-            </a:endParaRPr>
-          </a:p>
-        </p:txBody>
-      </p:sp>
-      <p:sp>
-        <p:nvSpPr>
-          <p:cNvPr id="48" name="PlaceHolder 5"/>
-          <p:cNvSpPr>
-            <a:spLocks noGrp="1"/>
-          </p:cNvSpPr>
-          <p:nvPr>
-            <p:ph type="body"/>
-          </p:nvPr>
-        </p:nvSpPr>
-        <p:spPr>
-          <a:xfrm>
-            <a:off x="609480" y="1604520"/>
-            <a:ext cx="10972440" cy="3977280"/>
-          </a:xfrm>
-          <a:prstGeom prst="rect">
-            <a:avLst/>
-          </a:prstGeom>
-          <a:noFill/>
-          <a:ln w="0">
-            <a:noFill/>
-          </a:ln>
-        </p:spPr>
-        <p:txBody>
-          <a:bodyPr lIns="0" rIns="0" tIns="0" bIns="0" anchor="t">
-            <a:normAutofit/>
-          </a:bodyPr>
-          <a:p>
-            <a:pPr marL="432000" indent="-324000">
-              <a:lnSpc>
-                <a:spcPct val="90000"/>
-              </a:lnSpc>
-              <a:spcBef>
-                <a:spcPts val="1417"/>
-              </a:spcBef>
-              <a:buClr>
-                <a:srgbClr val="000000"/>
-              </a:buClr>
-              <a:buSzPct val="45000"/>
-              <a:buFont typeface="Wingdings" charset="2"/>
-              <a:buChar char=""/>
-            </a:pPr>
-            <a:r>
-              <a:rPr lang="fr-FR" sz="2800" b="0" u="none" strike="noStrike">
-                <a:solidFill>
-                  <a:schemeClr val="dk1"/>
-                </a:solidFill>
-                <a:effectLst/>
-                <a:uFillTx/>
-                <a:latin typeface="Calibri"/>
-              </a:rPr>
-              <a:t>Cliquez pour éditer le format du plan de texte</a:t>
-            </a:r>
-            <a:endParaRPr lang="fr-FR" sz="2800" b="0" u="none" strike="noStrike">
-              <a:solidFill>
-                <a:schemeClr val="dk1"/>
-              </a:solidFill>
-              <a:effectLst/>
-              <a:uFillTx/>
-              <a:latin typeface="Calibri"/>
-            </a:endParaRPr>
-          </a:p>
-          <a:p>
-            <a:pPr marL="864000" lvl="1" indent="-324000">
-              <a:lnSpc>
-                <a:spcPct val="90000"/>
-              </a:lnSpc>
-              <a:spcBef>
-                <a:spcPts val="1134"/>
-              </a:spcBef>
-              <a:buClr>
-                <a:srgbClr val="000000"/>
-              </a:buClr>
-              <a:buSzPct val="75000"/>
-              <a:buFont typeface="Symbol" charset="2"/>
-              <a:buChar char=""/>
-            </a:pPr>
-            <a:r>
-              <a:rPr lang="fr-FR" sz="2000" b="0" u="none" strike="noStrike">
-                <a:solidFill>
-                  <a:schemeClr val="dk1"/>
-                </a:solidFill>
-                <a:effectLst/>
-                <a:uFillTx/>
-                <a:latin typeface="Calibri"/>
-              </a:rPr>
-              <a:t>Second niveau de plan</a:t>
-            </a:r>
-            <a:endParaRPr lang="fr-FR" sz="2000" b="0" u="none" strike="noStrike">
-              <a:solidFill>
-                <a:schemeClr val="dk1"/>
-              </a:solidFill>
-              <a:effectLst/>
-              <a:uFillTx/>
-              <a:latin typeface="Calibri"/>
-            </a:endParaRPr>
-          </a:p>
-          <a:p>
-            <a:pPr marL="1296000" lvl="2" indent="-288000">
-              <a:lnSpc>
-                <a:spcPct val="90000"/>
-              </a:lnSpc>
-              <a:spcBef>
-                <a:spcPts val="850"/>
-              </a:spcBef>
-              <a:buClr>
-                <a:srgbClr val="000000"/>
-              </a:buClr>
-              <a:buSzPct val="45000"/>
-              <a:buFont typeface="Wingdings" charset="2"/>
-              <a:buChar char=""/>
-            </a:pPr>
-            <a:r>
-              <a:rPr lang="fr-FR" sz="1800" b="0" u="none" strike="noStrike">
-                <a:solidFill>
-                  <a:schemeClr val="dk1"/>
-                </a:solidFill>
-                <a:effectLst/>
-                <a:uFillTx/>
-                <a:latin typeface="Calibri"/>
-              </a:rPr>
-              <a:t>Troisième niveau de plan</a:t>
-            </a:r>
-            <a:endParaRPr lang="fr-FR" sz="1800" b="0" u="none" strike="noStrike">
-              <a:solidFill>
-                <a:schemeClr val="dk1"/>
-              </a:solidFill>
-              <a:effectLst/>
-              <a:uFillTx/>
-              <a:latin typeface="Calibri"/>
-            </a:endParaRPr>
-          </a:p>
-          <a:p>
-            <a:pPr marL="1728000" lvl="3" indent="-216000">
-              <a:lnSpc>
-                <a:spcPct val="90000"/>
-              </a:lnSpc>
-              <a:spcBef>
-                <a:spcPts val="567"/>
-              </a:spcBef>
-              <a:buClr>
-                <a:srgbClr val="000000"/>
-              </a:buClr>
-              <a:buSzPct val="75000"/>
-              <a:buFont typeface="Symbol" charset="2"/>
-              <a:buChar char=""/>
-            </a:pPr>
-            <a:r>
-              <a:rPr lang="fr-FR" sz="1800" b="0" u="none" strike="noStrike">
-                <a:solidFill>
-                  <a:schemeClr val="dk1"/>
-                </a:solidFill>
-                <a:effectLst/>
-                <a:uFillTx/>
-                <a:latin typeface="Calibri"/>
-              </a:rPr>
-              <a:t>Quatrième niveau de plan</a:t>
-            </a:r>
-            <a:endParaRPr lang="fr-FR" sz="1800" b="0" u="none" strike="noStrike">
-              <a:solidFill>
-                <a:schemeClr val="dk1"/>
-              </a:solidFill>
-              <a:effectLst/>
-              <a:uFillTx/>
-              <a:latin typeface="Calibri"/>
-            </a:endParaRPr>
-          </a:p>
-          <a:p>
-            <a:pPr marL="2160000" lvl="4" indent="-216000">
-              <a:lnSpc>
-                <a:spcPct val="90000"/>
-              </a:lnSpc>
-              <a:spcBef>
-                <a:spcPts val="283"/>
-              </a:spcBef>
-              <a:buClr>
-                <a:srgbClr val="000000"/>
-              </a:buClr>
-              <a:buSzPct val="45000"/>
-              <a:buFont typeface="Wingdings" charset="2"/>
-              <a:buChar char=""/>
-            </a:pPr>
-            <a:r>
-              <a:rPr lang="fr-FR" sz="2000" b="0" u="none" strike="noStrike">
-                <a:solidFill>
-                  <a:schemeClr val="dk1"/>
-                </a:solidFill>
-                <a:effectLst/>
-                <a:uFillTx/>
-                <a:latin typeface="Calibri"/>
-              </a:rPr>
-              <a:t>Cinquième niveau de plan</a:t>
-            </a:r>
-            <a:endParaRPr lang="fr-FR" sz="2000" b="0" u="none" strike="noStrike">
-              <a:solidFill>
-                <a:schemeClr val="dk1"/>
-              </a:solidFill>
-              <a:effectLst/>
-              <a:uFillTx/>
-              <a:latin typeface="Calibri"/>
-            </a:endParaRPr>
-          </a:p>
-          <a:p>
-            <a:pPr marL="2592000" lvl="5" indent="-216000">
-              <a:lnSpc>
-                <a:spcPct val="90000"/>
-              </a:lnSpc>
-              <a:spcBef>
-                <a:spcPts val="283"/>
-              </a:spcBef>
-              <a:buClr>
-                <a:srgbClr val="000000"/>
-              </a:buClr>
-              <a:buSzPct val="45000"/>
-              <a:buFont typeface="Wingdings" charset="2"/>
-              <a:buChar char=""/>
-            </a:pPr>
-            <a:r>
-              <a:rPr lang="fr-FR" sz="2000" b="0" u="none" strike="noStrike">
-                <a:solidFill>
-                  <a:schemeClr val="dk1"/>
-                </a:solidFill>
-                <a:effectLst/>
-                <a:uFillTx/>
-                <a:latin typeface="Calibri"/>
-              </a:rPr>
-              <a:t>Sixième niveau de plan</a:t>
-            </a:r>
-            <a:endParaRPr lang="fr-FR" sz="2000" b="0" u="none" strike="noStrike">
-              <a:solidFill>
-                <a:schemeClr val="dk1"/>
-              </a:solidFill>
-              <a:effectLst/>
-              <a:uFillTx/>
-              <a:latin typeface="Calibri"/>
-            </a:endParaRPr>
-          </a:p>
-          <a:p>
-            <a:pPr marL="3024000" lvl="6" indent="-216000">
-              <a:lnSpc>
-                <a:spcPct val="90000"/>
-              </a:lnSpc>
-              <a:spcBef>
-                <a:spcPts val="283"/>
-              </a:spcBef>
-              <a:buClr>
-                <a:srgbClr val="000000"/>
-              </a:buClr>
-              <a:buSzPct val="45000"/>
-              <a:buFont typeface="Wingdings" charset="2"/>
-              <a:buChar char=""/>
-            </a:pPr>
-            <a:r>
-              <a:rPr lang="fr-FR" sz="2000" b="0" u="none" strike="noStrike">
-                <a:solidFill>
-                  <a:schemeClr val="dk1"/>
-                </a:solidFill>
-                <a:effectLst/>
-                <a:uFillTx/>
-                <a:latin typeface="Calibri"/>
-              </a:rPr>
-              <a:t>Septième niveau de plan</a:t>
-            </a:r>
-            <a:endParaRPr lang="fr-FR" sz="2000" b="0" u="none" strike="noStrike">
-              <a:solidFill>
-                <a:schemeClr val="dk1"/>
-              </a:solidFill>
-              <a:effectLst/>
-              <a:uFillTx/>
-              <a:latin typeface="Calibri"/>
             </a:endParaRPr>
           </a:p>
         </p:txBody>
@@ -6392,7 +6483,7 @@
         <p:spPr>
           <a:xfrm>
             <a:off x="0" y="0"/>
-            <a:ext cx="12191760" cy="6857640"/>
+            <a:ext cx="12191400" cy="6857280"/>
           </a:xfrm>
           <a:prstGeom prst="rect">
             <a:avLst/>
@@ -6445,7 +6536,7 @@
         <p:spPr>
           <a:xfrm>
             <a:off x="411480" y="987480"/>
-            <a:ext cx="4485600" cy="1087920"/>
+            <a:ext cx="4485240" cy="1087560"/>
           </a:xfrm>
           <a:prstGeom prst="rect">
             <a:avLst/>
@@ -6462,7 +6553,7 @@
           <a:fontRef idx="minor"/>
         </p:style>
         <p:txBody>
-          <a:bodyPr anchor="b">
+          <a:bodyPr lIns="90000" rIns="90000" tIns="45000" bIns="45000" anchor="b">
             <a:normAutofit/>
           </a:bodyPr>
           <a:p>
@@ -6510,8 +6601,8 @@
         </p:nvSpPr>
         <p:spPr>
           <a:xfrm rot="5400000">
-            <a:off x="649440" y="387720"/>
-            <a:ext cx="72720" cy="548280"/>
+            <a:off x="649800" y="387720"/>
+            <a:ext cx="72360" cy="547920"/>
           </a:xfrm>
           <a:prstGeom prst="rect">
             <a:avLst/>
@@ -6573,7 +6664,7 @@
         <p:spPr>
           <a:xfrm>
             <a:off x="411480" y="2286000"/>
-            <a:ext cx="4388760" cy="18000"/>
+            <a:ext cx="4388400" cy="17640"/>
           </a:xfrm>
           <a:prstGeom prst="rect">
             <a:avLst/>
@@ -6629,7 +6720,7 @@
         <p:spPr>
           <a:xfrm>
             <a:off x="411480" y="2688480"/>
-            <a:ext cx="4498560" cy="3584160"/>
+            <a:ext cx="4498200" cy="3583800"/>
           </a:xfrm>
           <a:prstGeom prst="rect">
             <a:avLst/>
@@ -6646,7 +6737,7 @@
           <a:fontRef idx="minor"/>
         </p:style>
         <p:txBody>
-          <a:bodyPr anchor="t">
+          <a:bodyPr lIns="90000" rIns="90000" tIns="45000" bIns="45000" anchor="t">
             <a:normAutofit/>
           </a:bodyPr>
           <a:p>
@@ -6718,15 +6809,15 @@
         <p:spPr>
           <a:xfrm>
             <a:off x="5308200" y="0"/>
-            <a:ext cx="6883560" cy="6857640"/>
+            <a:ext cx="6883200" cy="6857280"/>
           </a:xfrm>
           <a:custGeom>
             <a:avLst/>
             <a:gdLst>
-              <a:gd name="textAreaLeft" fmla="*/ 0 w 6883560"/>
-              <a:gd name="textAreaRight" fmla="*/ 6883920 w 6883560"/>
-              <a:gd name="textAreaTop" fmla="*/ 0 h 6857640"/>
-              <a:gd name="textAreaBottom" fmla="*/ 6858000 h 6857640"/>
+              <a:gd name="textAreaLeft" fmla="*/ 0 w 6883200"/>
+              <a:gd name="textAreaRight" fmla="*/ 6883920 w 6883200"/>
+              <a:gd name="textAreaTop" fmla="*/ 0 h 6857280"/>
+              <a:gd name="textAreaBottom" fmla="*/ 6858000 h 6857280"/>
             </a:gdLst>
             <a:ahLst/>
             <a:cxnLst/>
@@ -6790,6 +6881,11 @@
             <a:noAutofit/>
           </a:bodyPr>
           <a:p>
+            <a:pPr>
+              <a:lnSpc>
+                <a:spcPct val="100000"/>
+              </a:lnSpc>
+            </a:pPr>
             <a:endParaRPr lang="fr-FR" sz="1800" b="0" u="none" strike="noStrike">
               <a:solidFill>
                 <a:srgbClr val="000000"/>
@@ -6815,7 +6911,7 @@
         <p:spPr>
           <a:xfrm>
             <a:off x="710280" y="5710320"/>
-            <a:ext cx="3798000" cy="837360"/>
+            <a:ext cx="3797640" cy="837000"/>
           </a:xfrm>
           <a:prstGeom prst="rect">
             <a:avLst/>
@@ -6865,7 +6961,7 @@
         <p:spPr>
           <a:xfrm>
             <a:off x="-720" y="2247480"/>
-            <a:ext cx="2890440" cy="645840"/>
+            <a:ext cx="2890080" cy="645480"/>
           </a:xfrm>
           <a:prstGeom prst="rect">
             <a:avLst/>
@@ -6882,7 +6978,7 @@
           <a:fontRef idx="minor"/>
         </p:style>
         <p:txBody>
-          <a:bodyPr anchor="t">
+          <a:bodyPr lIns="90000" rIns="90000" tIns="45000" bIns="45000" anchor="t">
             <a:spAutoFit/>
           </a:bodyPr>
           <a:p>
@@ -6923,7 +7019,7 @@
         <p:spPr>
           <a:xfrm>
             <a:off x="5407920" y="152280"/>
-            <a:ext cx="6518520" cy="830520"/>
+            <a:ext cx="6518160" cy="830160"/>
           </a:xfrm>
           <a:prstGeom prst="rect">
             <a:avLst/>
@@ -6940,7 +7036,7 @@
           <a:fontRef idx="minor"/>
         </p:style>
         <p:txBody>
-          <a:bodyPr anchor="t">
+          <a:bodyPr lIns="90000" rIns="90000" tIns="45000" bIns="45000" anchor="t">
             <a:spAutoFit/>
           </a:bodyPr>
           <a:p>
@@ -6980,7 +7076,7 @@
         <p:spPr>
           <a:xfrm>
             <a:off x="3208320" y="2247480"/>
-            <a:ext cx="2890440" cy="645840"/>
+            <a:ext cx="2890080" cy="645480"/>
           </a:xfrm>
           <a:prstGeom prst="rect">
             <a:avLst/>
@@ -6997,7 +7093,7 @@
           <a:fontRef idx="minor"/>
         </p:style>
         <p:txBody>
-          <a:bodyPr anchor="t">
+          <a:bodyPr lIns="90000" rIns="90000" tIns="45000" bIns="45000" anchor="t">
             <a:spAutoFit/>
           </a:bodyPr>
           <a:p>
@@ -7038,7 +7134,7 @@
         <p:spPr>
           <a:xfrm>
             <a:off x="6252120" y="2181240"/>
-            <a:ext cx="2890440" cy="645840"/>
+            <a:ext cx="2890080" cy="645480"/>
           </a:xfrm>
           <a:prstGeom prst="rect">
             <a:avLst/>
@@ -7055,7 +7151,7 @@
           <a:fontRef idx="minor"/>
         </p:style>
         <p:txBody>
-          <a:bodyPr anchor="t">
+          <a:bodyPr lIns="90000" rIns="90000" tIns="45000" bIns="45000" anchor="t">
             <a:spAutoFit/>
           </a:bodyPr>
           <a:p>
@@ -7100,7 +7196,7 @@
         <p:spPr>
           <a:xfrm>
             <a:off x="605160" y="3065040"/>
-            <a:ext cx="1678320" cy="1678320"/>
+            <a:ext cx="1677960" cy="1677960"/>
           </a:xfrm>
           <a:prstGeom prst="rect">
             <a:avLst/>
@@ -7124,7 +7220,7 @@
         <p:spPr>
           <a:xfrm>
             <a:off x="3726000" y="2906640"/>
-            <a:ext cx="1896120" cy="1711800"/>
+            <a:ext cx="1895760" cy="1711440"/>
           </a:xfrm>
           <a:prstGeom prst="rect">
             <a:avLst/>
@@ -7148,7 +7244,7 @@
         <p:spPr>
           <a:xfrm>
             <a:off x="6758640" y="3065040"/>
-            <a:ext cx="1678320" cy="1678320"/>
+            <a:ext cx="1677960" cy="1677960"/>
           </a:xfrm>
           <a:prstGeom prst="rect">
             <a:avLst/>
@@ -7168,7 +7264,7 @@
         <p:spPr>
           <a:xfrm>
             <a:off x="9299880" y="2247120"/>
-            <a:ext cx="2424240" cy="645840"/>
+            <a:ext cx="2423880" cy="645480"/>
           </a:xfrm>
           <a:prstGeom prst="rect">
             <a:avLst/>
@@ -7185,7 +7281,7 @@
           <a:fontRef idx="minor"/>
         </p:style>
         <p:txBody>
-          <a:bodyPr numCol="1" spcCol="0" horzOverflow="overflow" anchor="t">
+          <a:bodyPr numCol="1" spcCol="0" horzOverflow="overflow" lIns="90000" rIns="90000" tIns="45000" bIns="45000" anchor="t">
             <a:spAutoFit/>
           </a:bodyPr>
           <a:p>
@@ -7230,7 +7326,7 @@
         <p:spPr>
           <a:xfrm>
             <a:off x="9839520" y="3065040"/>
-            <a:ext cx="1678320" cy="1678320"/>
+            <a:ext cx="1677960" cy="1677960"/>
           </a:xfrm>
           <a:prstGeom prst="rect">
             <a:avLst/>
@@ -7250,7 +7346,7 @@
         <p:spPr>
           <a:xfrm>
             <a:off x="6252120" y="1716840"/>
-            <a:ext cx="2894040" cy="3912120"/>
+            <a:ext cx="2893680" cy="3911760"/>
           </a:xfrm>
           <a:prstGeom prst="rect">
             <a:avLst/>
@@ -7334,7 +7430,7 @@
         <p:spPr>
           <a:xfrm>
             <a:off x="5045040" y="267120"/>
-            <a:ext cx="7413480" cy="1384560"/>
+            <a:ext cx="7413120" cy="1384200"/>
           </a:xfrm>
           <a:prstGeom prst="rect">
             <a:avLst/>
@@ -7351,7 +7447,7 @@
           <a:fontRef idx="minor"/>
         </p:style>
         <p:txBody>
-          <a:bodyPr anchor="t">
+          <a:bodyPr lIns="90000" rIns="90000" tIns="45000" bIns="45000" anchor="t">
             <a:spAutoFit/>
           </a:bodyPr>
           <a:p>
@@ -7435,7 +7531,7 @@
         <p:spPr>
           <a:xfrm>
             <a:off x="1024200" y="1365480"/>
-            <a:ext cx="3692160" cy="3009600"/>
+            <a:ext cx="3691800" cy="3009240"/>
           </a:xfrm>
           <a:prstGeom prst="rect">
             <a:avLst/>
@@ -7459,7 +7555,7 @@
         <p:spPr>
           <a:xfrm>
             <a:off x="6672240" y="1369440"/>
-            <a:ext cx="3888720" cy="2991240"/>
+            <a:ext cx="3888360" cy="2990880"/>
           </a:xfrm>
           <a:prstGeom prst="rect">
             <a:avLst/>
@@ -7483,7 +7579,7 @@
         <p:spPr>
           <a:xfrm>
             <a:off x="1024920" y="4586760"/>
-            <a:ext cx="3586320" cy="2172960"/>
+            <a:ext cx="3585960" cy="2172600"/>
           </a:xfrm>
           <a:prstGeom prst="rect">
             <a:avLst/>
@@ -7507,7 +7603,7 @@
         <p:spPr>
           <a:xfrm>
             <a:off x="6672240" y="4465800"/>
-            <a:ext cx="3721680" cy="2393640"/>
+            <a:ext cx="3721320" cy="2393280"/>
           </a:xfrm>
           <a:prstGeom prst="rect">
             <a:avLst/>
@@ -7557,7 +7653,7 @@
         <p:spPr>
           <a:xfrm>
             <a:off x="5045040" y="267120"/>
-            <a:ext cx="7413480" cy="1384560"/>
+            <a:ext cx="7413120" cy="1384200"/>
           </a:xfrm>
           <a:prstGeom prst="rect">
             <a:avLst/>
@@ -7574,7 +7670,7 @@
           <a:fontRef idx="minor"/>
         </p:style>
         <p:txBody>
-          <a:bodyPr anchor="t">
+          <a:bodyPr lIns="90000" rIns="90000" tIns="45000" bIns="45000" anchor="t">
             <a:spAutoFit/>
           </a:bodyPr>
           <a:p>
@@ -7658,7 +7754,7 @@
         <p:spPr>
           <a:xfrm>
             <a:off x="1045080" y="1292400"/>
-            <a:ext cx="3566880" cy="2863440"/>
+            <a:ext cx="3566520" cy="2863080"/>
           </a:xfrm>
           <a:prstGeom prst="rect">
             <a:avLst/>
@@ -7682,7 +7778,7 @@
         <p:spPr>
           <a:xfrm>
             <a:off x="6513840" y="1296360"/>
-            <a:ext cx="3715200" cy="2646720"/>
+            <a:ext cx="3714840" cy="2646360"/>
           </a:xfrm>
           <a:prstGeom prst="rect">
             <a:avLst/>
@@ -7706,7 +7802,7 @@
         <p:spPr>
           <a:xfrm>
             <a:off x="1044720" y="4508640"/>
-            <a:ext cx="3567600" cy="2297160"/>
+            <a:ext cx="3567240" cy="2296800"/>
           </a:xfrm>
           <a:prstGeom prst="rect">
             <a:avLst/>
@@ -7730,7 +7826,7 @@
         <p:spPr>
           <a:xfrm>
             <a:off x="6664680" y="4225680"/>
-            <a:ext cx="3559680" cy="2633760"/>
+            <a:ext cx="3559320" cy="2633400"/>
           </a:xfrm>
           <a:prstGeom prst="rect">
             <a:avLst/>
@@ -7780,7 +7876,7 @@
         <p:spPr>
           <a:xfrm>
             <a:off x="5045040" y="267120"/>
-            <a:ext cx="7413480" cy="1384560"/>
+            <a:ext cx="7413120" cy="1384200"/>
           </a:xfrm>
           <a:prstGeom prst="rect">
             <a:avLst/>
@@ -7797,7 +7893,7 @@
           <a:fontRef idx="minor"/>
         </p:style>
         <p:txBody>
-          <a:bodyPr anchor="t">
+          <a:bodyPr lIns="90000" rIns="90000" tIns="45000" bIns="45000" anchor="t">
             <a:spAutoFit/>
           </a:bodyPr>
           <a:p>
@@ -7881,7 +7977,7 @@
         <p:spPr>
           <a:xfrm>
             <a:off x="1050120" y="1293840"/>
-            <a:ext cx="3580560" cy="2734560"/>
+            <a:ext cx="3580200" cy="2734200"/>
           </a:xfrm>
           <a:prstGeom prst="rect">
             <a:avLst/>
@@ -7905,7 +8001,7 @@
         <p:spPr>
           <a:xfrm>
             <a:off x="6858360" y="1282320"/>
-            <a:ext cx="3584880" cy="2735640"/>
+            <a:ext cx="3584520" cy="2735280"/>
           </a:xfrm>
           <a:prstGeom prst="rect">
             <a:avLst/>
@@ -7929,7 +8025,7 @@
         <p:spPr>
           <a:xfrm>
             <a:off x="1092960" y="4096800"/>
-            <a:ext cx="3539520" cy="2765160"/>
+            <a:ext cx="3539160" cy="2764800"/>
           </a:xfrm>
           <a:prstGeom prst="rect">
             <a:avLst/>
@@ -7953,7 +8049,7 @@
         <p:spPr>
           <a:xfrm>
             <a:off x="6959160" y="4218840"/>
-            <a:ext cx="3584880" cy="2633760"/>
+            <a:ext cx="3584520" cy="2633400"/>
           </a:xfrm>
           <a:prstGeom prst="rect">
             <a:avLst/>
@@ -8016,7 +8112,7 @@
         <p:spPr>
           <a:xfrm>
             <a:off x="638280" y="0"/>
-            <a:ext cx="3247560" cy="3400200"/>
+            <a:ext cx="3247200" cy="3399840"/>
           </a:xfrm>
           <a:prstGeom prst="flowChartDocument">
             <a:avLst/>
@@ -8072,7 +8168,7 @@
         <p:spPr>
           <a:xfrm>
             <a:off x="838080" y="171000"/>
-            <a:ext cx="2839680" cy="2370960"/>
+            <a:ext cx="2839320" cy="2370600"/>
           </a:xfrm>
           <a:prstGeom prst="rect">
             <a:avLst/>
@@ -8089,7 +8185,7 @@
           <a:fontRef idx="minor"/>
         </p:style>
         <p:txBody>
-          <a:bodyPr anchor="ctr">
+          <a:bodyPr lIns="90000" rIns="90000" tIns="45000" bIns="45000" anchor="ctr">
             <a:normAutofit/>
           </a:bodyPr>
           <a:p>
@@ -8166,7 +8262,7 @@
         <p:spPr>
           <a:xfrm>
             <a:off x="4857840" y="640080"/>
-            <a:ext cx="6047280" cy="5578560"/>
+            <a:ext cx="6046920" cy="5578200"/>
           </a:xfrm>
           <a:prstGeom prst="rect">
             <a:avLst/>
@@ -8186,7 +8282,7 @@
         <p:spPr>
           <a:xfrm>
             <a:off x="555480" y="3953160"/>
-            <a:ext cx="3250440" cy="923040"/>
+            <a:ext cx="3250080" cy="922680"/>
           </a:xfrm>
           <a:prstGeom prst="rect">
             <a:avLst/>
@@ -8203,7 +8299,7 @@
           <a:fontRef idx="minor"/>
         </p:style>
         <p:txBody>
-          <a:bodyPr numCol="1" spcCol="0" horzOverflow="overflow" anchor="t">
+          <a:bodyPr numCol="1" spcCol="0" horzOverflow="overflow" lIns="90000" rIns="90000" tIns="45000" bIns="45000" anchor="t">
             <a:spAutoFit/>
           </a:bodyPr>
           <a:p>
@@ -8278,7 +8374,7 @@
         <p:spPr>
           <a:xfrm>
             <a:off x="4955040" y="1293840"/>
-            <a:ext cx="6974640" cy="5427360"/>
+            <a:ext cx="6974280" cy="5427000"/>
           </a:xfrm>
           <a:prstGeom prst="rect">
             <a:avLst/>
@@ -8298,7 +8394,7 @@
         <p:spPr>
           <a:xfrm>
             <a:off x="5407920" y="152280"/>
-            <a:ext cx="6518520" cy="830520"/>
+            <a:ext cx="6518160" cy="830160"/>
           </a:xfrm>
           <a:prstGeom prst="rect">
             <a:avLst/>
@@ -8315,7 +8411,7 @@
           <a:fontRef idx="minor"/>
         </p:style>
         <p:txBody>
-          <a:bodyPr anchor="t">
+          <a:bodyPr lIns="90000" rIns="90000" tIns="45000" bIns="45000" anchor="t">
             <a:spAutoFit/>
           </a:bodyPr>
           <a:p>
@@ -8355,7 +8451,7 @@
         <p:spPr>
           <a:xfrm>
             <a:off x="163440" y="2515680"/>
-            <a:ext cx="4197960" cy="923040"/>
+            <a:ext cx="4197600" cy="922680"/>
           </a:xfrm>
           <a:prstGeom prst="rect">
             <a:avLst/>
@@ -8372,7 +8468,7 @@
           <a:fontRef idx="minor"/>
         </p:style>
         <p:txBody>
-          <a:bodyPr numCol="1" spcCol="0" horzOverflow="overflow" anchor="t">
+          <a:bodyPr numCol="1" spcCol="0" horzOverflow="overflow" lIns="90000" rIns="90000" tIns="45000" bIns="45000" anchor="t">
             <a:spAutoFit/>
           </a:bodyPr>
           <a:p>
@@ -8443,7 +8539,7 @@
         <p:spPr>
           <a:xfrm>
             <a:off x="-720" y="2247480"/>
-            <a:ext cx="2890440" cy="645840"/>
+            <a:ext cx="2890080" cy="645480"/>
           </a:xfrm>
           <a:prstGeom prst="rect">
             <a:avLst/>
@@ -8460,7 +8556,7 @@
           <a:fontRef idx="minor"/>
         </p:style>
         <p:txBody>
-          <a:bodyPr anchor="t">
+          <a:bodyPr lIns="90000" rIns="90000" tIns="45000" bIns="45000" anchor="t">
             <a:spAutoFit/>
           </a:bodyPr>
           <a:p>
@@ -8501,7 +8597,7 @@
         <p:spPr>
           <a:xfrm>
             <a:off x="5407920" y="152280"/>
-            <a:ext cx="6518520" cy="830520"/>
+            <a:ext cx="6518160" cy="830160"/>
           </a:xfrm>
           <a:prstGeom prst="rect">
             <a:avLst/>
@@ -8518,7 +8614,7 @@
           <a:fontRef idx="minor"/>
         </p:style>
         <p:txBody>
-          <a:bodyPr anchor="t">
+          <a:bodyPr lIns="90000" rIns="90000" tIns="45000" bIns="45000" anchor="t">
             <a:spAutoFit/>
           </a:bodyPr>
           <a:p>
@@ -8558,7 +8654,7 @@
         <p:spPr>
           <a:xfrm>
             <a:off x="3208320" y="2247480"/>
-            <a:ext cx="2890440" cy="645840"/>
+            <a:ext cx="2890080" cy="645480"/>
           </a:xfrm>
           <a:prstGeom prst="rect">
             <a:avLst/>
@@ -8575,7 +8671,7 @@
           <a:fontRef idx="minor"/>
         </p:style>
         <p:txBody>
-          <a:bodyPr anchor="t">
+          <a:bodyPr lIns="90000" rIns="90000" tIns="45000" bIns="45000" anchor="t">
             <a:spAutoFit/>
           </a:bodyPr>
           <a:p>
@@ -8616,7 +8712,7 @@
         <p:spPr>
           <a:xfrm>
             <a:off x="6252120" y="2181240"/>
-            <a:ext cx="2890440" cy="645840"/>
+            <a:ext cx="2890080" cy="645480"/>
           </a:xfrm>
           <a:prstGeom prst="rect">
             <a:avLst/>
@@ -8633,7 +8729,7 @@
           <a:fontRef idx="minor"/>
         </p:style>
         <p:txBody>
-          <a:bodyPr anchor="t">
+          <a:bodyPr lIns="90000" rIns="90000" tIns="45000" bIns="45000" anchor="t">
             <a:spAutoFit/>
           </a:bodyPr>
           <a:p>
@@ -8678,7 +8774,7 @@
         <p:spPr>
           <a:xfrm>
             <a:off x="605160" y="3065040"/>
-            <a:ext cx="1678320" cy="1678320"/>
+            <a:ext cx="1677960" cy="1677960"/>
           </a:xfrm>
           <a:prstGeom prst="rect">
             <a:avLst/>
@@ -8702,7 +8798,7 @@
         <p:spPr>
           <a:xfrm>
             <a:off x="3726000" y="2906640"/>
-            <a:ext cx="1896120" cy="1711800"/>
+            <a:ext cx="1895760" cy="1711440"/>
           </a:xfrm>
           <a:prstGeom prst="rect">
             <a:avLst/>
@@ -8726,7 +8822,7 @@
         <p:spPr>
           <a:xfrm>
             <a:off x="6758640" y="3065040"/>
-            <a:ext cx="1678320" cy="1678320"/>
+            <a:ext cx="1677960" cy="1677960"/>
           </a:xfrm>
           <a:prstGeom prst="rect">
             <a:avLst/>
@@ -8746,7 +8842,7 @@
         <p:spPr>
           <a:xfrm>
             <a:off x="9299880" y="2247120"/>
-            <a:ext cx="2424240" cy="645840"/>
+            <a:ext cx="2423880" cy="645480"/>
           </a:xfrm>
           <a:prstGeom prst="rect">
             <a:avLst/>
@@ -8763,7 +8859,7 @@
           <a:fontRef idx="minor"/>
         </p:style>
         <p:txBody>
-          <a:bodyPr numCol="1" spcCol="0" horzOverflow="overflow" anchor="t">
+          <a:bodyPr numCol="1" spcCol="0" horzOverflow="overflow" lIns="90000" rIns="90000" tIns="45000" bIns="45000" anchor="t">
             <a:spAutoFit/>
           </a:bodyPr>
           <a:p>
@@ -8808,7 +8904,7 @@
         <p:spPr>
           <a:xfrm>
             <a:off x="9839520" y="3065040"/>
-            <a:ext cx="1678320" cy="1678320"/>
+            <a:ext cx="1677960" cy="1677960"/>
           </a:xfrm>
           <a:prstGeom prst="rect">
             <a:avLst/>
@@ -8828,7 +8924,7 @@
         <p:spPr>
           <a:xfrm>
             <a:off x="9384120" y="1623600"/>
-            <a:ext cx="2530080" cy="3912120"/>
+            <a:ext cx="2529720" cy="3911760"/>
           </a:xfrm>
           <a:prstGeom prst="rect">
             <a:avLst/>
@@ -8916,7 +9012,7 @@
         <p:spPr>
           <a:xfrm>
             <a:off x="838080" y="3426840"/>
-            <a:ext cx="10515240" cy="1325160"/>
+            <a:ext cx="10514880" cy="1324800"/>
           </a:xfrm>
           <a:prstGeom prst="rect">
             <a:avLst/>
@@ -8936,6 +9032,9 @@
                 <a:spcPct val="90000"/>
               </a:lnSpc>
               <a:buNone/>
+              <a:tabLst>
+                <a:tab algn="l" pos="0"/>
+              </a:tabLst>
             </a:pPr>
             <a:r>
               <a:rPr lang="en-US" sz="4400" b="1" u="none" strike="noStrike">
@@ -8951,11 +9050,11 @@
             </a:r>
             <a:endParaRPr lang="fr-FR" sz="4400" b="0" u="none" strike="noStrike">
               <a:solidFill>
-                <a:schemeClr val="dk1"/>
-              </a:solidFill>
-              <a:effectLst/>
-              <a:uFillTx/>
-              <a:latin typeface="Calibri"/>
+                <a:srgbClr val="000000"/>
+              </a:solidFill>
+              <a:effectLst/>
+              <a:uFillTx/>
+              <a:latin typeface="Arial"/>
             </a:endParaRPr>
           </a:p>
         </p:txBody>
@@ -9003,7 +9102,7 @@
         <p:spPr>
           <a:xfrm>
             <a:off x="301680" y="1285560"/>
-            <a:ext cx="11385000" cy="1030320"/>
+            <a:ext cx="11384640" cy="1029960"/>
           </a:xfrm>
           <a:prstGeom prst="rect">
             <a:avLst/>
@@ -9023,6 +9122,9 @@
                 <a:spcPct val="90000"/>
               </a:lnSpc>
               <a:buNone/>
+              <a:tabLst>
+                <a:tab algn="l" pos="0"/>
+              </a:tabLst>
             </a:pPr>
             <a:r>
               <a:rPr lang="en-US" sz="4400" b="1" u="none" strike="noStrike">
@@ -9038,11 +9140,11 @@
             </a:r>
             <a:endParaRPr lang="fr-FR" sz="4400" b="0" u="none" strike="noStrike">
               <a:solidFill>
-                <a:schemeClr val="dk1"/>
-              </a:solidFill>
-              <a:effectLst/>
-              <a:uFillTx/>
-              <a:latin typeface="Calibri"/>
+                <a:srgbClr val="000000"/>
+              </a:solidFill>
+              <a:effectLst/>
+              <a:uFillTx/>
+              <a:latin typeface="Arial"/>
             </a:endParaRPr>
           </a:p>
         </p:txBody>
@@ -9060,7 +9162,7 @@
         <p:spPr>
           <a:xfrm>
             <a:off x="824760" y="2309040"/>
-            <a:ext cx="10515240" cy="4350960"/>
+            <a:ext cx="10514880" cy="4350600"/>
           </a:xfrm>
           <a:prstGeom prst="rect">
             <a:avLst/>
@@ -9072,7 +9174,7 @@
         </p:spPr>
         <p:txBody>
           <a:bodyPr lIns="91440" rIns="91440" tIns="45720" bIns="45720" anchor="t">
-            <a:normAutofit fontScale="92500" lnSpcReduction="9999"/>
+            <a:normAutofit fontScale="85000" lnSpcReduction="19999"/>
           </a:bodyPr>
           <a:p>
             <a:pPr marL="228600" indent="-228600" defTabSz="914400">
@@ -9094,19 +9196,52 @@
                   <a:srgbClr val="404040"/>
                 </a:solidFill>
                 <a:effectLst/>
+                <a:highlight>
+                  <a:srgbClr val="ffff00"/>
+                </a:highlight>
                 <a:uFillTx/>
                 <a:latin typeface="Calibri"/>
                 <a:ea typeface="Calibri"/>
               </a:rPr>
-              <a:t>Décalage des séries pour voir les lags entre les données</a:t>
+              <a:t>Décalage temporel des séries pour voir les lags entre les données : visualisation de tendances entre chomage et autres VARIABLES + quantifier le lag : </a:t>
+            </a:r>
+            <a:r>
+              <a:rPr lang="de-DE" sz="1700" b="1" u="none" strike="noStrike">
+                <a:solidFill>
+                  <a:srgbClr val="404040"/>
+                </a:solidFill>
+                <a:effectLst/>
+                <a:highlight>
+                  <a:srgbClr val="ffff00"/>
+                </a:highlight>
+                <a:uFillTx/>
+                <a:latin typeface="Calibri"/>
+                <a:ea typeface="Calibri"/>
+              </a:rPr>
+              <a:t>Julien</a:t>
+            </a:r>
+            <a:r>
+              <a:rPr lang="de-DE" sz="1700" b="0" u="none" strike="noStrike">
+                <a:solidFill>
+                  <a:srgbClr val="404040"/>
+                </a:solidFill>
+                <a:effectLst/>
+                <a:highlight>
+                  <a:srgbClr val="ffff00"/>
+                </a:highlight>
+                <a:uFillTx/>
+                <a:latin typeface="Calibri"/>
+                <a:ea typeface="Calibri"/>
+              </a:rPr>
+              <a:t> </a:t>
             </a:r>
             <a:endParaRPr lang="fr-FR" sz="1700" b="0" u="none" strike="noStrike">
               <a:solidFill>
-                <a:schemeClr val="dk1"/>
-              </a:solidFill>
-              <a:effectLst/>
-              <a:uFillTx/>
-              <a:latin typeface="Calibri"/>
+                <a:srgbClr val="000000"/>
+              </a:solidFill>
+              <a:effectLst/>
+              <a:uFillTx/>
+              <a:latin typeface="Arial"/>
             </a:endParaRPr>
           </a:p>
           <a:p>
@@ -9129,19 +9264,52 @@
                   <a:srgbClr val="404040"/>
                 </a:solidFill>
                 <a:effectLst/>
+                <a:highlight>
+                  <a:srgbClr val="ffff00"/>
+                </a:highlight>
                 <a:uFillTx/>
                 <a:latin typeface="Calibri"/>
                 <a:ea typeface="Calibri"/>
               </a:rPr>
-              <a:t>Est-ce raisonnable de faire de l’analyse temporelle ? Probablement non</a:t>
+              <a:t>Mettre le taux de nombre d’offre à côté comme valeur et l’étudier à part dans sa période. Mais ne pas envisager l’imputation ou le filtrage de période car on perdra une grande partie des données : Variable nb_doffre_ft </a:t>
+            </a:r>
+            <a:r>
+              <a:rPr lang="de-DE" sz="1700" b="0" i="1" u="none" strike="noStrike">
+                <a:solidFill>
+                  <a:srgbClr val="404040"/>
+                </a:solidFill>
+                <a:effectLst/>
+                <a:highlight>
+                  <a:srgbClr val="ffff00"/>
+                </a:highlight>
+                <a:uFillTx/>
+                <a:latin typeface="Calibri"/>
+                <a:ea typeface="Calibri"/>
+              </a:rPr>
+              <a:t> : </a:t>
+            </a:r>
+            <a:r>
+              <a:rPr lang="de-DE" sz="1700" b="1" i="1" u="none" strike="noStrike">
+                <a:solidFill>
+                  <a:srgbClr val="404040"/>
+                </a:solidFill>
+                <a:effectLst/>
+                <a:highlight>
+                  <a:srgbClr val="ffff00"/>
+                </a:highlight>
+                <a:uFillTx/>
+                <a:latin typeface="Calibri"/>
+                <a:ea typeface="Calibri"/>
+              </a:rPr>
+              <a:t>Julien</a:t>
             </a:r>
             <a:endParaRPr lang="fr-FR" sz="1700" b="0" u="none" strike="noStrike">
               <a:solidFill>
-                <a:schemeClr val="dk1"/>
-              </a:solidFill>
-              <a:effectLst/>
-              <a:uFillTx/>
-              <a:latin typeface="Calibri"/>
+                <a:srgbClr val="000000"/>
+              </a:solidFill>
+              <a:effectLst/>
+              <a:uFillTx/>
+              <a:latin typeface="Arial"/>
             </a:endParaRPr>
           </a:p>
           <a:p>
@@ -9159,24 +9327,42 @@
               <a:buChar char="•"/>
             </a:pPr>
             <a:r>
-              <a:rPr lang="de-DE" sz="1700" b="0" u="none" strike="noStrike">
+              <a:rPr lang="de-DE" sz="1700" b="0" i="1" u="none" strike="noStrike">
                 <a:solidFill>
                   <a:srgbClr val="404040"/>
                 </a:solidFill>
                 <a:effectLst/>
+                <a:highlight>
+                  <a:srgbClr val="ffff00"/>
+                </a:highlight>
                 <a:uFillTx/>
                 <a:latin typeface="Calibri"/>
                 <a:ea typeface="Calibri"/>
               </a:rPr>
-              <a:t>Approche de sélection de variables</a:t>
+              <a:t>Transformation des indicateurs : lister les var et quelles transfo appliquer : </a:t>
+            </a:r>
+            <a:r>
+              <a:rPr lang="de-DE" sz="1700" b="1" i="1" u="none" strike="noStrike">
+                <a:solidFill>
+                  <a:srgbClr val="404040"/>
+                </a:solidFill>
+                <a:effectLst/>
+                <a:highlight>
+                  <a:srgbClr val="ffff00"/>
+                </a:highlight>
+                <a:uFillTx/>
+                <a:latin typeface="Calibri"/>
+                <a:ea typeface="Calibri"/>
+              </a:rPr>
+              <a:t>Julien</a:t>
             </a:r>
             <a:endParaRPr lang="fr-FR" sz="1700" b="0" u="none" strike="noStrike">
               <a:solidFill>
-                <a:schemeClr val="dk1"/>
-              </a:solidFill>
-              <a:effectLst/>
-              <a:uFillTx/>
-              <a:latin typeface="Calibri"/>
+                <a:srgbClr val="000000"/>
+              </a:solidFill>
+              <a:effectLst/>
+              <a:uFillTx/>
+              <a:latin typeface="Arial"/>
             </a:endParaRPr>
           </a:p>
           <a:p>
@@ -9207,11 +9393,11 @@
             </a:r>
             <a:endParaRPr lang="fr-FR" sz="1700" b="0" u="none" strike="noStrike">
               <a:solidFill>
-                <a:schemeClr val="dk1"/>
-              </a:solidFill>
-              <a:effectLst/>
-              <a:uFillTx/>
-              <a:latin typeface="Calibri"/>
+                <a:srgbClr val="000000"/>
+              </a:solidFill>
+              <a:effectLst/>
+              <a:uFillTx/>
+              <a:latin typeface="Arial"/>
             </a:endParaRPr>
           </a:p>
           <a:p>
@@ -9229,7 +9415,7 @@
               <a:buChar char="•"/>
             </a:pPr>
             <a:r>
-              <a:rPr lang="de-DE" sz="1700" b="0" u="none" strike="noStrike">
+              <a:rPr lang="de-DE" sz="1700" b="0" i="1" u="none" strike="noStrike">
                 <a:solidFill>
                   <a:srgbClr val="404040"/>
                 </a:solidFill>
@@ -9242,11 +9428,11 @@
             </a:r>
             <a:endParaRPr lang="fr-FR" sz="1700" b="0" u="none" strike="noStrike">
               <a:solidFill>
-                <a:schemeClr val="dk1"/>
-              </a:solidFill>
-              <a:effectLst/>
-              <a:uFillTx/>
-              <a:latin typeface="Calibri"/>
+                <a:srgbClr val="000000"/>
+              </a:solidFill>
+              <a:effectLst/>
+              <a:uFillTx/>
+              <a:latin typeface="Arial"/>
             </a:endParaRPr>
           </a:p>
           <a:p>
@@ -9264,7 +9450,7 @@
               <a:buChar char="•"/>
             </a:pPr>
             <a:r>
-              <a:rPr lang="de-DE" sz="1700" b="0" u="none" strike="noStrike">
+              <a:rPr lang="de-DE" sz="1700" b="0" i="1" u="none" strike="noStrike">
                 <a:solidFill>
                   <a:srgbClr val="404040"/>
                 </a:solidFill>
@@ -9273,15 +9459,15 @@
                 <a:latin typeface="Calibri"/>
                 <a:ea typeface="Calibri"/>
               </a:rPr>
-              <a:t>Indicateur en économie lié au taux de chômage</a:t>
+              <a:t>Est-ce raisonnable de faire de l’analyse temporelle ? Probablement non</a:t>
             </a:r>
             <a:endParaRPr lang="fr-FR" sz="1700" b="0" u="none" strike="noStrike">
               <a:solidFill>
-                <a:schemeClr val="dk1"/>
-              </a:solidFill>
-              <a:effectLst/>
-              <a:uFillTx/>
-              <a:latin typeface="Calibri"/>
+                <a:srgbClr val="000000"/>
+              </a:solidFill>
+              <a:effectLst/>
+              <a:uFillTx/>
+              <a:latin typeface="Arial"/>
             </a:endParaRPr>
           </a:p>
           <a:p>
@@ -9308,51 +9494,201 @@
                 <a:latin typeface="Calibri"/>
                 <a:ea typeface="Calibri"/>
               </a:rPr>
-              <a:t>Mettre le taux de nombre d’offre à côté comme valeur et l’étudier à part dans sa période. Mais ne pas envisager l’imputation ou le filtrage de période car on perdra une grande partie des données</a:t>
+              <a:t>Indicateur en économie lié au taux de chômage : IPC</a:t>
             </a:r>
             <a:endParaRPr lang="fr-FR" sz="1700" b="0" u="none" strike="noStrike">
               <a:solidFill>
-                <a:schemeClr val="dk1"/>
-              </a:solidFill>
-              <a:effectLst/>
-              <a:uFillTx/>
-              <a:latin typeface="Calibri"/>
-            </a:endParaRPr>
-          </a:p>
-          <a:p>
-            <a:pPr marL="864000" lvl="1" indent="-324000" defTabSz="914400">
-              <a:lnSpc>
-                <a:spcPct val="90000"/>
+                <a:srgbClr val="000000"/>
+              </a:solidFill>
+              <a:effectLst/>
+              <a:uFillTx/>
+              <a:latin typeface="Arial"/>
+            </a:endParaRPr>
+          </a:p>
+          <a:p>
+            <a:pPr marL="228600" indent="-228600" defTabSz="914400">
+              <a:lnSpc>
+                <a:spcPct val="100000"/>
               </a:lnSpc>
               <a:spcBef>
-                <a:spcPts val="1134"/>
+                <a:spcPts val="1001"/>
               </a:spcBef>
               <a:buClr>
-                <a:srgbClr val="000000"/>
+                <a:srgbClr val="404040"/>
               </a:buClr>
-              <a:buSzPct val="75000"/>
-              <a:buFont typeface="Symbol" charset="2"/>
-              <a:buChar char=""/>
-            </a:pPr>
+              <a:buFont typeface="Arial"/>
+              <a:buChar char="•"/>
+            </a:pPr>
+            <a:r>
+              <a:rPr lang="de-DE" sz="1700" b="0" i="1" u="none" strike="noStrike">
+                <a:solidFill>
+                  <a:srgbClr val="404040"/>
+                </a:solidFill>
+                <a:effectLst/>
+                <a:highlight>
+                  <a:srgbClr val="ffff00"/>
+                </a:highlight>
+                <a:uFillTx/>
+                <a:latin typeface="Calibri"/>
+                <a:ea typeface="Calibri"/>
+              </a:rPr>
+              <a:t>Finaliser l’ EDA ==&gt; </a:t>
+            </a:r>
+            <a:r>
+              <a:rPr lang="de-DE" sz="1700" b="1" i="1" u="none" strike="noStrike">
+                <a:solidFill>
+                  <a:srgbClr val="404040"/>
+                </a:solidFill>
+                <a:effectLst/>
+                <a:highlight>
+                  <a:srgbClr val="ffff00"/>
+                </a:highlight>
+                <a:uFillTx/>
+                <a:latin typeface="Calibri"/>
+                <a:ea typeface="Calibri"/>
+              </a:rPr>
+              <a:t>Jehovahni</a:t>
+            </a:r>
+            <a:endParaRPr lang="fr-FR" sz="1700" b="0" u="none" strike="noStrike">
+              <a:solidFill>
+                <a:srgbClr val="000000"/>
+              </a:solidFill>
+              <a:effectLst/>
+              <a:uFillTx/>
+              <a:latin typeface="Arial"/>
+            </a:endParaRPr>
+          </a:p>
+          <a:p>
+            <a:pPr marL="228600" indent="-228600" defTabSz="914400">
+              <a:lnSpc>
+                <a:spcPct val="100000"/>
+              </a:lnSpc>
+              <a:spcBef>
+                <a:spcPts val="1001"/>
+              </a:spcBef>
+              <a:buClr>
+                <a:srgbClr val="404040"/>
+              </a:buClr>
+              <a:buFont typeface="Arial"/>
+              <a:buChar char="•"/>
+            </a:pPr>
+            <a:r>
+              <a:rPr lang="de-DE" sz="1700" b="0" i="1" u="none" strike="noStrike">
+                <a:solidFill>
+                  <a:srgbClr val="404040"/>
+                </a:solidFill>
+                <a:effectLst/>
+                <a:highlight>
+                  <a:srgbClr val="ffff00"/>
+                </a:highlight>
+                <a:uFillTx/>
+                <a:latin typeface="Calibri"/>
+                <a:ea typeface="Calibri"/>
+              </a:rPr>
+              <a:t>Modelisation, </a:t>
+            </a:r>
             <a:r>
               <a:rPr lang="de-DE" sz="1700" b="0" u="none" strike="noStrike">
                 <a:solidFill>
                   <a:srgbClr val="404040"/>
                 </a:solidFill>
                 <a:effectLst/>
+                <a:highlight>
+                  <a:srgbClr val="ffff00"/>
+                </a:highlight>
                 <a:uFillTx/>
                 <a:latin typeface="Calibri"/>
                 <a:ea typeface="Calibri"/>
               </a:rPr>
+              <a:t>Sélection de variables, </a:t>
+            </a:r>
+            <a:r>
+              <a:rPr lang="de-DE" sz="1700" b="0" i="1" u="none" strike="noStrike">
+                <a:solidFill>
+                  <a:srgbClr val="404040"/>
+                </a:solidFill>
+                <a:effectLst/>
+                <a:highlight>
+                  <a:srgbClr val="ffff00"/>
+                </a:highlight>
+                <a:uFillTx/>
+                <a:latin typeface="Calibri"/>
+                <a:ea typeface="Calibri"/>
+              </a:rPr>
+              <a:t>Prediction, Evaluation des modeles </a:t>
+            </a:r>
+            <a:r>
+              <a:rPr lang="de-DE" sz="1700" b="0" u="none" strike="noStrike">
+                <a:solidFill>
+                  <a:srgbClr val="404040"/>
+                </a:solidFill>
+                <a:effectLst/>
+                <a:highlight>
+                  <a:srgbClr val="ffff00"/>
+                </a:highlight>
+                <a:uFillTx/>
+                <a:latin typeface="Calibri"/>
+                <a:ea typeface="Calibri"/>
+              </a:rPr>
+              <a:t>:</a:t>
+            </a:r>
+            <a:r>
+              <a:rPr lang="de-DE" sz="1700" b="1" u="none" strike="noStrike">
+                <a:solidFill>
+                  <a:srgbClr val="404040"/>
+                </a:solidFill>
+                <a:effectLst/>
+                <a:highlight>
+                  <a:srgbClr val="ffff00"/>
+                </a:highlight>
+                <a:uFillTx/>
+                <a:latin typeface="Calibri"/>
+                <a:ea typeface="Calibri"/>
+              </a:rPr>
+              <a:t>les 3 </a:t>
+            </a:r>
+            <a:endParaRPr lang="fr-FR" sz="1700" b="0" u="none" strike="noStrike">
+              <a:solidFill>
+                <a:srgbClr val="000000"/>
+              </a:solidFill>
+              <a:effectLst/>
+              <a:uFillTx/>
+              <a:latin typeface="Arial"/>
+            </a:endParaRPr>
+          </a:p>
+          <a:p>
+            <a:pPr marL="228600" indent="-228600" defTabSz="914400">
+              <a:lnSpc>
+                <a:spcPct val="100000"/>
+              </a:lnSpc>
+              <a:spcBef>
+                <a:spcPts val="1001"/>
+              </a:spcBef>
+              <a:buClr>
+                <a:srgbClr val="404040"/>
+              </a:buClr>
+              <a:buFont typeface="Arial"/>
+              <a:buChar char="•"/>
+            </a:pPr>
+            <a:r>
+              <a:rPr lang="de-DE" sz="1700" b="0" i="1" u="none" strike="noStrike">
+                <a:solidFill>
+                  <a:srgbClr val="404040"/>
+                </a:solidFill>
+                <a:effectLst/>
+                <a:uFillTx/>
+                <a:latin typeface="Calibri"/>
+                <a:ea typeface="Calibri"/>
+              </a:rPr>
               <a:t>Avoir une feuille PowerBI montrant toutes les corrélations dans la dataviz finale</a:t>
             </a:r>
             <a:endParaRPr lang="fr-FR" sz="1700" b="0" u="none" strike="noStrike">
               <a:solidFill>
-                <a:schemeClr val="dk1"/>
-              </a:solidFill>
-              <a:effectLst/>
-              <a:uFillTx/>
-              <a:latin typeface="Calibri"/>
+                <a:srgbClr val="000000"/>
+              </a:solidFill>
+              <a:effectLst/>
+              <a:uFillTx/>
+              <a:latin typeface="Arial"/>
             </a:endParaRPr>
           </a:p>
           <a:p>
@@ -9375,19 +9711,34 @@
                   <a:srgbClr val="404040"/>
                 </a:solidFill>
                 <a:effectLst/>
+                <a:highlight>
+                  <a:srgbClr val="ffff00"/>
+                </a:highlight>
                 <a:uFillTx/>
                 <a:latin typeface="Calibri"/>
                 <a:ea typeface="Calibri"/>
               </a:rPr>
-              <a:t>Lasso </a:t>
+              <a:t>Lasso</a:t>
+            </a:r>
+            <a:r>
+              <a:rPr lang="de-DE" sz="1700" b="0" u="none" strike="noStrike">
+                <a:solidFill>
+                  <a:srgbClr val="404040"/>
+                </a:solidFill>
+                <a:effectLst/>
+                <a:uFillTx/>
+                <a:latin typeface="Calibri"/>
+                <a:ea typeface="Calibri"/>
+              </a:rPr>
+              <a:t> </a:t>
             </a:r>
             <a:endParaRPr lang="fr-FR" sz="1700" b="0" u="none" strike="noStrike">
               <a:solidFill>
-                <a:schemeClr val="dk1"/>
-              </a:solidFill>
-              <a:effectLst/>
-              <a:uFillTx/>
-              <a:latin typeface="Calibri"/>
+                <a:srgbClr val="000000"/>
+              </a:solidFill>
+              <a:effectLst/>
+              <a:uFillTx/>
+              <a:latin typeface="Arial"/>
             </a:endParaRPr>
           </a:p>
           <a:p>
@@ -9414,15 +9765,15 @@
                 <a:latin typeface="Calibri"/>
                 <a:ea typeface="Calibri"/>
               </a:rPr>
-              <a:t>Variable nb_doffre_ft </a:t>
+              <a:t>Pour la présentation : Contexte, méthodes, sources, les choix réalisés ...</a:t>
             </a:r>
             <a:endParaRPr lang="fr-FR" sz="1700" b="0" u="none" strike="noStrike">
               <a:solidFill>
-                <a:schemeClr val="dk1"/>
-              </a:solidFill>
-              <a:effectLst/>
-              <a:uFillTx/>
-              <a:latin typeface="Calibri"/>
+                <a:srgbClr val="000000"/>
+              </a:solidFill>
+              <a:effectLst/>
+              <a:uFillTx/>
+              <a:latin typeface="Arial"/>
             </a:endParaRPr>
           </a:p>
           <a:p>
@@ -9445,54 +9796,22 @@
                   <a:srgbClr val="404040"/>
                 </a:solidFill>
                 <a:effectLst/>
+                <a:highlight>
+                  <a:srgbClr val="ffff00"/>
+                </a:highlight>
                 <a:uFillTx/>
                 <a:latin typeface="Calibri"/>
                 <a:ea typeface="Calibri"/>
               </a:rPr>
-              <a:t>Pour la présentation : Contexte, méthodes, sources, les choix réalisés ...</a:t>
+              <a:t>Avis expert métier : littérature</a:t>
             </a:r>
             <a:endParaRPr lang="fr-FR" sz="1700" b="0" u="none" strike="noStrike">
               <a:solidFill>
-                <a:schemeClr val="dk1"/>
-              </a:solidFill>
-              <a:effectLst/>
-              <a:uFillTx/>
-              <a:latin typeface="Calibri"/>
-            </a:endParaRPr>
-          </a:p>
-          <a:p>
-            <a:pPr marL="228600" indent="-228600" defTabSz="914400">
-              <a:lnSpc>
-                <a:spcPct val="90000"/>
-              </a:lnSpc>
-              <a:spcBef>
-                <a:spcPts val="1417"/>
-              </a:spcBef>
-              <a:buClr>
-                <a:srgbClr val="404040"/>
-              </a:buClr>
-              <a:buFont typeface="Arial"/>
-              <a:buChar char="•"/>
-            </a:pPr>
-            <a:r>
-              <a:rPr lang="de-DE" sz="1700" b="0" u="none" strike="noStrike">
-                <a:solidFill>
-                  <a:srgbClr val="404040"/>
-                </a:solidFill>
-                <a:effectLst/>
-                <a:uFillTx/>
-                <a:latin typeface="Calibri"/>
-                <a:ea typeface="Calibri"/>
-              </a:rPr>
-              <a:t>Avis expert métier</a:t>
-            </a:r>
-            <a:endParaRPr lang="fr-FR" sz="1700" b="0" u="none" strike="noStrike">
-              <a:solidFill>
-                <a:schemeClr val="dk1"/>
-              </a:solidFill>
-              <a:effectLst/>
-              <a:uFillTx/>
-              <a:latin typeface="Calibri"/>
+                <a:srgbClr val="000000"/>
+              </a:solidFill>
+              <a:effectLst/>
+              <a:uFillTx/>
+              <a:latin typeface="Arial"/>
             </a:endParaRPr>
           </a:p>
           <a:p>
@@ -9504,14 +9823,17 @@
                 <a:spcPts val="1001"/>
               </a:spcBef>
               <a:buNone/>
+              <a:tabLst>
+                <a:tab algn="l" pos="0"/>
+              </a:tabLst>
             </a:pPr>
             <a:endParaRPr lang="fr-FR" sz="2800" b="0" u="none" strike="noStrike">
               <a:solidFill>
-                <a:schemeClr val="dk1"/>
-              </a:solidFill>
-              <a:effectLst/>
-              <a:uFillTx/>
-              <a:latin typeface="Calibri"/>
+                <a:srgbClr val="000000"/>
+              </a:solidFill>
+              <a:effectLst/>
+              <a:uFillTx/>
+              <a:latin typeface="Arial"/>
             </a:endParaRPr>
           </a:p>
         </p:txBody>
@@ -9555,7 +9877,7 @@
         <p:spPr>
           <a:xfrm>
             <a:off x="603360" y="2291040"/>
-            <a:ext cx="10559520" cy="1938600"/>
+            <a:ext cx="10559160" cy="1938240"/>
           </a:xfrm>
           <a:prstGeom prst="rect">
             <a:avLst/>
@@ -9572,7 +9894,7 @@
           <a:fontRef idx="minor"/>
         </p:style>
         <p:txBody>
-          <a:bodyPr anchor="t">
+          <a:bodyPr lIns="90000" rIns="90000" tIns="45000" bIns="45000" anchor="t">
             <a:spAutoFit/>
           </a:bodyPr>
           <a:p>
@@ -9665,7 +9987,7 @@
         <p:spPr>
           <a:xfrm>
             <a:off x="3363120" y="263520"/>
-            <a:ext cx="8618400" cy="1199880"/>
+            <a:ext cx="8618040" cy="1199520"/>
           </a:xfrm>
           <a:prstGeom prst="rect">
             <a:avLst/>
@@ -9682,7 +10004,7 @@
           <a:fontRef idx="minor"/>
         </p:style>
         <p:txBody>
-          <a:bodyPr anchor="t">
+          <a:bodyPr lIns="90000" rIns="90000" tIns="45000" bIns="45000" anchor="t">
             <a:spAutoFit/>
           </a:bodyPr>
           <a:p>
@@ -9768,7 +10090,7 @@
         <p:spPr>
           <a:xfrm>
             <a:off x="-720" y="2247480"/>
-            <a:ext cx="2890440" cy="645840"/>
+            <a:ext cx="2890080" cy="645480"/>
           </a:xfrm>
           <a:prstGeom prst="rect">
             <a:avLst/>
@@ -9785,7 +10107,7 @@
           <a:fontRef idx="minor"/>
         </p:style>
         <p:txBody>
-          <a:bodyPr anchor="t">
+          <a:bodyPr lIns="90000" rIns="90000" tIns="45000" bIns="45000" anchor="t">
             <a:spAutoFit/>
           </a:bodyPr>
           <a:p>
@@ -9826,7 +10148,7 @@
         <p:spPr>
           <a:xfrm>
             <a:off x="5407920" y="152280"/>
-            <a:ext cx="6518520" cy="830520"/>
+            <a:ext cx="6518160" cy="830160"/>
           </a:xfrm>
           <a:prstGeom prst="rect">
             <a:avLst/>
@@ -9843,7 +10165,7 @@
           <a:fontRef idx="minor"/>
         </p:style>
         <p:txBody>
-          <a:bodyPr anchor="t">
+          <a:bodyPr lIns="90000" rIns="90000" tIns="45000" bIns="45000" anchor="t">
             <a:spAutoFit/>
           </a:bodyPr>
           <a:p>
@@ -9883,7 +10205,7 @@
         <p:spPr>
           <a:xfrm>
             <a:off x="3208320" y="2247480"/>
-            <a:ext cx="2890440" cy="645840"/>
+            <a:ext cx="2890080" cy="645480"/>
           </a:xfrm>
           <a:prstGeom prst="rect">
             <a:avLst/>
@@ -9900,7 +10222,7 @@
           <a:fontRef idx="minor"/>
         </p:style>
         <p:txBody>
-          <a:bodyPr anchor="t">
+          <a:bodyPr lIns="90000" rIns="90000" tIns="45000" bIns="45000" anchor="t">
             <a:spAutoFit/>
           </a:bodyPr>
           <a:p>
@@ -9941,7 +10263,7 @@
         <p:spPr>
           <a:xfrm>
             <a:off x="6252120" y="2181240"/>
-            <a:ext cx="2890440" cy="645840"/>
+            <a:ext cx="2890080" cy="645480"/>
           </a:xfrm>
           <a:prstGeom prst="rect">
             <a:avLst/>
@@ -9958,7 +10280,7 @@
           <a:fontRef idx="minor"/>
         </p:style>
         <p:txBody>
-          <a:bodyPr anchor="t">
+          <a:bodyPr lIns="90000" rIns="90000" tIns="45000" bIns="45000" anchor="t">
             <a:spAutoFit/>
           </a:bodyPr>
           <a:p>
@@ -10003,7 +10325,7 @@
         <p:spPr>
           <a:xfrm>
             <a:off x="605160" y="3065040"/>
-            <a:ext cx="1678320" cy="1678320"/>
+            <a:ext cx="1677960" cy="1677960"/>
           </a:xfrm>
           <a:prstGeom prst="rect">
             <a:avLst/>
@@ -10027,7 +10349,7 @@
         <p:spPr>
           <a:xfrm>
             <a:off x="3726000" y="2906640"/>
-            <a:ext cx="1896120" cy="1711800"/>
+            <a:ext cx="1895760" cy="1711440"/>
           </a:xfrm>
           <a:prstGeom prst="rect">
             <a:avLst/>
@@ -10051,7 +10373,7 @@
         <p:spPr>
           <a:xfrm>
             <a:off x="6758640" y="3065040"/>
-            <a:ext cx="1678320" cy="1678320"/>
+            <a:ext cx="1677960" cy="1677960"/>
           </a:xfrm>
           <a:prstGeom prst="rect">
             <a:avLst/>
@@ -10071,7 +10393,7 @@
         <p:spPr>
           <a:xfrm>
             <a:off x="9299880" y="2247120"/>
-            <a:ext cx="2424240" cy="645840"/>
+            <a:ext cx="2423880" cy="645480"/>
           </a:xfrm>
           <a:prstGeom prst="rect">
             <a:avLst/>
@@ -10088,7 +10410,7 @@
           <a:fontRef idx="minor"/>
         </p:style>
         <p:txBody>
-          <a:bodyPr numCol="1" spcCol="0" horzOverflow="overflow" anchor="t">
+          <a:bodyPr numCol="1" spcCol="0" horzOverflow="overflow" lIns="90000" rIns="90000" tIns="45000" bIns="45000" anchor="t">
             <a:spAutoFit/>
           </a:bodyPr>
           <a:p>
@@ -10133,7 +10455,7 @@
         <p:spPr>
           <a:xfrm>
             <a:off x="9839520" y="3065040"/>
-            <a:ext cx="1678320" cy="1678320"/>
+            <a:ext cx="1677960" cy="1677960"/>
           </a:xfrm>
           <a:prstGeom prst="rect">
             <a:avLst/>
@@ -10153,7 +10475,7 @@
         <p:spPr>
           <a:xfrm>
             <a:off x="3204360" y="1716840"/>
-            <a:ext cx="2894040" cy="3912120"/>
+            <a:ext cx="2893680" cy="3911760"/>
           </a:xfrm>
           <a:prstGeom prst="rect">
             <a:avLst/>
@@ -10237,7 +10559,7 @@
         <p:spPr>
           <a:xfrm>
             <a:off x="3468960" y="263520"/>
-            <a:ext cx="8618400" cy="1569240"/>
+            <a:ext cx="8618040" cy="1568880"/>
           </a:xfrm>
           <a:prstGeom prst="rect">
             <a:avLst/>
@@ -10254,7 +10576,7 @@
           <a:fontRef idx="minor"/>
         </p:style>
         <p:txBody>
-          <a:bodyPr anchor="t">
+          <a:bodyPr lIns="90000" rIns="90000" tIns="45000" bIns="45000" anchor="t">
             <a:spAutoFit/>
           </a:bodyPr>
           <a:p>
@@ -10325,7 +10647,7 @@
         <p:spPr>
           <a:xfrm>
             <a:off x="556920" y="1695960"/>
-            <a:ext cx="7960680" cy="369000"/>
+            <a:ext cx="7960320" cy="368640"/>
           </a:xfrm>
           <a:prstGeom prst="rect">
             <a:avLst/>
@@ -10414,7 +10736,7 @@
         <p:spPr>
           <a:xfrm>
             <a:off x="903960" y="3051720"/>
-            <a:ext cx="6758640" cy="3184560"/>
+            <a:ext cx="6758280" cy="3184200"/>
           </a:xfrm>
           <a:prstGeom prst="rect">
             <a:avLst/>
@@ -10434,7 +10756,7 @@
         <p:spPr>
           <a:xfrm>
             <a:off x="556920" y="2547720"/>
-            <a:ext cx="7960680" cy="369000"/>
+            <a:ext cx="7960320" cy="368640"/>
           </a:xfrm>
           <a:prstGeom prst="rect">
             <a:avLst/>
@@ -10526,7 +10848,7 @@
         <p:spPr>
           <a:xfrm>
             <a:off x="3468960" y="263520"/>
-            <a:ext cx="8618400" cy="1569240"/>
+            <a:ext cx="8618040" cy="1568880"/>
           </a:xfrm>
           <a:prstGeom prst="rect">
             <a:avLst/>
@@ -10543,7 +10865,7 @@
           <a:fontRef idx="minor"/>
         </p:style>
         <p:txBody>
-          <a:bodyPr anchor="t">
+          <a:bodyPr lIns="90000" rIns="90000" tIns="45000" bIns="45000" anchor="t">
             <a:spAutoFit/>
           </a:bodyPr>
           <a:p>
@@ -10618,7 +10940,7 @@
         <p:spPr>
           <a:xfrm>
             <a:off x="134640" y="3224880"/>
-            <a:ext cx="11926080" cy="3467880"/>
+            <a:ext cx="11925720" cy="3467520"/>
           </a:xfrm>
           <a:prstGeom prst="rect">
             <a:avLst/>
@@ -10640,7 +10962,7 @@
         <p:spPr>
           <a:xfrm>
             <a:off x="484920" y="1321200"/>
-            <a:ext cx="7960680" cy="1711080"/>
+            <a:ext cx="7960320" cy="1710720"/>
           </a:xfrm>
           <a:prstGeom prst="rect">
             <a:avLst/>
@@ -10820,7 +11142,7 @@
         <p:spPr>
           <a:xfrm>
             <a:off x="3468960" y="263520"/>
-            <a:ext cx="8618400" cy="1569240"/>
+            <a:ext cx="8618040" cy="1568880"/>
           </a:xfrm>
           <a:prstGeom prst="rect">
             <a:avLst/>
@@ -10837,7 +11159,7 @@
           <a:fontRef idx="minor"/>
         </p:style>
         <p:txBody>
-          <a:bodyPr anchor="t">
+          <a:bodyPr lIns="90000" rIns="90000" tIns="45000" bIns="45000" anchor="t">
             <a:spAutoFit/>
           </a:bodyPr>
           <a:p>
@@ -10908,7 +11230,7 @@
         <p:spPr>
           <a:xfrm>
             <a:off x="529920" y="1295280"/>
-            <a:ext cx="2847240" cy="464400"/>
+            <a:ext cx="2846880" cy="464040"/>
           </a:xfrm>
           <a:prstGeom prst="rect">
             <a:avLst/>
@@ -10970,7 +11292,7 @@
         <p:spPr>
           <a:xfrm>
             <a:off x="452520" y="1841760"/>
-            <a:ext cx="2976120" cy="605520"/>
+            <a:ext cx="2975760" cy="605160"/>
           </a:xfrm>
           <a:prstGeom prst="rect">
             <a:avLst/>
@@ -10978,7 +11300,7 @@
           <a:solidFill>
             <a:srgbClr val="ffffff"/>
           </a:solidFill>
-          <a:ln>
+          <a:ln w="0">
             <a:solidFill>
               <a:srgbClr val="5b9bd5"/>
             </a:solidFill>
@@ -10994,9 +11316,9 @@
         <p:grpSpPr>
           <a:xfrm>
             <a:off x="8183520" y="1858320"/>
-            <a:ext cx="2976120" cy="1851840"/>
+            <a:ext cx="2975760" cy="1851480"/>
             <a:chOff x="8183520" y="1858320"/>
-            <a:chExt cx="2976120" cy="1851840"/>
+            <a:chExt cx="2975760" cy="1851480"/>
           </a:xfrm>
         </p:grpSpPr>
         <p:pic>
@@ -11013,7 +11335,7 @@
           <p:spPr>
             <a:xfrm>
               <a:off x="8183520" y="2021400"/>
-              <a:ext cx="2976120" cy="1688760"/>
+              <a:ext cx="2975760" cy="1688400"/>
             </a:xfrm>
             <a:prstGeom prst="rect">
               <a:avLst/>
@@ -11038,7 +11360,7 @@
           <p:spPr>
             <a:xfrm>
               <a:off x="8183520" y="1858320"/>
-              <a:ext cx="2976120" cy="146880"/>
+              <a:ext cx="2975760" cy="146520"/>
             </a:xfrm>
             <a:prstGeom prst="rect">
               <a:avLst/>
@@ -11064,7 +11386,7 @@
         <p:spPr>
           <a:xfrm>
             <a:off x="4042440" y="1841760"/>
-            <a:ext cx="2976120" cy="2534040"/>
+            <a:ext cx="2975760" cy="2533680"/>
           </a:xfrm>
           <a:prstGeom prst="rect">
             <a:avLst/>
@@ -11072,7 +11394,7 @@
           <a:solidFill>
             <a:srgbClr val="ffffff"/>
           </a:solidFill>
-          <a:ln>
+          <a:ln w="0">
             <a:solidFill>
               <a:srgbClr val="ed7d31"/>
             </a:solidFill>
@@ -11088,64 +11410,7 @@
         <p:spPr>
           <a:xfrm>
             <a:off x="4042440" y="1295280"/>
-            <a:ext cx="2976120" cy="464400"/>
-          </a:xfrm>
-          <a:prstGeom prst="rect">
-            <a:avLst/>
-          </a:prstGeom>
-          <a:noFill/>
-          <a:ln w="0">
-            <a:noFill/>
-          </a:ln>
-        </p:spPr>
-        <p:style>
-          <a:lnRef idx="0"/>
-          <a:fillRef idx="0"/>
-          <a:effectRef idx="0"/>
-          <a:fontRef idx="minor"/>
-        </p:style>
-        <p:txBody>
-          <a:bodyPr anchor="t">
-            <a:spAutoFit/>
-          </a:bodyPr>
-          <a:p>
-            <a:pPr algn="ctr" defTabSz="914400">
-              <a:lnSpc>
-                <a:spcPct val="150000"/>
-              </a:lnSpc>
-            </a:pPr>
-            <a:r>
-              <a:rPr lang="fr-FR" sz="1800" b="1" u="none" strike="noStrike">
-                <a:solidFill>
-                  <a:schemeClr val="dk1"/>
-                </a:solidFill>
-                <a:effectLst/>
-                <a:uFillTx/>
-                <a:latin typeface="Calibri"/>
-              </a:rPr>
-              <a:t>Variables endogènes</a:t>
-            </a:r>
-            <a:endParaRPr lang="fr-FR" sz="1800" b="0" u="none" strike="noStrike">
-              <a:solidFill>
-                <a:srgbClr val="000000"/>
-              </a:solidFill>
-              <a:effectLst/>
-              <a:uFillTx/>
-              <a:latin typeface="Arial"/>
-            </a:endParaRPr>
-          </a:p>
-        </p:txBody>
-      </p:sp>
-      <p:sp>
-        <p:nvSpPr>
-          <p:cNvPr id="95" name="ZoneTexte 9"/>
-          <p:cNvSpPr/>
-          <p:nvPr/>
-        </p:nvSpPr>
-        <p:spPr>
-          <a:xfrm>
-            <a:off x="8183520" y="1295280"/>
-            <a:ext cx="2976120" cy="464400"/>
+            <a:ext cx="2975760" cy="464040"/>
           </a:xfrm>
           <a:prstGeom prst="rect">
             <a:avLst/>
@@ -11180,6 +11445,63 @@
                 <a:uFillTx/>
                 <a:latin typeface="Calibri"/>
               </a:rPr>
+              <a:t>Variables endogènes</a:t>
+            </a:r>
+            <a:endParaRPr lang="fr-FR" sz="1800" b="0" u="none" strike="noStrike">
+              <a:solidFill>
+                <a:srgbClr val="000000"/>
+              </a:solidFill>
+              <a:effectLst/>
+              <a:uFillTx/>
+              <a:latin typeface="Arial"/>
+            </a:endParaRPr>
+          </a:p>
+        </p:txBody>
+      </p:sp>
+      <p:sp>
+        <p:nvSpPr>
+          <p:cNvPr id="95" name="ZoneTexte 9"/>
+          <p:cNvSpPr/>
+          <p:nvPr/>
+        </p:nvSpPr>
+        <p:spPr>
+          <a:xfrm>
+            <a:off x="8183520" y="1295280"/>
+            <a:ext cx="2975760" cy="464040"/>
+          </a:xfrm>
+          <a:prstGeom prst="rect">
+            <a:avLst/>
+          </a:prstGeom>
+          <a:noFill/>
+          <a:ln w="0">
+            <a:noFill/>
+          </a:ln>
+        </p:spPr>
+        <p:style>
+          <a:lnRef idx="0"/>
+          <a:fillRef idx="0"/>
+          <a:effectRef idx="0"/>
+          <a:fontRef idx="minor"/>
+        </p:style>
+        <p:txBody>
+          <a:bodyPr lIns="90000" rIns="90000" tIns="45000" bIns="45000" anchor="t">
+            <a:spAutoFit/>
+          </a:bodyPr>
+          <a:p>
+            <a:pPr algn="ctr" defTabSz="914400">
+              <a:lnSpc>
+                <a:spcPct val="150000"/>
+              </a:lnSpc>
+            </a:pPr>
+            <a:r>
+              <a:rPr lang="fr-FR" sz="1800" b="1" u="none" strike="noStrike">
+                <a:solidFill>
+                  <a:schemeClr val="dk1"/>
+                </a:solidFill>
+                <a:effectLst/>
+                <a:uFillTx/>
+                <a:latin typeface="Calibri"/>
+              </a:rPr>
               <a:t>Variables explicatives</a:t>
             </a:r>
             <a:endParaRPr lang="fr-FR" sz="1800" b="0" u="none" strike="noStrike">
@@ -11202,7 +11524,7 @@
         <p:spPr>
           <a:xfrm>
             <a:off x="8235000" y="1850760"/>
-            <a:ext cx="2924640" cy="1929960"/>
+            <a:ext cx="2924280" cy="1929600"/>
           </a:xfrm>
           <a:prstGeom prst="rect">
             <a:avLst/>
@@ -11258,12 +11580,12 @@
         <p:spPr>
           <a:xfrm>
             <a:off x="1928880" y="2727000"/>
-            <a:ext cx="360" cy="966960"/>
+            <a:ext cx="720" cy="967320"/>
           </a:xfrm>
           <a:prstGeom prst="straightConnector1">
             <a:avLst/>
           </a:prstGeom>
-          <a:ln>
+          <a:ln w="0">
             <a:solidFill>
               <a:srgbClr val="5b9bd5"/>
             </a:solidFill>
@@ -11280,7 +11602,7 @@
         <p:spPr>
           <a:xfrm>
             <a:off x="704880" y="3788640"/>
-            <a:ext cx="2497320" cy="369000"/>
+            <a:ext cx="2496960" cy="368640"/>
           </a:xfrm>
           <a:prstGeom prst="rect">
             <a:avLst/>
@@ -11337,7 +11659,7 @@
         <p:spPr>
           <a:xfrm>
             <a:off x="3915360" y="5150880"/>
-            <a:ext cx="3230640" cy="338040"/>
+            <a:ext cx="3230280" cy="337680"/>
           </a:xfrm>
           <a:prstGeom prst="rect">
             <a:avLst/>
@@ -11354,7 +11676,7 @@
           <a:fontRef idx="minor"/>
         </p:style>
         <p:txBody>
-          <a:bodyPr anchor="t">
+          <a:bodyPr lIns="90000" rIns="90000" tIns="45000" bIns="45000" anchor="t">
             <a:spAutoFit/>
           </a:bodyPr>
           <a:p>
@@ -11407,7 +11729,7 @@
         </p:nvGraphicFramePr>
         <p:xfrm>
           <a:off x="7632360" y="4158000"/>
-          <a:ext cx="4455000" cy="2481840"/>
+          <a:ext cx="4454280" cy="2481840"/>
         </p:xfrm>
         <a:graphic>
           <a:graphicData uri="http://schemas.openxmlformats.org/drawingml/2006/table">
@@ -11458,8 +11780,9 @@
                       </a:solidFill>
                       <a:prstDash val="solid"/>
                     </a:lnL>
-                    <a:lnR>
+                    <a:lnR w="12240">
                       <a:noFill/>
+                      <a:prstDash val="solid"/>
                     </a:lnR>
                     <a:lnT w="12240">
                       <a:solidFill>
@@ -11511,11 +11834,13 @@
                     </a:p>
                   </a:txBody>
                   <a:tcPr anchor="ctr" marL="91440" marR="91440" marT="45720" marB="45720">
-                    <a:lnL>
+                    <a:lnL w="12240">
                       <a:noFill/>
+                      <a:prstDash val="solid"/>
                     </a:lnL>
-                    <a:lnR>
+                    <a:lnR w="12240">
                       <a:noFill/>
+                      <a:prstDash val="solid"/>
                     </a:lnR>
                     <a:lnT w="12240">
                       <a:solidFill>
@@ -11567,8 +11892,9 @@
                     </a:p>
                   </a:txBody>
                   <a:tcPr anchor="ctr" marL="91440" marR="91440" marT="45720" marB="45720">
-                    <a:lnL>
+                    <a:lnL w="12240">
                       <a:noFill/>
+                      <a:prstDash val="solid"/>
                     </a:lnL>
                     <a:lnR w="12240">
                       <a:solidFill>
@@ -11634,8 +11960,9 @@
                       </a:solidFill>
                       <a:prstDash val="solid"/>
                     </a:lnL>
-                    <a:lnR>
+                    <a:lnR w="12240">
                       <a:noFill/>
+                      <a:prstDash val="solid"/>
                     </a:lnR>
                     <a:lnT w="12240">
                       <a:solidFill>
@@ -11785,11 +12112,13 @@
                     </a:p>
                   </a:txBody>
                   <a:tcPr anchor="ctr" marL="91440" marR="91440" marT="45720" marB="45720">
-                    <a:lnL>
+                    <a:lnL w="12240">
                       <a:noFill/>
+                      <a:prstDash val="solid"/>
                     </a:lnL>
-                    <a:lnR>
+                    <a:lnR w="12240">
                       <a:noFill/>
+                      <a:prstDash val="solid"/>
                     </a:lnR>
                     <a:lnT w="12240">
                       <a:solidFill>
@@ -11841,8 +12170,9 @@
                     </a:p>
                   </a:txBody>
                   <a:tcPr anchor="ctr" marL="91440" marR="91440" marT="45720" marB="45720">
-                    <a:lnL>
+                    <a:lnL w="12240">
                       <a:noFill/>
+                      <a:prstDash val="solid"/>
                     </a:lnL>
                     <a:lnR w="12240">
                       <a:solidFill>
@@ -11908,8 +12238,9 @@
                       </a:solidFill>
                       <a:prstDash val="solid"/>
                     </a:lnL>
-                    <a:lnR>
+                    <a:lnR w="12240">
                       <a:noFill/>
+                      <a:prstDash val="solid"/>
                     </a:lnR>
                     <a:lnT w="12240">
                       <a:solidFill>
@@ -11997,11 +12328,13 @@
                     </a:p>
                   </a:txBody>
                   <a:tcPr anchor="ctr" marL="91440" marR="91440" marT="45720" marB="45720">
-                    <a:lnL>
+                    <a:lnL w="12240">
                       <a:noFill/>
+                      <a:prstDash val="solid"/>
                     </a:lnL>
-                    <a:lnR>
+                    <a:lnR w="12240">
                       <a:noFill/>
+                      <a:prstDash val="solid"/>
                     </a:lnR>
                     <a:lnT w="12240">
                       <a:solidFill>
@@ -12053,8 +12386,9 @@
                     </a:p>
                   </a:txBody>
                   <a:tcPr anchor="ctr" marL="91440" marR="91440" marT="45720" marB="45720">
-                    <a:lnL>
+                    <a:lnL w="12240">
                       <a:noFill/>
+                      <a:prstDash val="solid"/>
                     </a:lnL>
                     <a:lnR w="12240">
                       <a:solidFill>
@@ -12120,8 +12454,9 @@
                       </a:solidFill>
                       <a:prstDash val="solid"/>
                     </a:lnL>
-                    <a:lnR>
+                    <a:lnR w="12240">
                       <a:noFill/>
+                      <a:prstDash val="solid"/>
                     </a:lnR>
                     <a:lnT w="12240">
                       <a:solidFill>
@@ -12240,11 +12575,13 @@
                     </a:p>
                   </a:txBody>
                   <a:tcPr anchor="ctr" marL="91440" marR="91440" marT="45720" marB="45720">
-                    <a:lnL>
+                    <a:lnL w="12240">
                       <a:noFill/>
+                      <a:prstDash val="solid"/>
                     </a:lnL>
-                    <a:lnR>
+                    <a:lnR w="12240">
                       <a:noFill/>
+                      <a:prstDash val="solid"/>
                     </a:lnR>
                     <a:lnT w="12240">
                       <a:solidFill>
@@ -12296,8 +12633,9 @@
                     </a:p>
                   </a:txBody>
                   <a:tcPr anchor="ctr" marL="91440" marR="91440" marT="45720" marB="45720">
-                    <a:lnL>
+                    <a:lnL w="12240">
                       <a:noFill/>
+                      <a:prstDash val="solid"/>
                     </a:lnL>
                     <a:lnR w="12240">
                       <a:solidFill>
@@ -12336,12 +12674,12 @@
         <p:spPr>
           <a:xfrm>
             <a:off x="5530320" y="4534920"/>
-            <a:ext cx="360" cy="534240"/>
+            <a:ext cx="720" cy="534600"/>
           </a:xfrm>
           <a:prstGeom prst="straightConnector1">
             <a:avLst/>
           </a:prstGeom>
-          <a:ln>
+          <a:ln w="0">
             <a:solidFill>
               <a:srgbClr val="ed7d31"/>
             </a:solidFill>
@@ -12358,12 +12696,12 @@
         <p:spPr>
           <a:xfrm>
             <a:off x="9706680" y="3823560"/>
-            <a:ext cx="360" cy="316080"/>
+            <a:ext cx="720" cy="316440"/>
           </a:xfrm>
           <a:prstGeom prst="straightConnector1">
             <a:avLst/>
           </a:prstGeom>
-          <a:ln>
+          <a:ln w="0">
             <a:solidFill>
               <a:srgbClr val="70ad47"/>
             </a:solidFill>
@@ -12410,7 +12748,7 @@
         <p:spPr>
           <a:xfrm>
             <a:off x="3468960" y="263520"/>
-            <a:ext cx="8618400" cy="1569240"/>
+            <a:ext cx="8618040" cy="1568880"/>
           </a:xfrm>
           <a:prstGeom prst="rect">
             <a:avLst/>
@@ -12427,7 +12765,7 @@
           <a:fontRef idx="minor"/>
         </p:style>
         <p:txBody>
-          <a:bodyPr anchor="t">
+          <a:bodyPr lIns="90000" rIns="90000" tIns="45000" bIns="45000" anchor="t">
             <a:spAutoFit/>
           </a:bodyPr>
           <a:p>
@@ -12498,7 +12836,7 @@
         <p:spPr>
           <a:xfrm>
             <a:off x="216360" y="1345320"/>
-            <a:ext cx="11763360" cy="2003400"/>
+            <a:ext cx="11763000" cy="2003040"/>
           </a:xfrm>
           <a:prstGeom prst="rect">
             <a:avLst/>
@@ -12515,7 +12853,7 @@
           <a:fontRef idx="minor"/>
         </p:style>
         <p:txBody>
-          <a:bodyPr anchor="t">
+          <a:bodyPr lIns="90000" rIns="90000" tIns="45000" bIns="45000" anchor="t">
             <a:spAutoFit/>
           </a:bodyPr>
           <a:p>
@@ -12942,7 +13280,7 @@
         <p:spPr>
           <a:xfrm>
             <a:off x="213480" y="3122640"/>
-            <a:ext cx="11301480" cy="1938600"/>
+            <a:ext cx="11301120" cy="1938240"/>
           </a:xfrm>
           <a:prstGeom prst="rect">
             <a:avLst/>
@@ -12959,7 +13297,7 @@
           <a:fontRef idx="minor"/>
         </p:style>
         <p:txBody>
-          <a:bodyPr numCol="1" spcCol="0" horzOverflow="overflow" anchor="t">
+          <a:bodyPr numCol="1" spcCol="0" horzOverflow="overflow" lIns="90000" rIns="90000" tIns="45000" bIns="45000" anchor="t">
             <a:spAutoFit/>
           </a:bodyPr>
           <a:p>
@@ -13250,7 +13588,7 @@
         <p:spPr>
           <a:xfrm>
             <a:off x="213480" y="5059800"/>
-            <a:ext cx="11493720" cy="1661760"/>
+            <a:ext cx="11493360" cy="1661400"/>
           </a:xfrm>
           <a:prstGeom prst="rect">
             <a:avLst/>
@@ -13267,7 +13605,7 @@
           <a:fontRef idx="minor"/>
         </p:style>
         <p:txBody>
-          <a:bodyPr numCol="1" spcCol="0" horzOverflow="overflow" anchor="t">
+          <a:bodyPr numCol="1" spcCol="0" horzOverflow="overflow" lIns="90000" rIns="90000" tIns="45000" bIns="45000" anchor="t">
             <a:spAutoFit/>
           </a:bodyPr>
           <a:p>
@@ -13592,7 +13930,7 @@
         <p:spPr>
           <a:xfrm>
             <a:off x="3468960" y="263520"/>
-            <a:ext cx="8618400" cy="1569240"/>
+            <a:ext cx="8618040" cy="1568880"/>
           </a:xfrm>
           <a:prstGeom prst="rect">
             <a:avLst/>
@@ -13609,7 +13947,7 @@
           <a:fontRef idx="minor"/>
         </p:style>
         <p:txBody>
-          <a:bodyPr anchor="t">
+          <a:bodyPr lIns="90000" rIns="90000" tIns="45000" bIns="45000" anchor="t">
             <a:spAutoFit/>
           </a:bodyPr>
           <a:p>
@@ -13685,7 +14023,7 @@
         <p:spPr>
           <a:xfrm>
             <a:off x="631080" y="1407240"/>
-            <a:ext cx="2842920" cy="5184000"/>
+            <a:ext cx="2842560" cy="5183640"/>
           </a:xfrm>
           <a:prstGeom prst="rect">
             <a:avLst/>
@@ -13709,7 +14047,7 @@
         <p:spPr>
           <a:xfrm>
             <a:off x="5256720" y="1403640"/>
-            <a:ext cx="5668920" cy="4922640"/>
+            <a:ext cx="5668560" cy="4922280"/>
           </a:xfrm>
           <a:prstGeom prst="rect">
             <a:avLst/>
@@ -13759,7 +14097,7 @@
         <p:spPr>
           <a:xfrm>
             <a:off x="3468960" y="263520"/>
-            <a:ext cx="8618400" cy="1569240"/>
+            <a:ext cx="8618040" cy="1568880"/>
           </a:xfrm>
           <a:prstGeom prst="rect">
             <a:avLst/>
@@ -13776,7 +14114,7 @@
           <a:fontRef idx="minor"/>
         </p:style>
         <p:txBody>
-          <a:bodyPr anchor="t">
+          <a:bodyPr lIns="90000" rIns="90000" tIns="45000" bIns="45000" anchor="t">
             <a:spAutoFit/>
           </a:bodyPr>
           <a:p>
@@ -13847,7 +14185,7 @@
         <p:spPr>
           <a:xfrm>
             <a:off x="238680" y="1398960"/>
-            <a:ext cx="5503320" cy="5046480"/>
+            <a:ext cx="5502960" cy="5046120"/>
           </a:xfrm>
           <a:prstGeom prst="rect">
             <a:avLst/>
@@ -13864,7 +14202,7 @@
           <a:fontRef idx="minor"/>
         </p:style>
         <p:txBody>
-          <a:bodyPr anchor="t">
+          <a:bodyPr lIns="90000" rIns="90000" tIns="45000" bIns="45000" anchor="t">
             <a:spAutoFit/>
           </a:bodyPr>
           <a:p>
@@ -14283,7 +14621,7 @@
         <p:spPr>
           <a:xfrm>
             <a:off x="5828040" y="1403640"/>
-            <a:ext cx="5668920" cy="4922640"/>
+            <a:ext cx="5668560" cy="4922280"/>
           </a:xfrm>
           <a:prstGeom prst="rect">
             <a:avLst/>
